--- a/课件/题集刷题导航/第2章-线性表/第2章-线性表.pptx
+++ b/课件/题集刷题导航/第2章-线性表/第2章-线性表.pptx
@@ -1,25 +1,25 @@
 
 <file path=ppt/presentation.xml><?xml version="1.0" encoding="utf-8"?>
-<p:presentation xmlns:a="http://schemas.openxmlformats.org/drawingml/2006/main" xmlns:r="http://schemas.openxmlformats.org/officeDocument/2006/relationships" xmlns:p="http://schemas.openxmlformats.org/presentationml/2006/main" autoCompressPictures="0">
+<p:presentation xmlns:a="http://schemas.openxmlformats.org/drawingml/2006/main" xmlns:r="http://schemas.openxmlformats.org/officeDocument/2006/relationships" xmlns:p="http://schemas.openxmlformats.org/presentationml/2006/main" saveSubsetFonts="1" autoCompressPictures="0">
   <p:sldMasterIdLst>
     <p:sldMasterId id="2147483648" r:id="rId1"/>
   </p:sldMasterIdLst>
+  <p:sldIdLst>
+    <p:sldId id="256" r:id="rId2"/>
+    <p:sldId id="257" r:id="rId3"/>
+    <p:sldId id="258" r:id="rId4"/>
+    <p:sldId id="259" r:id="rId5"/>
+    <p:sldId id="260" r:id="rId6"/>
+    <p:sldId id="261" r:id="rId7"/>
+    <p:sldId id="262" r:id="rId8"/>
+    <p:sldId id="263" r:id="rId9"/>
+    <p:sldId id="264" r:id="rId10"/>
+  </p:sldIdLst>
   <p:notesMasterIdLst>
-    <p:notesMasterId r:id="rId4"/>
+    <p:notesMasterId r:id="rId11"/>
   </p:notesMasterIdLst>
-  <p:sldIdLst>
-    <p:sldId id="256" r:id="rId3"/>
-    <p:sldId id="257" r:id="rId5"/>
-    <p:sldId id="258" r:id="rId6"/>
-    <p:sldId id="259" r:id="rId7"/>
-    <p:sldId id="260" r:id="rId8"/>
-    <p:sldId id="261" r:id="rId9"/>
-    <p:sldId id="263" r:id="rId10"/>
-    <p:sldId id="262" r:id="rId11"/>
-    <p:sldId id="264" r:id="rId12"/>
-  </p:sldIdLst>
-  <p:sldSz cx="12191365" cy="6858000"/>
-  <p:notesSz cx="6858000" cy="12191365"/>
+  <p:sldSz cx="12191695" cy="6858000"/>
+  <p:notesSz cx="6858000" cy="12191695"/>
   <p:defaultTextStyle>
     <a:lvl1pPr marL="0" algn="l" defTabSz="914400" rtl="0" eaLnBrk="1" latinLnBrk="0" hangingPunct="1">
       <a:defRPr sz="1800" kern="1200">
@@ -197,6 +197,7 @@
           <a:p>
             <a:fld id="{5282F153-3F37-0F45-9E97-73ACFA13230C}" type="datetimeFigureOut">
               <a:rPr lang="en-US"/>
+              <a:t>7/23/19</a:t>
             </a:fld>
             <a:endParaRPr lang="en-US"/>
           </a:p>
@@ -263,7 +264,6 @@
               <a:rPr lang="en-US"/>
               <a:t>Click to edit Master text styles</a:t>
             </a:r>
-            <a:endParaRPr lang="en-US"/>
           </a:p>
           <a:p>
             <a:pPr lvl="1"/>
@@ -271,7 +271,6 @@
               <a:rPr lang="en-US"/>
               <a:t>Second level</a:t>
             </a:r>
-            <a:endParaRPr lang="en-US"/>
           </a:p>
           <a:p>
             <a:pPr lvl="2"/>
@@ -279,7 +278,6 @@
               <a:rPr lang="en-US"/>
               <a:t>Third level</a:t>
             </a:r>
-            <a:endParaRPr lang="en-US"/>
           </a:p>
           <a:p>
             <a:pPr lvl="3"/>
@@ -287,7 +285,6 @@
               <a:rPr lang="en-US"/>
               <a:t>Fourth level</a:t>
             </a:r>
-            <a:endParaRPr lang="en-US"/>
           </a:p>
           <a:p>
             <a:pPr lvl="4"/>
@@ -295,7 +292,6 @@
               <a:rPr lang="en-US"/>
               <a:t>Fifth level</a:t>
             </a:r>
-            <a:endParaRPr lang="en-US"/>
           </a:p>
         </p:txBody>
       </p:sp>
@@ -359,12 +355,18 @@
           <a:p>
             <a:fld id="{CE5E9CC1-C706-0F49-92D6-E571CC5EEA8F}" type="slidenum">
               <a:rPr lang="en-US"/>
+              <a:t>‹#›</a:t>
             </a:fld>
             <a:endParaRPr lang="en-US"/>
           </a:p>
         </p:txBody>
       </p:sp>
     </p:spTree>
+    <p:extLst>
+      <p:ext uri="{BB962C8B-B14F-4D97-AF65-F5344CB8AC3E}">
+        <p14:creationId xmlns:p14="http://schemas.microsoft.com/office/powerpoint/2010/main" val="1024086991"/>
+      </p:ext>
+    </p:extLst>
   </p:cSld>
   <p:clrMap bg1="lt1" tx1="dk1" bg2="lt2" tx2="dk2" accent1="accent1" accent2="accent2" accent3="accent3" accent4="accent4" accent5="accent5" accent6="accent6" hlink="hlink" folHlink="folHlink"/>
   <p:notesStyle>
@@ -506,6 +508,10 @@
           <a:bodyPr/>
           <a:lstStyle/>
           <a:p>
+            <a:r>
+              <a:rPr lang="en-US" dirty="0"/>
+              <a:t/>
+            </a:r>
             <a:endParaRPr lang="en-US" dirty="0"/>
           </a:p>
         </p:txBody>
@@ -527,12 +533,18 @@
           <a:p>
             <a:fld id="{F7021451-1387-4CA6-816F-3879F97B5CBC}" type="slidenum">
               <a:rPr lang="en-US"/>
+              <a:t>1</a:t>
             </a:fld>
             <a:endParaRPr lang="en-US"/>
           </a:p>
         </p:txBody>
       </p:sp>
     </p:spTree>
+    <p:extLst>
+      <p:ext uri="{BB962C8B-B14F-4D97-AF65-F5344CB8AC3E}">
+        <p14:creationId xmlns:p14="http://schemas.microsoft.com/office/powerpoint/2010/main" val="1024086991"/>
+      </p:ext>
+    </p:extLst>
   </p:cSld>
   <p:clrMapOvr>
     <a:masterClrMapping/>
@@ -584,6 +596,10 @@
           <a:bodyPr/>
           <a:lstStyle/>
           <a:p>
+            <a:r>
+              <a:rPr lang="en-US" dirty="0"/>
+              <a:t/>
+            </a:r>
             <a:endParaRPr lang="en-US" dirty="0"/>
           </a:p>
         </p:txBody>
@@ -605,12 +621,18 @@
           <a:p>
             <a:fld id="{F7021451-1387-4CA6-816F-3879F97B5CBC}" type="slidenum">
               <a:rPr lang="en-US"/>
+              <a:t>2</a:t>
             </a:fld>
             <a:endParaRPr lang="en-US"/>
           </a:p>
         </p:txBody>
       </p:sp>
     </p:spTree>
+    <p:extLst>
+      <p:ext uri="{BB962C8B-B14F-4D97-AF65-F5344CB8AC3E}">
+        <p14:creationId xmlns:p14="http://schemas.microsoft.com/office/powerpoint/2010/main" val="1024086991"/>
+      </p:ext>
+    </p:extLst>
   </p:cSld>
   <p:clrMapOvr>
     <a:masterClrMapping/>
@@ -662,6 +684,10 @@
           <a:bodyPr/>
           <a:lstStyle/>
           <a:p>
+            <a:r>
+              <a:rPr lang="en-US" dirty="0"/>
+              <a:t/>
+            </a:r>
             <a:endParaRPr lang="en-US" dirty="0"/>
           </a:p>
         </p:txBody>
@@ -683,12 +709,18 @@
           <a:p>
             <a:fld id="{F7021451-1387-4CA6-816F-3879F97B5CBC}" type="slidenum">
               <a:rPr lang="en-US"/>
+              <a:t>3</a:t>
             </a:fld>
             <a:endParaRPr lang="en-US"/>
           </a:p>
         </p:txBody>
       </p:sp>
     </p:spTree>
+    <p:extLst>
+      <p:ext uri="{BB962C8B-B14F-4D97-AF65-F5344CB8AC3E}">
+        <p14:creationId xmlns:p14="http://schemas.microsoft.com/office/powerpoint/2010/main" val="1024086991"/>
+      </p:ext>
+    </p:extLst>
   </p:cSld>
   <p:clrMapOvr>
     <a:masterClrMapping/>
@@ -740,6 +772,10 @@
           <a:bodyPr/>
           <a:lstStyle/>
           <a:p>
+            <a:r>
+              <a:rPr lang="en-US" dirty="0"/>
+              <a:t/>
+            </a:r>
             <a:endParaRPr lang="en-US" dirty="0"/>
           </a:p>
         </p:txBody>
@@ -761,12 +797,18 @@
           <a:p>
             <a:fld id="{F7021451-1387-4CA6-816F-3879F97B5CBC}" type="slidenum">
               <a:rPr lang="en-US"/>
+              <a:t>4</a:t>
             </a:fld>
             <a:endParaRPr lang="en-US"/>
           </a:p>
         </p:txBody>
       </p:sp>
     </p:spTree>
+    <p:extLst>
+      <p:ext uri="{BB962C8B-B14F-4D97-AF65-F5344CB8AC3E}">
+        <p14:creationId xmlns:p14="http://schemas.microsoft.com/office/powerpoint/2010/main" val="1024086991"/>
+      </p:ext>
+    </p:extLst>
   </p:cSld>
   <p:clrMapOvr>
     <a:masterClrMapping/>
@@ -818,6 +860,10 @@
           <a:bodyPr/>
           <a:lstStyle/>
           <a:p>
+            <a:r>
+              <a:rPr lang="en-US" dirty="0"/>
+              <a:t/>
+            </a:r>
             <a:endParaRPr lang="en-US" dirty="0"/>
           </a:p>
         </p:txBody>
@@ -839,12 +885,18 @@
           <a:p>
             <a:fld id="{F7021451-1387-4CA6-816F-3879F97B5CBC}" type="slidenum">
               <a:rPr lang="en-US"/>
+              <a:t>5</a:t>
             </a:fld>
             <a:endParaRPr lang="en-US"/>
           </a:p>
         </p:txBody>
       </p:sp>
     </p:spTree>
+    <p:extLst>
+      <p:ext uri="{BB962C8B-B14F-4D97-AF65-F5344CB8AC3E}">
+        <p14:creationId xmlns:p14="http://schemas.microsoft.com/office/powerpoint/2010/main" val="1024086991"/>
+      </p:ext>
+    </p:extLst>
   </p:cSld>
   <p:clrMapOvr>
     <a:masterClrMapping/>
@@ -896,6 +948,10 @@
           <a:bodyPr/>
           <a:lstStyle/>
           <a:p>
+            <a:r>
+              <a:rPr lang="en-US" dirty="0"/>
+              <a:t/>
+            </a:r>
             <a:endParaRPr lang="en-US" dirty="0"/>
           </a:p>
         </p:txBody>
@@ -917,12 +973,18 @@
           <a:p>
             <a:fld id="{F7021451-1387-4CA6-816F-3879F97B5CBC}" type="slidenum">
               <a:rPr lang="en-US"/>
+              <a:t>6</a:t>
             </a:fld>
             <a:endParaRPr lang="en-US"/>
           </a:p>
         </p:txBody>
       </p:sp>
     </p:spTree>
+    <p:extLst>
+      <p:ext uri="{BB962C8B-B14F-4D97-AF65-F5344CB8AC3E}">
+        <p14:creationId xmlns:p14="http://schemas.microsoft.com/office/powerpoint/2010/main" val="1024086991"/>
+      </p:ext>
+    </p:extLst>
   </p:cSld>
   <p:clrMapOvr>
     <a:masterClrMapping/>
@@ -974,6 +1036,10 @@
           <a:bodyPr/>
           <a:lstStyle/>
           <a:p>
+            <a:r>
+              <a:rPr lang="en-US" dirty="0"/>
+              <a:t/>
+            </a:r>
             <a:endParaRPr lang="en-US" dirty="0"/>
           </a:p>
         </p:txBody>
@@ -995,12 +1061,18 @@
           <a:p>
             <a:fld id="{F7021451-1387-4CA6-816F-3879F97B5CBC}" type="slidenum">
               <a:rPr lang="en-US"/>
+              <a:t>7</a:t>
             </a:fld>
             <a:endParaRPr lang="en-US"/>
           </a:p>
         </p:txBody>
       </p:sp>
     </p:spTree>
+    <p:extLst>
+      <p:ext uri="{BB962C8B-B14F-4D97-AF65-F5344CB8AC3E}">
+        <p14:creationId xmlns:p14="http://schemas.microsoft.com/office/powerpoint/2010/main" val="1024086991"/>
+      </p:ext>
+    </p:extLst>
   </p:cSld>
   <p:clrMapOvr>
     <a:masterClrMapping/>
@@ -1052,6 +1124,10 @@
           <a:bodyPr/>
           <a:lstStyle/>
           <a:p>
+            <a:r>
+              <a:rPr lang="en-US" dirty="0"/>
+              <a:t/>
+            </a:r>
             <a:endParaRPr lang="en-US" dirty="0"/>
           </a:p>
         </p:txBody>
@@ -1073,12 +1149,18 @@
           <a:p>
             <a:fld id="{F7021451-1387-4CA6-816F-3879F97B5CBC}" type="slidenum">
               <a:rPr lang="en-US"/>
+              <a:t>8</a:t>
             </a:fld>
             <a:endParaRPr lang="en-US"/>
           </a:p>
         </p:txBody>
       </p:sp>
     </p:spTree>
+    <p:extLst>
+      <p:ext uri="{BB962C8B-B14F-4D97-AF65-F5344CB8AC3E}">
+        <p14:creationId xmlns:p14="http://schemas.microsoft.com/office/powerpoint/2010/main" val="1024086991"/>
+      </p:ext>
+    </p:extLst>
   </p:cSld>
   <p:clrMapOvr>
     <a:masterClrMapping/>
@@ -1130,6 +1212,10 @@
           <a:bodyPr/>
           <a:lstStyle/>
           <a:p>
+            <a:r>
+              <a:rPr lang="en-US" dirty="0"/>
+              <a:t/>
+            </a:r>
             <a:endParaRPr lang="en-US" dirty="0"/>
           </a:p>
         </p:txBody>
@@ -1151,12 +1237,18 @@
           <a:p>
             <a:fld id="{F7021451-1387-4CA6-816F-3879F97B5CBC}" type="slidenum">
               <a:rPr lang="en-US"/>
+              <a:t>9</a:t>
             </a:fld>
             <a:endParaRPr lang="en-US"/>
           </a:p>
         </p:txBody>
       </p:sp>
     </p:spTree>
+    <p:extLst>
+      <p:ext uri="{BB962C8B-B14F-4D97-AF65-F5344CB8AC3E}">
+        <p14:creationId xmlns:p14="http://schemas.microsoft.com/office/powerpoint/2010/main" val="1024086991"/>
+      </p:ext>
+    </p:extLst>
   </p:cSld>
   <p:clrMapOvr>
     <a:masterClrMapping/>
@@ -1197,11 +1289,6 @@
 <file path=ppt/slideMasters/slideMaster1.xml><?xml version="1.0" encoding="utf-8"?>
 <p:sldMaster xmlns:a="http://schemas.openxmlformats.org/drawingml/2006/main" xmlns:r="http://schemas.openxmlformats.org/officeDocument/2006/relationships" xmlns:p="http://schemas.openxmlformats.org/presentationml/2006/main">
   <p:cSld>
-    <p:bg>
-      <p:bgRef idx="1001">
-        <a:schemeClr val="bg1"/>
-      </p:bgRef>
-    </p:bg>
     <p:spTree>
       <p:nvGrpSpPr>
         <p:cNvPr id="1" name=""/>
@@ -1245,7 +1332,7 @@
         <a:spcBef>
           <a:spcPct val="20000"/>
         </a:spcBef>
-        <a:buFont typeface="Arial" panose="020B0604020202020204" pitchFamily="34" charset="0"/>
+        <a:buFont typeface="Arial" pitchFamily="34" charset="0"/>
         <a:buChar char="•"/>
         <a:defRPr sz="3200" kern="1200">
           <a:solidFill>
@@ -1260,7 +1347,7 @@
         <a:spcBef>
           <a:spcPct val="20000"/>
         </a:spcBef>
-        <a:buFont typeface="Arial" panose="020B0604020202020204" pitchFamily="34" charset="0"/>
+        <a:buFont typeface="Arial" pitchFamily="34" charset="0"/>
         <a:buChar char="–"/>
         <a:defRPr sz="2800" kern="1200">
           <a:solidFill>
@@ -1275,7 +1362,7 @@
         <a:spcBef>
           <a:spcPct val="20000"/>
         </a:spcBef>
-        <a:buFont typeface="Arial" panose="020B0604020202020204" pitchFamily="34" charset="0"/>
+        <a:buFont typeface="Arial" pitchFamily="34" charset="0"/>
         <a:buChar char="•"/>
         <a:defRPr sz="2400" kern="1200">
           <a:solidFill>
@@ -1290,7 +1377,7 @@
         <a:spcBef>
           <a:spcPct val="20000"/>
         </a:spcBef>
-        <a:buFont typeface="Arial" panose="020B0604020202020204" pitchFamily="34" charset="0"/>
+        <a:buFont typeface="Arial" pitchFamily="34" charset="0"/>
         <a:buChar char="–"/>
         <a:defRPr sz="2000" kern="1200">
           <a:solidFill>
@@ -1305,7 +1392,7 @@
         <a:spcBef>
           <a:spcPct val="20000"/>
         </a:spcBef>
-        <a:buFont typeface="Arial" panose="020B0604020202020204" pitchFamily="34" charset="0"/>
+        <a:buFont typeface="Arial" pitchFamily="34" charset="0"/>
         <a:buChar char="»"/>
         <a:defRPr sz="2000" kern="1200">
           <a:solidFill>
@@ -1320,7 +1407,7 @@
         <a:spcBef>
           <a:spcPct val="20000"/>
         </a:spcBef>
-        <a:buFont typeface="Arial" panose="020B0604020202020204" pitchFamily="34" charset="0"/>
+        <a:buFont typeface="Arial" pitchFamily="34" charset="0"/>
         <a:buChar char="•"/>
         <a:defRPr sz="2000" kern="1200">
           <a:solidFill>
@@ -1335,7 +1422,7 @@
         <a:spcBef>
           <a:spcPct val="20000"/>
         </a:spcBef>
-        <a:buFont typeface="Arial" panose="020B0604020202020204" pitchFamily="34" charset="0"/>
+        <a:buFont typeface="Arial" pitchFamily="34" charset="0"/>
         <a:buChar char="•"/>
         <a:defRPr sz="2000" kern="1200">
           <a:solidFill>
@@ -1350,7 +1437,7 @@
         <a:spcBef>
           <a:spcPct val="20000"/>
         </a:spcBef>
-        <a:buFont typeface="Arial" panose="020B0604020202020204" pitchFamily="34" charset="0"/>
+        <a:buFont typeface="Arial" pitchFamily="34" charset="0"/>
         <a:buChar char="•"/>
         <a:defRPr sz="2000" kern="1200">
           <a:solidFill>
@@ -1365,7 +1452,7 @@
         <a:spcBef>
           <a:spcPct val="20000"/>
         </a:spcBef>
-        <a:buFont typeface="Arial" panose="020B0604020202020204" pitchFamily="34" charset="0"/>
+        <a:buFont typeface="Arial" pitchFamily="34" charset="0"/>
         <a:buChar char="•"/>
         <a:defRPr sz="2000" kern="1200">
           <a:solidFill>
@@ -1478,7 +1565,7 @@
 
 <file path=ppt/slides/slide1.xml><?xml version="1.0" encoding="utf-8"?>
 <p:sld xmlns:a="http://schemas.openxmlformats.org/drawingml/2006/main" xmlns:r="http://schemas.openxmlformats.org/officeDocument/2006/relationships" xmlns:p="http://schemas.openxmlformats.org/presentationml/2006/main">
-  <p:cSld>
+  <p:cSld name="Slide 1">
     <p:bg>
       <p:bgPr>
         <a:blipFill dpi="0" rotWithShape="1">
@@ -1522,12 +1609,13 @@
             <a:avLst/>
           </a:prstGeom>
           <a:noFill/>
+          <a:ln/>
         </p:spPr>
         <p:txBody>
           <a:bodyPr wrap="square" rtlCol="0" anchor="ctr"/>
           <a:lstStyle/>
           <a:p>
-            <a:pPr marL="0" indent="0" algn="r">
+            <a:pPr algn="r" indent="0" marL="0">
               <a:buNone/>
             </a:pPr>
             <a:r>
@@ -1535,9 +1623,9 @@
                 <a:solidFill>
                   <a:srgbClr val="8A9099"/>
                 </a:solidFill>
-                <a:latin typeface="微软雅黑" panose="020B0503020204020204" pitchFamily="34" charset="-122"/>
-                <a:ea typeface="微软雅黑" panose="020B0503020204020204" pitchFamily="34" charset="-122"/>
-                <a:cs typeface="微软雅黑" panose="020B0503020204020204" pitchFamily="34" charset="-120"/>
+                <a:latin typeface="微软雅黑" pitchFamily="34" charset="0"/>
+                <a:ea typeface="微软雅黑" pitchFamily="34" charset="-122"/>
+                <a:cs typeface="微软雅黑" pitchFamily="34" charset="-120"/>
               </a:rPr>
               <a:t>1 / 9</a:t>
             </a:r>
@@ -1560,12 +1648,13 @@
             <a:avLst/>
           </a:prstGeom>
           <a:noFill/>
+          <a:ln/>
         </p:spPr>
         <p:txBody>
           <a:bodyPr wrap="square" rtlCol="0" anchor="ctr"/>
           <a:lstStyle/>
           <a:p>
-            <a:pPr marL="0" indent="0" algn="ctr">
+            <a:pPr algn="ctr" indent="0" marL="0">
               <a:buNone/>
             </a:pPr>
             <a:r>
@@ -1573,9 +1662,9 @@
                 <a:solidFill>
                   <a:srgbClr val="1F4E9C"/>
                 </a:solidFill>
-                <a:latin typeface="微软雅黑" panose="020B0503020204020204" pitchFamily="34" charset="-122"/>
-                <a:ea typeface="微软雅黑" panose="020B0503020204020204" pitchFamily="34" charset="-122"/>
-                <a:cs typeface="微软雅黑" panose="020B0503020204020204" pitchFamily="34" charset="-120"/>
+                <a:latin typeface="微软雅黑" pitchFamily="34" charset="0"/>
+                <a:ea typeface="微软雅黑" pitchFamily="34" charset="-122"/>
+                <a:cs typeface="微软雅黑" pitchFamily="34" charset="-120"/>
               </a:rPr>
               <a:t>重邮考研802 数据结构</a:t>
             </a:r>
@@ -1598,12 +1687,13 @@
             <a:avLst/>
           </a:prstGeom>
           <a:noFill/>
+          <a:ln/>
         </p:spPr>
         <p:txBody>
           <a:bodyPr wrap="square" rtlCol="0" anchor="ctr"/>
           <a:lstStyle/>
           <a:p>
-            <a:pPr marL="0" indent="0" algn="ctr">
+            <a:pPr algn="ctr" indent="0" marL="0">
               <a:buNone/>
             </a:pPr>
             <a:r>
@@ -1611,9 +1701,9 @@
                 <a:solidFill>
                   <a:srgbClr val="1F2329"/>
                 </a:solidFill>
-                <a:latin typeface="微软雅黑" panose="020B0503020204020204" pitchFamily="34" charset="-122"/>
-                <a:ea typeface="微软雅黑" panose="020B0503020204020204" pitchFamily="34" charset="-122"/>
-                <a:cs typeface="微软雅黑" panose="020B0503020204020204" pitchFamily="34" charset="-120"/>
+                <a:latin typeface="微软雅黑" pitchFamily="34" charset="0"/>
+                <a:ea typeface="微软雅黑" pitchFamily="34" charset="-122"/>
+                <a:cs typeface="微软雅黑" pitchFamily="34" charset="-120"/>
               </a:rPr>
               <a:t>习题集题目勾画 · 第2章 线性表</a:t>
             </a:r>
@@ -1636,12 +1726,13 @@
             <a:avLst/>
           </a:prstGeom>
           <a:noFill/>
+          <a:ln/>
         </p:spPr>
         <p:txBody>
           <a:bodyPr wrap="square" rtlCol="0" anchor="ctr"/>
           <a:lstStyle/>
           <a:p>
-            <a:pPr marL="0" indent="0" algn="ctr">
+            <a:pPr algn="ctr" indent="0" marL="0">
               <a:buNone/>
             </a:pPr>
             <a:r>
@@ -1649,9 +1740,9 @@
                 <a:solidFill>
                   <a:srgbClr val="1F2329"/>
                 </a:solidFill>
-                <a:latin typeface="微软雅黑" panose="020B0503020204020204" pitchFamily="34" charset="-122"/>
-                <a:ea typeface="微软雅黑" panose="020B0503020204020204" pitchFamily="34" charset="-122"/>
-                <a:cs typeface="微软雅黑" panose="020B0503020204020204" pitchFamily="34" charset="-120"/>
+                <a:latin typeface="微软雅黑" pitchFamily="34" charset="0"/>
+                <a:ea typeface="微软雅黑" pitchFamily="34" charset="-122"/>
+                <a:cs typeface="微软雅黑" pitchFamily="34" charset="-120"/>
               </a:rPr>
               <a:t>严蔚敏《数据结构题集（第2版）》</a:t>
             </a:r>
@@ -1674,12 +1765,13 @@
             <a:avLst/>
           </a:prstGeom>
           <a:noFill/>
+          <a:ln/>
         </p:spPr>
         <p:txBody>
           <a:bodyPr wrap="square" rtlCol="0" anchor="ctr"/>
           <a:lstStyle/>
           <a:p>
-            <a:pPr marL="0" indent="0" algn="ctr">
+            <a:pPr algn="ctr" indent="0" marL="0">
               <a:buNone/>
             </a:pPr>
             <a:r>
@@ -1687,9 +1779,9 @@
                 <a:solidFill>
                   <a:srgbClr val="8A9099"/>
                 </a:solidFill>
-                <a:latin typeface="微软雅黑" panose="020B0503020204020204" pitchFamily="34" charset="-122"/>
-                <a:ea typeface="微软雅黑" panose="020B0503020204020204" pitchFamily="34" charset="-122"/>
-                <a:cs typeface="微软雅黑" panose="020B0503020204020204" pitchFamily="34" charset="-120"/>
+                <a:latin typeface="微软雅黑" pitchFamily="34" charset="0"/>
+                <a:ea typeface="微软雅黑" pitchFamily="34" charset="-122"/>
+                <a:cs typeface="微软雅黑" pitchFamily="34" charset="-120"/>
               </a:rPr>
               <a:t>依据：802考情与2020—2026真题 · 主讲：牙膏学长</a:t>
             </a:r>
@@ -1707,7 +1799,7 @@
 
 <file path=ppt/slides/slide2.xml><?xml version="1.0" encoding="utf-8"?>
 <p:sld xmlns:a="http://schemas.openxmlformats.org/drawingml/2006/main" xmlns:r="http://schemas.openxmlformats.org/officeDocument/2006/relationships" xmlns:p="http://schemas.openxmlformats.org/presentationml/2006/main">
-  <p:cSld>
+  <p:cSld name="Slide 2">
     <p:bg>
       <p:bgPr>
         <a:blipFill dpi="0" rotWithShape="1">
@@ -1751,12 +1843,13 @@
             <a:avLst/>
           </a:prstGeom>
           <a:noFill/>
+          <a:ln/>
         </p:spPr>
         <p:txBody>
           <a:bodyPr wrap="square" rtlCol="0" anchor="ctr"/>
           <a:lstStyle/>
           <a:p>
-            <a:pPr marL="0" indent="0" algn="r">
+            <a:pPr algn="r" indent="0" marL="0">
               <a:buNone/>
             </a:pPr>
             <a:r>
@@ -1764,9 +1857,9 @@
                 <a:solidFill>
                   <a:srgbClr val="8A9099"/>
                 </a:solidFill>
-                <a:latin typeface="微软雅黑" panose="020B0503020204020204" pitchFamily="34" charset="-122"/>
-                <a:ea typeface="微软雅黑" panose="020B0503020204020204" pitchFamily="34" charset="-122"/>
-                <a:cs typeface="微软雅黑" panose="020B0503020204020204" pitchFamily="34" charset="-120"/>
+                <a:latin typeface="微软雅黑" pitchFamily="34" charset="0"/>
+                <a:ea typeface="微软雅黑" pitchFamily="34" charset="-122"/>
+                <a:cs typeface="微软雅黑" pitchFamily="34" charset="-120"/>
               </a:rPr>
               <a:t>2 / 9</a:t>
             </a:r>
@@ -1789,12 +1882,13 @@
             <a:avLst/>
           </a:prstGeom>
           <a:noFill/>
+          <a:ln/>
         </p:spPr>
         <p:txBody>
           <a:bodyPr wrap="square" rtlCol="0" anchor="ctr"/>
           <a:lstStyle/>
           <a:p>
-            <a:pPr marL="0" indent="0" algn="l">
+            <a:pPr algn="l" indent="0" marL="0">
               <a:buNone/>
             </a:pPr>
             <a:r>
@@ -1802,9 +1896,9 @@
                 <a:solidFill>
                   <a:srgbClr val="1F4E9C"/>
                 </a:solidFill>
-                <a:latin typeface="微软雅黑" panose="020B0503020204020204" pitchFamily="34" charset="-122"/>
-                <a:ea typeface="微软雅黑" panose="020B0503020204020204" pitchFamily="34" charset="-122"/>
-                <a:cs typeface="微软雅黑" panose="020B0503020204020204" pitchFamily="34" charset="-120"/>
+                <a:latin typeface="微软雅黑" pitchFamily="34" charset="0"/>
+                <a:ea typeface="微软雅黑" pitchFamily="34" charset="-122"/>
+                <a:cs typeface="微软雅黑" pitchFamily="34" charset="-120"/>
               </a:rPr>
               <a:t>本章勾画总览</a:t>
             </a:r>
@@ -1827,12 +1921,13 @@
             <a:avLst/>
           </a:prstGeom>
           <a:noFill/>
+          <a:ln/>
         </p:spPr>
         <p:txBody>
           <a:bodyPr wrap="square" rtlCol="0" anchor="ctr"/>
           <a:lstStyle/>
           <a:p>
-            <a:pPr marL="0" indent="0" algn="l">
+            <a:pPr algn="l" indent="0" marL="0">
               <a:buNone/>
             </a:pPr>
             <a:r>
@@ -1840,9 +1935,9 @@
                 <a:solidFill>
                   <a:srgbClr val="1F2329"/>
                 </a:solidFill>
-                <a:latin typeface="微软雅黑" panose="020B0503020204020204" pitchFamily="34" charset="-122"/>
-                <a:ea typeface="微软雅黑" panose="020B0503020204020204" pitchFamily="34" charset="-122"/>
-                <a:cs typeface="微软雅黑" panose="020B0503020204020204" pitchFamily="34" charset="-120"/>
+                <a:latin typeface="微软雅黑" pitchFamily="34" charset="0"/>
+                <a:ea typeface="微软雅黑" pitchFamily="34" charset="-122"/>
+                <a:cs typeface="微软雅黑" pitchFamily="34" charset="-120"/>
               </a:rPr>
               <a:t>第2章三档题量与用法</a:t>
             </a:r>
@@ -1852,15 +1947,21 @@
       </p:sp>
       <p:graphicFrame>
         <p:nvGraphicFramePr>
-          <p:cNvPr id="5" name="Table 0"/>
+          <p:cNvPr id="3" name="Table 0"/>
           <p:cNvGraphicFramePr>
             <a:graphicFrameLocks noGrp="1"/>
           </p:cNvGraphicFramePr>
-          <p:nvPr/>
+          <p:nvPr>
+            <p:extLst>
+              <p:ext uri="{D42A27DB-BD31-4B8C-83A1-F6EECF244321}">
+                <p14:modId xmlns:p14="http://schemas.microsoft.com/office/powerpoint/2010/main" val="1579011935"/>
+              </p:ext>
+            </p:extLst>
+          </p:nvPr>
         </p:nvGraphicFramePr>
         <p:xfrm>
           <a:off x="822960" y="2395728"/>
-          <a:ext cx="10545776" cy="1682496"/>
+          <a:ext cx="10545775" cy="914400"/>
         </p:xfrm>
         <a:graphic>
           <a:graphicData uri="http://schemas.openxmlformats.org/drawingml/2006/table">
@@ -1878,7 +1979,7 @@
                     <a:bodyPr/>
                     <a:lstStyle/>
                     <a:p>
-                      <a:pPr marL="0" indent="0" algn="ctr">
+                      <a:pPr algn="ctr" indent="0" marL="0">
                         <a:buNone/>
                       </a:pPr>
                       <a:r>
@@ -1886,20 +1987,20 @@
                           <a:solidFill>
                             <a:srgbClr val="1F4E9C"/>
                           </a:solidFill>
-                          <a:latin typeface="微软雅黑" panose="020B0503020204020204" pitchFamily="34" charset="-122"/>
-                          <a:ea typeface="微软雅黑" panose="020B0503020204020204" pitchFamily="34" charset="-122"/>
-                          <a:cs typeface="微软雅黑" panose="020B0503020204020204" pitchFamily="34" charset="-120"/>
+                          <a:latin typeface="微软雅黑" pitchFamily="34" charset="0"/>
+                          <a:ea typeface="微软雅黑" pitchFamily="34" charset="-122"/>
+                          <a:cs typeface="微软雅黑" pitchFamily="34" charset="-120"/>
                         </a:rPr>
                         <a:t>方向</a:t>
                       </a:r>
                       <a:endParaRPr lang="en-US" sz="1500" dirty="0">
-                        <a:latin typeface="微软雅黑" panose="020B0503020204020204" pitchFamily="34" charset="-122"/>
-                        <a:ea typeface="微软雅黑" panose="020B0503020204020204" pitchFamily="34" charset="-122"/>
-                        <a:cs typeface="微软雅黑" panose="020B0503020204020204" pitchFamily="34" charset="-122"/>
+                        <a:latin typeface="微软雅黑" charset="0"/>
+                        <a:ea typeface="微软雅黑" charset="0"/>
+                        <a:cs typeface="微软雅黑" charset="0"/>
                       </a:endParaRPr>
                     </a:p>
                   </a:txBody>
-                  <a:tcPr anchor="ctr">
+                  <a:tcPr marL="91440" marR="91440" marT="45720" marB="45720" anchor="ctr">
                     <a:lnL w="9525" cap="flat" cmpd="sng" algn="ctr">
                       <a:solidFill>
                         <a:srgbClr val="D8DBE0"/>
@@ -1946,7 +2047,7 @@
                     <a:bodyPr/>
                     <a:lstStyle/>
                     <a:p>
-                      <a:pPr marL="0" indent="0" algn="ctr">
+                      <a:pPr algn="ctr" indent="0" marL="0">
                         <a:buNone/>
                       </a:pPr>
                       <a:r>
@@ -1954,20 +2055,20 @@
                           <a:solidFill>
                             <a:srgbClr val="1F4E9C"/>
                           </a:solidFill>
-                          <a:latin typeface="微软雅黑" panose="020B0503020204020204" pitchFamily="34" charset="-122"/>
-                          <a:ea typeface="微软雅黑" panose="020B0503020204020204" pitchFamily="34" charset="-122"/>
-                          <a:cs typeface="微软雅黑" panose="020B0503020204020204" pitchFamily="34" charset="-120"/>
+                          <a:latin typeface="微软雅黑" pitchFamily="34" charset="0"/>
+                          <a:ea typeface="微软雅黑" pitchFamily="34" charset="-122"/>
+                          <a:cs typeface="微软雅黑" pitchFamily="34" charset="-120"/>
                         </a:rPr>
                         <a:t>题数</a:t>
                       </a:r>
                       <a:endParaRPr lang="en-US" sz="1500" dirty="0">
-                        <a:latin typeface="微软雅黑" panose="020B0503020204020204" pitchFamily="34" charset="-122"/>
-                        <a:ea typeface="微软雅黑" panose="020B0503020204020204" pitchFamily="34" charset="-122"/>
-                        <a:cs typeface="微软雅黑" panose="020B0503020204020204" pitchFamily="34" charset="-122"/>
+                        <a:latin typeface="微软雅黑" charset="0"/>
+                        <a:ea typeface="微软雅黑" charset="0"/>
+                        <a:cs typeface="微软雅黑" charset="0"/>
                       </a:endParaRPr>
                     </a:p>
                   </a:txBody>
-                  <a:tcPr anchor="ctr">
+                  <a:tcPr marL="91440" marR="91440" marT="45720" marB="45720" anchor="ctr">
                     <a:lnL w="9525" cap="flat" cmpd="sng" algn="ctr">
                       <a:solidFill>
                         <a:srgbClr val="D8DBE0"/>
@@ -2014,7 +2115,7 @@
                     <a:bodyPr/>
                     <a:lstStyle/>
                     <a:p>
-                      <a:pPr marL="0" indent="0" algn="ctr">
+                      <a:pPr algn="ctr" indent="0" marL="0">
                         <a:buNone/>
                       </a:pPr>
                       <a:r>
@@ -2022,20 +2123,20 @@
                           <a:solidFill>
                             <a:srgbClr val="1F4E9C"/>
                           </a:solidFill>
-                          <a:latin typeface="微软雅黑" panose="020B0503020204020204" pitchFamily="34" charset="-122"/>
-                          <a:ea typeface="微软雅黑" panose="020B0503020204020204" pitchFamily="34" charset="-122"/>
-                          <a:cs typeface="微软雅黑" panose="020B0503020204020204" pitchFamily="34" charset="-120"/>
+                          <a:latin typeface="微软雅黑" pitchFamily="34" charset="0"/>
+                          <a:ea typeface="微软雅黑" pitchFamily="34" charset="-122"/>
+                          <a:cs typeface="微软雅黑" pitchFamily="34" charset="-120"/>
                         </a:rPr>
                         <a:t>占比</a:t>
                       </a:r>
                       <a:endParaRPr lang="en-US" sz="1500" dirty="0">
-                        <a:latin typeface="微软雅黑" panose="020B0503020204020204" pitchFamily="34" charset="-122"/>
-                        <a:ea typeface="微软雅黑" panose="020B0503020204020204" pitchFamily="34" charset="-122"/>
-                        <a:cs typeface="微软雅黑" panose="020B0503020204020204" pitchFamily="34" charset="-122"/>
+                        <a:latin typeface="微软雅黑" charset="0"/>
+                        <a:ea typeface="微软雅黑" charset="0"/>
+                        <a:cs typeface="微软雅黑" charset="0"/>
                       </a:endParaRPr>
                     </a:p>
                   </a:txBody>
-                  <a:tcPr anchor="ctr">
+                  <a:tcPr marL="91440" marR="91440" marT="45720" marB="45720" anchor="ctr">
                     <a:lnL w="9525" cap="flat" cmpd="sng" algn="ctr">
                       <a:solidFill>
                         <a:srgbClr val="D8DBE0"/>
@@ -2082,7 +2183,7 @@
                     <a:bodyPr/>
                     <a:lstStyle/>
                     <a:p>
-                      <a:pPr marL="0" indent="0" algn="ctr">
+                      <a:pPr algn="ctr" indent="0" marL="0">
                         <a:buNone/>
                       </a:pPr>
                       <a:r>
@@ -2090,20 +2191,20 @@
                           <a:solidFill>
                             <a:srgbClr val="1F4E9C"/>
                           </a:solidFill>
-                          <a:latin typeface="微软雅黑" panose="020B0503020204020204" pitchFamily="34" charset="-122"/>
-                          <a:ea typeface="微软雅黑" panose="020B0503020204020204" pitchFamily="34" charset="-122"/>
-                          <a:cs typeface="微软雅黑" panose="020B0503020204020204" pitchFamily="34" charset="-120"/>
+                          <a:latin typeface="微软雅黑" pitchFamily="34" charset="0"/>
+                          <a:ea typeface="微软雅黑" pitchFamily="34" charset="-122"/>
+                          <a:cs typeface="微软雅黑" pitchFamily="34" charset="-120"/>
                         </a:rPr>
                         <a:t>定位</a:t>
                       </a:r>
                       <a:endParaRPr lang="en-US" sz="1500" dirty="0">
-                        <a:latin typeface="微软雅黑" panose="020B0503020204020204" pitchFamily="34" charset="-122"/>
-                        <a:ea typeface="微软雅黑" panose="020B0503020204020204" pitchFamily="34" charset="-122"/>
-                        <a:cs typeface="微软雅黑" panose="020B0503020204020204" pitchFamily="34" charset="-122"/>
+                        <a:latin typeface="微软雅黑" charset="0"/>
+                        <a:ea typeface="微软雅黑" charset="0"/>
+                        <a:cs typeface="微软雅黑" charset="0"/>
                       </a:endParaRPr>
                     </a:p>
                   </a:txBody>
-                  <a:tcPr anchor="ctr">
+                  <a:tcPr marL="91440" marR="91440" marT="45720" marB="45720" anchor="ctr">
                     <a:lnL w="9525" cap="flat" cmpd="sng" algn="ctr">
                       <a:solidFill>
                         <a:srgbClr val="D8DBE0"/>
@@ -2152,7 +2253,7 @@
                     <a:bodyPr/>
                     <a:lstStyle/>
                     <a:p>
-                      <a:pPr marL="0" indent="0" algn="ctr">
+                      <a:pPr algn="ctr" indent="0" marL="0">
                         <a:buNone/>
                       </a:pPr>
                       <a:r>
@@ -2160,20 +2261,20 @@
                           <a:solidFill>
                             <a:srgbClr val="1F2329"/>
                           </a:solidFill>
-                          <a:latin typeface="微软雅黑" panose="020B0503020204020204" pitchFamily="34" charset="-122"/>
-                          <a:ea typeface="微软雅黑" panose="020B0503020204020204" pitchFamily="34" charset="-122"/>
-                          <a:cs typeface="微软雅黑" panose="020B0503020204020204" pitchFamily="34" charset="-120"/>
+                          <a:latin typeface="微软雅黑" pitchFamily="34" charset="0"/>
+                          <a:ea typeface="微软雅黑" pitchFamily="34" charset="-122"/>
+                          <a:cs typeface="微软雅黑" pitchFamily="34" charset="-120"/>
                         </a:rPr>
                         <a:t>有价值必做</a:t>
                       </a:r>
                       <a:endParaRPr lang="en-US" sz="1500" dirty="0">
-                        <a:latin typeface="微软雅黑" panose="020B0503020204020204" pitchFamily="34" charset="-122"/>
-                        <a:ea typeface="微软雅黑" panose="020B0503020204020204" pitchFamily="34" charset="-122"/>
-                        <a:cs typeface="微软雅黑" panose="020B0503020204020204" pitchFamily="34" charset="-122"/>
+                        <a:latin typeface="微软雅黑" charset="0"/>
+                        <a:ea typeface="微软雅黑" charset="0"/>
+                        <a:cs typeface="微软雅黑" charset="0"/>
                       </a:endParaRPr>
                     </a:p>
                   </a:txBody>
-                  <a:tcPr anchor="ctr">
+                  <a:tcPr marL="91440" marR="91440" marT="45720" marB="45720" anchor="ctr">
                     <a:lnL w="9525" cap="flat" cmpd="sng" algn="ctr">
                       <a:solidFill>
                         <a:srgbClr val="D8DBE0"/>
@@ -2220,7 +2321,7 @@
                     <a:bodyPr/>
                     <a:lstStyle/>
                     <a:p>
-                      <a:pPr marL="0" indent="0" algn="ctr">
+                      <a:pPr algn="ctr" indent="0" marL="0">
                         <a:buNone/>
                       </a:pPr>
                       <a:r>
@@ -2228,20 +2329,20 @@
                           <a:solidFill>
                             <a:srgbClr val="1F2329"/>
                           </a:solidFill>
-                          <a:latin typeface="微软雅黑" panose="020B0503020204020204" pitchFamily="34" charset="-122"/>
-                          <a:ea typeface="微软雅黑" panose="020B0503020204020204" pitchFamily="34" charset="-122"/>
-                          <a:cs typeface="微软雅黑" panose="020B0503020204020204" pitchFamily="34" charset="-120"/>
+                          <a:latin typeface="微软雅黑" pitchFamily="34" charset="0"/>
+                          <a:ea typeface="微软雅黑" pitchFamily="34" charset="-122"/>
+                          <a:cs typeface="微软雅黑" pitchFamily="34" charset="-120"/>
                         </a:rPr>
                         <a:t>23</a:t>
                       </a:r>
                       <a:endParaRPr lang="en-US" sz="1500" dirty="0">
-                        <a:latin typeface="微软雅黑" panose="020B0503020204020204" pitchFamily="34" charset="-122"/>
-                        <a:ea typeface="微软雅黑" panose="020B0503020204020204" pitchFamily="34" charset="-122"/>
-                        <a:cs typeface="微软雅黑" panose="020B0503020204020204" pitchFamily="34" charset="-122"/>
+                        <a:latin typeface="微软雅黑" charset="0"/>
+                        <a:ea typeface="微软雅黑" charset="0"/>
+                        <a:cs typeface="微软雅黑" charset="0"/>
                       </a:endParaRPr>
                     </a:p>
                   </a:txBody>
-                  <a:tcPr anchor="ctr">
+                  <a:tcPr marL="91440" marR="91440" marT="45720" marB="45720" anchor="ctr">
                     <a:lnL w="9525" cap="flat" cmpd="sng" algn="ctr">
                       <a:solidFill>
                         <a:srgbClr val="D8DBE0"/>
@@ -2288,7 +2389,7 @@
                     <a:bodyPr/>
                     <a:lstStyle/>
                     <a:p>
-                      <a:pPr marL="0" indent="0" algn="ctr">
+                      <a:pPr algn="ctr" indent="0" marL="0">
                         <a:buNone/>
                       </a:pPr>
                       <a:r>
@@ -2296,20 +2397,20 @@
                           <a:solidFill>
                             <a:srgbClr val="1F2329"/>
                           </a:solidFill>
-                          <a:latin typeface="微软雅黑" panose="020B0503020204020204" pitchFamily="34" charset="-122"/>
-                          <a:ea typeface="微软雅黑" panose="020B0503020204020204" pitchFamily="34" charset="-122"/>
-                          <a:cs typeface="微软雅黑" panose="020B0503020204020204" pitchFamily="34" charset="-120"/>
+                          <a:latin typeface="微软雅黑" pitchFamily="34" charset="0"/>
+                          <a:ea typeface="微软雅黑" pitchFamily="34" charset="-122"/>
+                          <a:cs typeface="微软雅黑" pitchFamily="34" charset="-120"/>
                         </a:rPr>
                         <a:t>31%</a:t>
                       </a:r>
                       <a:endParaRPr lang="en-US" sz="1500" dirty="0">
-                        <a:latin typeface="微软雅黑" panose="020B0503020204020204" pitchFamily="34" charset="-122"/>
-                        <a:ea typeface="微软雅黑" panose="020B0503020204020204" pitchFamily="34" charset="-122"/>
-                        <a:cs typeface="微软雅黑" panose="020B0503020204020204" pitchFamily="34" charset="-122"/>
+                        <a:latin typeface="微软雅黑" charset="0"/>
+                        <a:ea typeface="微软雅黑" charset="0"/>
+                        <a:cs typeface="微软雅黑" charset="0"/>
                       </a:endParaRPr>
                     </a:p>
                   </a:txBody>
-                  <a:tcPr anchor="ctr">
+                  <a:tcPr marL="91440" marR="91440" marT="45720" marB="45720" anchor="ctr">
                     <a:lnL w="9525" cap="flat" cmpd="sng" algn="ctr">
                       <a:solidFill>
                         <a:srgbClr val="D8DBE0"/>
@@ -2356,7 +2457,7 @@
                     <a:bodyPr/>
                     <a:lstStyle/>
                     <a:p>
-                      <a:pPr marL="0" indent="0" algn="ctr">
+                      <a:pPr algn="ctr" indent="0" marL="0">
                         <a:buNone/>
                       </a:pPr>
                       <a:r>
@@ -2364,20 +2465,20 @@
                           <a:solidFill>
                             <a:srgbClr val="1F2329"/>
                           </a:solidFill>
-                          <a:latin typeface="微软雅黑" panose="020B0503020204020204" pitchFamily="34" charset="-122"/>
-                          <a:ea typeface="微软雅黑" panose="020B0503020204020204" pitchFamily="34" charset="-122"/>
-                          <a:cs typeface="微软雅黑" panose="020B0503020204020204" pitchFamily="34" charset="-120"/>
+                          <a:latin typeface="微软雅黑" pitchFamily="34" charset="0"/>
+                          <a:ea typeface="微软雅黑" pitchFamily="34" charset="-122"/>
+                          <a:cs typeface="微软雅黑" pitchFamily="34" charset="-120"/>
                         </a:rPr>
                         <a:t>对应真题题型，逐题精做</a:t>
                       </a:r>
                       <a:endParaRPr lang="en-US" sz="1500" dirty="0">
-                        <a:latin typeface="微软雅黑" panose="020B0503020204020204" pitchFamily="34" charset="-122"/>
-                        <a:ea typeface="微软雅黑" panose="020B0503020204020204" pitchFamily="34" charset="-122"/>
-                        <a:cs typeface="微软雅黑" panose="020B0503020204020204" pitchFamily="34" charset="-122"/>
+                        <a:latin typeface="微软雅黑" charset="0"/>
+                        <a:ea typeface="微软雅黑" charset="0"/>
+                        <a:cs typeface="微软雅黑" charset="0"/>
                       </a:endParaRPr>
                     </a:p>
                   </a:txBody>
-                  <a:tcPr anchor="ctr">
+                  <a:tcPr marL="91440" marR="91440" marT="45720" marB="45720" anchor="ctr">
                     <a:lnL w="9525" cap="flat" cmpd="sng" algn="ctr">
                       <a:solidFill>
                         <a:srgbClr val="D8DBE0"/>
@@ -2426,7 +2527,7 @@
                     <a:bodyPr/>
                     <a:lstStyle/>
                     <a:p>
-                      <a:pPr marL="0" indent="0" algn="ctr">
+                      <a:pPr algn="ctr" indent="0" marL="0">
                         <a:buNone/>
                       </a:pPr>
                       <a:r>
@@ -2434,20 +2535,20 @@
                           <a:solidFill>
                             <a:srgbClr val="1F2329"/>
                           </a:solidFill>
-                          <a:latin typeface="微软雅黑" panose="020B0503020204020204" pitchFamily="34" charset="-122"/>
-                          <a:ea typeface="微软雅黑" panose="020B0503020204020204" pitchFamily="34" charset="-122"/>
-                          <a:cs typeface="微软雅黑" panose="020B0503020204020204" pitchFamily="34" charset="-120"/>
+                          <a:latin typeface="微软雅黑" pitchFamily="34" charset="0"/>
+                          <a:ea typeface="微软雅黑" pitchFamily="34" charset="-122"/>
+                          <a:cs typeface="微软雅黑" pitchFamily="34" charset="-120"/>
                         </a:rPr>
                         <a:t>可做可不做</a:t>
                       </a:r>
                       <a:endParaRPr lang="en-US" sz="1500" dirty="0">
-                        <a:latin typeface="微软雅黑" panose="020B0503020204020204" pitchFamily="34" charset="-122"/>
-                        <a:ea typeface="微软雅黑" panose="020B0503020204020204" pitchFamily="34" charset="-122"/>
-                        <a:cs typeface="微软雅黑" panose="020B0503020204020204" pitchFamily="34" charset="-122"/>
+                        <a:latin typeface="微软雅黑" charset="0"/>
+                        <a:ea typeface="微软雅黑" charset="0"/>
+                        <a:cs typeface="微软雅黑" charset="0"/>
                       </a:endParaRPr>
                     </a:p>
                   </a:txBody>
-                  <a:tcPr anchor="ctr">
+                  <a:tcPr marL="91440" marR="91440" marT="45720" marB="45720" anchor="ctr">
                     <a:lnL w="9525" cap="flat" cmpd="sng" algn="ctr">
                       <a:solidFill>
                         <a:srgbClr val="D8DBE0"/>
@@ -2494,7 +2595,7 @@
                     <a:bodyPr/>
                     <a:lstStyle/>
                     <a:p>
-                      <a:pPr marL="0" indent="0" algn="ctr">
+                      <a:pPr algn="ctr" indent="0" marL="0">
                         <a:buNone/>
                       </a:pPr>
                       <a:r>
@@ -2502,20 +2603,20 @@
                           <a:solidFill>
                             <a:srgbClr val="1F2329"/>
                           </a:solidFill>
-                          <a:latin typeface="微软雅黑" panose="020B0503020204020204" pitchFamily="34" charset="-122"/>
-                          <a:ea typeface="微软雅黑" panose="020B0503020204020204" pitchFamily="34" charset="-122"/>
-                          <a:cs typeface="微软雅黑" panose="020B0503020204020204" pitchFamily="34" charset="-120"/>
+                          <a:latin typeface="微软雅黑" pitchFamily="34" charset="0"/>
+                          <a:ea typeface="微软雅黑" pitchFamily="34" charset="-122"/>
+                          <a:cs typeface="微软雅黑" pitchFamily="34" charset="-120"/>
                         </a:rPr>
                         <a:t>49</a:t>
                       </a:r>
                       <a:endParaRPr lang="en-US" sz="1500" dirty="0">
-                        <a:latin typeface="微软雅黑" panose="020B0503020204020204" pitchFamily="34" charset="-122"/>
-                        <a:ea typeface="微软雅黑" panose="020B0503020204020204" pitchFamily="34" charset="-122"/>
-                        <a:cs typeface="微软雅黑" panose="020B0503020204020204" pitchFamily="34" charset="-122"/>
+                        <a:latin typeface="微软雅黑" charset="0"/>
+                        <a:ea typeface="微软雅黑" charset="0"/>
+                        <a:cs typeface="微软雅黑" charset="0"/>
                       </a:endParaRPr>
                     </a:p>
                   </a:txBody>
-                  <a:tcPr anchor="ctr">
+                  <a:tcPr marL="91440" marR="91440" marT="45720" marB="45720" anchor="ctr">
                     <a:lnL w="9525" cap="flat" cmpd="sng" algn="ctr">
                       <a:solidFill>
                         <a:srgbClr val="D8DBE0"/>
@@ -2562,7 +2663,7 @@
                     <a:bodyPr/>
                     <a:lstStyle/>
                     <a:p>
-                      <a:pPr marL="0" indent="0" algn="ctr">
+                      <a:pPr algn="ctr" indent="0" marL="0">
                         <a:buNone/>
                       </a:pPr>
                       <a:r>
@@ -2570,20 +2671,20 @@
                           <a:solidFill>
                             <a:srgbClr val="1F2329"/>
                           </a:solidFill>
-                          <a:latin typeface="微软雅黑" panose="020B0503020204020204" pitchFamily="34" charset="-122"/>
-                          <a:ea typeface="微软雅黑" panose="020B0503020204020204" pitchFamily="34" charset="-122"/>
-                          <a:cs typeface="微软雅黑" panose="020B0503020204020204" pitchFamily="34" charset="-120"/>
+                          <a:latin typeface="微软雅黑" pitchFamily="34" charset="0"/>
+                          <a:ea typeface="微软雅黑" pitchFamily="34" charset="-122"/>
+                          <a:cs typeface="微软雅黑" pitchFamily="34" charset="-120"/>
                         </a:rPr>
                         <a:t>65%</a:t>
                       </a:r>
                       <a:endParaRPr lang="en-US" sz="1500" dirty="0">
-                        <a:latin typeface="微软雅黑" panose="020B0503020204020204" pitchFamily="34" charset="-122"/>
-                        <a:ea typeface="微软雅黑" panose="020B0503020204020204" pitchFamily="34" charset="-122"/>
-                        <a:cs typeface="微软雅黑" panose="020B0503020204020204" pitchFamily="34" charset="-122"/>
+                        <a:latin typeface="微软雅黑" charset="0"/>
+                        <a:ea typeface="微软雅黑" charset="0"/>
+                        <a:cs typeface="微软雅黑" charset="0"/>
                       </a:endParaRPr>
                     </a:p>
                   </a:txBody>
-                  <a:tcPr anchor="ctr">
+                  <a:tcPr marL="91440" marR="91440" marT="45720" marB="45720" anchor="ctr">
                     <a:lnL w="9525" cap="flat" cmpd="sng" algn="ctr">
                       <a:solidFill>
                         <a:srgbClr val="D8DBE0"/>
@@ -2630,7 +2731,7 @@
                     <a:bodyPr/>
                     <a:lstStyle/>
                     <a:p>
-                      <a:pPr marL="0" indent="0" algn="ctr">
+                      <a:pPr algn="ctr" indent="0" marL="0">
                         <a:buNone/>
                       </a:pPr>
                       <a:r>
@@ -2638,20 +2739,20 @@
                           <a:solidFill>
                             <a:srgbClr val="1F2329"/>
                           </a:solidFill>
-                          <a:latin typeface="微软雅黑" panose="020B0503020204020204" pitchFamily="34" charset="-122"/>
-                          <a:ea typeface="微软雅黑" panose="020B0503020204020204" pitchFamily="34" charset="-122"/>
-                          <a:cs typeface="微软雅黑" panose="020B0503020204020204" pitchFamily="34" charset="-120"/>
+                          <a:latin typeface="微软雅黑" pitchFamily="34" charset="0"/>
+                          <a:ea typeface="微软雅黑" pitchFamily="34" charset="-122"/>
+                          <a:cs typeface="微软雅黑" pitchFamily="34" charset="-120"/>
                         </a:rPr>
                         <a:t>在纲内、考频低，限时巩固</a:t>
                       </a:r>
                       <a:endParaRPr lang="en-US" sz="1500" dirty="0">
-                        <a:latin typeface="微软雅黑" panose="020B0503020204020204" pitchFamily="34" charset="-122"/>
-                        <a:ea typeface="微软雅黑" panose="020B0503020204020204" pitchFamily="34" charset="-122"/>
-                        <a:cs typeface="微软雅黑" panose="020B0503020204020204" pitchFamily="34" charset="-122"/>
+                        <a:latin typeface="微软雅黑" charset="0"/>
+                        <a:ea typeface="微软雅黑" charset="0"/>
+                        <a:cs typeface="微软雅黑" charset="0"/>
                       </a:endParaRPr>
                     </a:p>
                   </a:txBody>
-                  <a:tcPr anchor="ctr">
+                  <a:tcPr marL="91440" marR="91440" marT="45720" marB="45720" anchor="ctr">
                     <a:lnL w="9525" cap="flat" cmpd="sng" algn="ctr">
                       <a:solidFill>
                         <a:srgbClr val="D8DBE0"/>
@@ -2700,7 +2801,7 @@
                     <a:bodyPr/>
                     <a:lstStyle/>
                     <a:p>
-                      <a:pPr marL="0" indent="0" algn="ctr">
+                      <a:pPr algn="ctr" indent="0" marL="0">
                         <a:buNone/>
                       </a:pPr>
                       <a:r>
@@ -2708,20 +2809,20 @@
                           <a:solidFill>
                             <a:srgbClr val="1F2329"/>
                           </a:solidFill>
-                          <a:latin typeface="微软雅黑" panose="020B0503020204020204" pitchFamily="34" charset="-122"/>
-                          <a:ea typeface="微软雅黑" panose="020B0503020204020204" pitchFamily="34" charset="-122"/>
-                          <a:cs typeface="微软雅黑" panose="020B0503020204020204" pitchFamily="34" charset="-120"/>
+                          <a:latin typeface="微软雅黑" pitchFamily="34" charset="0"/>
+                          <a:ea typeface="微软雅黑" pitchFamily="34" charset="-122"/>
+                          <a:cs typeface="微软雅黑" pitchFamily="34" charset="-120"/>
                         </a:rPr>
                         <a:t>完全不做</a:t>
                       </a:r>
                       <a:endParaRPr lang="en-US" sz="1500" dirty="0">
-                        <a:latin typeface="微软雅黑" panose="020B0503020204020204" pitchFamily="34" charset="-122"/>
-                        <a:ea typeface="微软雅黑" panose="020B0503020204020204" pitchFamily="34" charset="-122"/>
-                        <a:cs typeface="微软雅黑" panose="020B0503020204020204" pitchFamily="34" charset="-122"/>
+                        <a:latin typeface="微软雅黑" charset="0"/>
+                        <a:ea typeface="微软雅黑" charset="0"/>
+                        <a:cs typeface="微软雅黑" charset="0"/>
                       </a:endParaRPr>
                     </a:p>
                   </a:txBody>
-                  <a:tcPr anchor="ctr">
+                  <a:tcPr marL="91440" marR="91440" marT="45720" marB="45720" anchor="ctr">
                     <a:lnL w="9525" cap="flat" cmpd="sng" algn="ctr">
                       <a:solidFill>
                         <a:srgbClr val="D8DBE0"/>
@@ -2768,7 +2869,7 @@
                     <a:bodyPr/>
                     <a:lstStyle/>
                     <a:p>
-                      <a:pPr marL="0" indent="0" algn="ctr">
+                      <a:pPr algn="ctr" indent="0" marL="0">
                         <a:buNone/>
                       </a:pPr>
                       <a:r>
@@ -2776,20 +2877,20 @@
                           <a:solidFill>
                             <a:srgbClr val="1F2329"/>
                           </a:solidFill>
-                          <a:latin typeface="微软雅黑" panose="020B0503020204020204" pitchFamily="34" charset="-122"/>
-                          <a:ea typeface="微软雅黑" panose="020B0503020204020204" pitchFamily="34" charset="-122"/>
-                          <a:cs typeface="微软雅黑" panose="020B0503020204020204" pitchFamily="34" charset="-120"/>
+                          <a:latin typeface="微软雅黑" pitchFamily="34" charset="0"/>
+                          <a:ea typeface="微软雅黑" pitchFamily="34" charset="-122"/>
+                          <a:cs typeface="微软雅黑" pitchFamily="34" charset="-120"/>
                         </a:rPr>
                         <a:t>3</a:t>
                       </a:r>
                       <a:endParaRPr lang="en-US" sz="1500" dirty="0">
-                        <a:latin typeface="微软雅黑" panose="020B0503020204020204" pitchFamily="34" charset="-122"/>
-                        <a:ea typeface="微软雅黑" panose="020B0503020204020204" pitchFamily="34" charset="-122"/>
-                        <a:cs typeface="微软雅黑" panose="020B0503020204020204" pitchFamily="34" charset="-122"/>
+                        <a:latin typeface="微软雅黑" charset="0"/>
+                        <a:ea typeface="微软雅黑" charset="0"/>
+                        <a:cs typeface="微软雅黑" charset="0"/>
                       </a:endParaRPr>
                     </a:p>
                   </a:txBody>
-                  <a:tcPr anchor="ctr">
+                  <a:tcPr marL="91440" marR="91440" marT="45720" marB="45720" anchor="ctr">
                     <a:lnL w="9525" cap="flat" cmpd="sng" algn="ctr">
                       <a:solidFill>
                         <a:srgbClr val="D8DBE0"/>
@@ -2836,7 +2937,7 @@
                     <a:bodyPr/>
                     <a:lstStyle/>
                     <a:p>
-                      <a:pPr marL="0" indent="0" algn="ctr">
+                      <a:pPr algn="ctr" indent="0" marL="0">
                         <a:buNone/>
                       </a:pPr>
                       <a:r>
@@ -2844,20 +2945,20 @@
                           <a:solidFill>
                             <a:srgbClr val="1F2329"/>
                           </a:solidFill>
-                          <a:latin typeface="微软雅黑" panose="020B0503020204020204" pitchFamily="34" charset="-122"/>
-                          <a:ea typeface="微软雅黑" panose="020B0503020204020204" pitchFamily="34" charset="-122"/>
-                          <a:cs typeface="微软雅黑" panose="020B0503020204020204" pitchFamily="34" charset="-120"/>
+                          <a:latin typeface="微软雅黑" pitchFamily="34" charset="0"/>
+                          <a:ea typeface="微软雅黑" pitchFamily="34" charset="-122"/>
+                          <a:cs typeface="微软雅黑" pitchFamily="34" charset="-120"/>
                         </a:rPr>
                         <a:t>4%</a:t>
                       </a:r>
                       <a:endParaRPr lang="en-US" sz="1500" dirty="0">
-                        <a:latin typeface="微软雅黑" panose="020B0503020204020204" pitchFamily="34" charset="-122"/>
-                        <a:ea typeface="微软雅黑" panose="020B0503020204020204" pitchFamily="34" charset="-122"/>
-                        <a:cs typeface="微软雅黑" panose="020B0503020204020204" pitchFamily="34" charset="-122"/>
+                        <a:latin typeface="微软雅黑" charset="0"/>
+                        <a:ea typeface="微软雅黑" charset="0"/>
+                        <a:cs typeface="微软雅黑" charset="0"/>
                       </a:endParaRPr>
                     </a:p>
                   </a:txBody>
-                  <a:tcPr anchor="ctr">
+                  <a:tcPr marL="91440" marR="91440" marT="45720" marB="45720" anchor="ctr">
                     <a:lnL w="9525" cap="flat" cmpd="sng" algn="ctr">
                       <a:solidFill>
                         <a:srgbClr val="D8DBE0"/>
@@ -2904,7 +3005,7 @@
                     <a:bodyPr/>
                     <a:lstStyle/>
                     <a:p>
-                      <a:pPr marL="0" indent="0" algn="ctr">
+                      <a:pPr algn="ctr" indent="0" marL="0">
                         <a:buNone/>
                       </a:pPr>
                       <a:r>
@@ -2912,20 +3013,20 @@
                           <a:solidFill>
                             <a:srgbClr val="1F2329"/>
                           </a:solidFill>
-                          <a:latin typeface="微软雅黑" panose="020B0503020204020204" pitchFamily="34" charset="-122"/>
-                          <a:ea typeface="微软雅黑" panose="020B0503020204020204" pitchFamily="34" charset="-122"/>
-                          <a:cs typeface="微软雅黑" panose="020B0503020204020204" pitchFamily="34" charset="-120"/>
+                          <a:latin typeface="微软雅黑" pitchFamily="34" charset="0"/>
+                          <a:ea typeface="微软雅黑" pitchFamily="34" charset="-122"/>
+                          <a:cs typeface="微软雅黑" pitchFamily="34" charset="-120"/>
                         </a:rPr>
                         <a:t>超纲或无对应题型，直接跳过</a:t>
                       </a:r>
                       <a:endParaRPr lang="en-US" sz="1500" dirty="0">
-                        <a:latin typeface="微软雅黑" panose="020B0503020204020204" pitchFamily="34" charset="-122"/>
-                        <a:ea typeface="微软雅黑" panose="020B0503020204020204" pitchFamily="34" charset="-122"/>
-                        <a:cs typeface="微软雅黑" panose="020B0503020204020204" pitchFamily="34" charset="-122"/>
+                        <a:latin typeface="微软雅黑" charset="0"/>
+                        <a:ea typeface="微软雅黑" charset="0"/>
+                        <a:cs typeface="微软雅黑" charset="0"/>
                       </a:endParaRPr>
                     </a:p>
                   </a:txBody>
-                  <a:tcPr anchor="ctr">
+                  <a:tcPr marL="91440" marR="91440" marT="45720" marB="45720" anchor="ctr">
                     <a:lnL w="9525" cap="flat" cmpd="sng" algn="ctr">
                       <a:solidFill>
                         <a:srgbClr val="D8DBE0"/>
@@ -2987,12 +3088,13 @@
             <a:avLst/>
           </a:prstGeom>
           <a:noFill/>
+          <a:ln/>
         </p:spPr>
         <p:txBody>
           <a:bodyPr wrap="square" rtlCol="0" anchor="t"/>
           <a:lstStyle/>
           <a:p>
-            <a:pPr marL="0" indent="0" algn="l">
+            <a:pPr algn="l" indent="0" marL="0">
               <a:buNone/>
             </a:pPr>
             <a:r>
@@ -3000,9 +3102,9 @@
                 <a:solidFill>
                   <a:srgbClr val="8A9099"/>
                 </a:solidFill>
-                <a:latin typeface="微软雅黑" panose="020B0503020204020204" pitchFamily="34" charset="-122"/>
-                <a:ea typeface="微软雅黑" panose="020B0503020204020204" pitchFamily="34" charset="-122"/>
-                <a:cs typeface="微软雅黑" panose="020B0503020204020204" pitchFamily="34" charset="-120"/>
+                <a:latin typeface="微软雅黑" pitchFamily="34" charset="0"/>
+                <a:ea typeface="微软雅黑" pitchFamily="34" charset="-122"/>
+                <a:cs typeface="微软雅黑" pitchFamily="34" charset="-120"/>
               </a:rPr>
               <a:t>题号口径：选N＝本章单项选择题第N题，答N＝解答题第N题，算N＝算法设计题第N题；页码为题集PDF页（书页＝PDF页−9）。</a:t>
             </a:r>
@@ -3020,7 +3122,7 @@
 
 <file path=ppt/slides/slide3.xml><?xml version="1.0" encoding="utf-8"?>
 <p:sld xmlns:a="http://schemas.openxmlformats.org/drawingml/2006/main" xmlns:r="http://schemas.openxmlformats.org/officeDocument/2006/relationships" xmlns:p="http://schemas.openxmlformats.org/presentationml/2006/main">
-  <p:cSld>
+  <p:cSld name="Slide 3">
     <p:bg>
       <p:bgPr>
         <a:blipFill dpi="0" rotWithShape="1">
@@ -3064,12 +3166,13 @@
             <a:avLst/>
           </a:prstGeom>
           <a:noFill/>
+          <a:ln/>
         </p:spPr>
         <p:txBody>
           <a:bodyPr wrap="square" rtlCol="0" anchor="ctr"/>
           <a:lstStyle/>
           <a:p>
-            <a:pPr marL="0" indent="0" algn="r">
+            <a:pPr algn="r" indent="0" marL="0">
               <a:buNone/>
             </a:pPr>
             <a:r>
@@ -3077,9 +3180,9 @@
                 <a:solidFill>
                   <a:srgbClr val="8A9099"/>
                 </a:solidFill>
-                <a:latin typeface="微软雅黑" panose="020B0503020204020204" pitchFamily="34" charset="-122"/>
-                <a:ea typeface="微软雅黑" panose="020B0503020204020204" pitchFamily="34" charset="-122"/>
-                <a:cs typeface="微软雅黑" panose="020B0503020204020204" pitchFamily="34" charset="-120"/>
+                <a:latin typeface="微软雅黑" pitchFamily="34" charset="0"/>
+                <a:ea typeface="微软雅黑" pitchFamily="34" charset="-122"/>
+                <a:cs typeface="微软雅黑" pitchFamily="34" charset="-120"/>
               </a:rPr>
               <a:t>3 / 9</a:t>
             </a:r>
@@ -3102,12 +3205,13 @@
             <a:avLst/>
           </a:prstGeom>
           <a:noFill/>
+          <a:ln/>
         </p:spPr>
         <p:txBody>
           <a:bodyPr wrap="square" rtlCol="0" anchor="ctr"/>
           <a:lstStyle/>
           <a:p>
-            <a:pPr marL="0" indent="0" algn="l">
+            <a:pPr algn="l" indent="0" marL="0">
               <a:buNone/>
             </a:pPr>
             <a:r>
@@ -3115,9 +3219,9 @@
                 <a:solidFill>
                   <a:srgbClr val="1F4E9C"/>
                 </a:solidFill>
-                <a:latin typeface="微软雅黑" panose="020B0503020204020204" pitchFamily="34" charset="-122"/>
-                <a:ea typeface="微软雅黑" panose="020B0503020204020204" pitchFamily="34" charset="-122"/>
-                <a:cs typeface="微软雅黑" panose="020B0503020204020204" pitchFamily="34" charset="-120"/>
+                <a:latin typeface="微软雅黑" pitchFamily="34" charset="0"/>
+                <a:ea typeface="微软雅黑" pitchFamily="34" charset="-122"/>
+                <a:cs typeface="微软雅黑" pitchFamily="34" charset="-120"/>
               </a:rPr>
               <a:t>有价值必做</a:t>
             </a:r>
@@ -3140,12 +3244,13 @@
             <a:avLst/>
           </a:prstGeom>
           <a:noFill/>
+          <a:ln/>
         </p:spPr>
         <p:txBody>
           <a:bodyPr wrap="square" rtlCol="0" anchor="ctr"/>
           <a:lstStyle/>
           <a:p>
-            <a:pPr marL="0" indent="0" algn="l">
+            <a:pPr algn="l" indent="0" marL="0">
               <a:buNone/>
             </a:pPr>
             <a:r>
@@ -3153,9 +3258,9 @@
                 <a:solidFill>
                   <a:srgbClr val="1F2329"/>
                 </a:solidFill>
-                <a:latin typeface="微软雅黑" panose="020B0503020204020204" pitchFamily="34" charset="-122"/>
-                <a:ea typeface="微软雅黑" panose="020B0503020204020204" pitchFamily="34" charset="-122"/>
-                <a:cs typeface="微软雅黑" panose="020B0503020204020204" pitchFamily="34" charset="-120"/>
+                <a:latin typeface="微软雅黑" pitchFamily="34" charset="0"/>
+                <a:ea typeface="微软雅黑" pitchFamily="34" charset="-122"/>
+                <a:cs typeface="微软雅黑" pitchFamily="34" charset="-120"/>
               </a:rPr>
               <a:t>必做题（1/4）</a:t>
             </a:r>
@@ -3165,15 +3270,21 @@
       </p:sp>
       <p:graphicFrame>
         <p:nvGraphicFramePr>
-          <p:cNvPr id="5" name="Table 0"/>
+          <p:cNvPr id="4" name="Table 0"/>
           <p:cNvGraphicFramePr>
             <a:graphicFrameLocks noGrp="1"/>
           </p:cNvGraphicFramePr>
-          <p:nvPr/>
+          <p:nvPr>
+            <p:extLst>
+              <p:ext uri="{D42A27DB-BD31-4B8C-83A1-F6EECF244321}">
+                <p14:modId xmlns:p14="http://schemas.microsoft.com/office/powerpoint/2010/main" val="1579011935"/>
+              </p:ext>
+            </p:extLst>
+          </p:nvPr>
         </p:nvGraphicFramePr>
         <p:xfrm>
           <a:off x="822960" y="2395728"/>
-          <a:ext cx="10545775" cy="2944368"/>
+          <a:ext cx="10545775" cy="914400"/>
         </p:xfrm>
         <a:graphic>
           <a:graphicData uri="http://schemas.openxmlformats.org/drawingml/2006/table">
@@ -3190,7 +3301,7 @@
                     <a:bodyPr/>
                     <a:lstStyle/>
                     <a:p>
-                      <a:pPr marL="0" indent="0" algn="l">
+                      <a:pPr algn="l" indent="0" marL="0">
                         <a:buNone/>
                       </a:pPr>
                       <a:r>
@@ -3198,20 +3309,20 @@
                           <a:solidFill>
                             <a:srgbClr val="1F4E9C"/>
                           </a:solidFill>
-                          <a:latin typeface="微软雅黑" panose="020B0503020204020204" pitchFamily="34" charset="-122"/>
-                          <a:ea typeface="微软雅黑" panose="020B0503020204020204" pitchFamily="34" charset="-122"/>
-                          <a:cs typeface="微软雅黑" panose="020B0503020204020204" pitchFamily="34" charset="-120"/>
+                          <a:latin typeface="微软雅黑" pitchFamily="34" charset="0"/>
+                          <a:ea typeface="微软雅黑" pitchFamily="34" charset="-122"/>
+                          <a:cs typeface="微软雅黑" pitchFamily="34" charset="-120"/>
                         </a:rPr>
                         <a:t>题号</a:t>
                       </a:r>
                       <a:endParaRPr lang="en-US" sz="1500" dirty="0">
-                        <a:latin typeface="微软雅黑" panose="020B0503020204020204" pitchFamily="34" charset="-122"/>
-                        <a:ea typeface="微软雅黑" panose="020B0503020204020204" pitchFamily="34" charset="-122"/>
-                        <a:cs typeface="微软雅黑" panose="020B0503020204020204" pitchFamily="34" charset="-122"/>
+                        <a:latin typeface="微软雅黑" charset="0"/>
+                        <a:ea typeface="微软雅黑" charset="0"/>
+                        <a:cs typeface="微软雅黑" charset="0"/>
                       </a:endParaRPr>
                     </a:p>
                   </a:txBody>
-                  <a:tcPr anchor="ctr">
+                  <a:tcPr marL="91440" marR="91440" marT="45720" marB="45720" anchor="ctr">
                     <a:lnL w="9525" cap="flat" cmpd="sng" algn="ctr">
                       <a:solidFill>
                         <a:srgbClr val="D8DBE0"/>
@@ -3258,7 +3369,7 @@
                     <a:bodyPr/>
                     <a:lstStyle/>
                     <a:p>
-                      <a:pPr marL="0" indent="0" algn="l">
+                      <a:pPr algn="l" indent="0" marL="0">
                         <a:buNone/>
                       </a:pPr>
                       <a:r>
@@ -3266,20 +3377,20 @@
                           <a:solidFill>
                             <a:srgbClr val="1F4E9C"/>
                           </a:solidFill>
-                          <a:latin typeface="微软雅黑" panose="020B0503020204020204" pitchFamily="34" charset="-122"/>
-                          <a:ea typeface="微软雅黑" panose="020B0503020204020204" pitchFamily="34" charset="-122"/>
-                          <a:cs typeface="微软雅黑" panose="020B0503020204020204" pitchFamily="34" charset="-120"/>
+                          <a:latin typeface="微软雅黑" pitchFamily="34" charset="0"/>
+                          <a:ea typeface="微软雅黑" pitchFamily="34" charset="-122"/>
+                          <a:cs typeface="微软雅黑" pitchFamily="34" charset="-120"/>
                         </a:rPr>
                         <a:t>考点</a:t>
                       </a:r>
                       <a:endParaRPr lang="en-US" sz="1500" dirty="0">
-                        <a:latin typeface="微软雅黑" panose="020B0503020204020204" pitchFamily="34" charset="-122"/>
-                        <a:ea typeface="微软雅黑" panose="020B0503020204020204" pitchFamily="34" charset="-122"/>
-                        <a:cs typeface="微软雅黑" panose="020B0503020204020204" pitchFamily="34" charset="-122"/>
+                        <a:latin typeface="微软雅黑" charset="0"/>
+                        <a:ea typeface="微软雅黑" charset="0"/>
+                        <a:cs typeface="微软雅黑" charset="0"/>
                       </a:endParaRPr>
                     </a:p>
                   </a:txBody>
-                  <a:tcPr anchor="ctr">
+                  <a:tcPr marL="91440" marR="91440" marT="45720" marB="45720" anchor="ctr">
                     <a:lnL w="9525" cap="flat" cmpd="sng" algn="ctr">
                       <a:solidFill>
                         <a:srgbClr val="D8DBE0"/>
@@ -3326,7 +3437,7 @@
                     <a:bodyPr/>
                     <a:lstStyle/>
                     <a:p>
-                      <a:pPr marL="0" indent="0" algn="l">
+                      <a:pPr algn="l" indent="0" marL="0">
                         <a:buNone/>
                       </a:pPr>
                       <a:r>
@@ -3334,20 +3445,20 @@
                           <a:solidFill>
                             <a:srgbClr val="1F4E9C"/>
                           </a:solidFill>
-                          <a:latin typeface="微软雅黑" panose="020B0503020204020204" pitchFamily="34" charset="-122"/>
-                          <a:ea typeface="微软雅黑" panose="020B0503020204020204" pitchFamily="34" charset="-122"/>
-                          <a:cs typeface="微软雅黑" panose="020B0503020204020204" pitchFamily="34" charset="-120"/>
+                          <a:latin typeface="微软雅黑" pitchFamily="34" charset="0"/>
+                          <a:ea typeface="微软雅黑" pitchFamily="34" charset="-122"/>
+                          <a:cs typeface="微软雅黑" pitchFamily="34" charset="-120"/>
                         </a:rPr>
                         <a:t>价值</a:t>
                       </a:r>
                       <a:endParaRPr lang="en-US" sz="1500" dirty="0">
-                        <a:latin typeface="微软雅黑" panose="020B0503020204020204" pitchFamily="34" charset="-122"/>
-                        <a:ea typeface="微软雅黑" panose="020B0503020204020204" pitchFamily="34" charset="-122"/>
-                        <a:cs typeface="微软雅黑" panose="020B0503020204020204" pitchFamily="34" charset="-122"/>
+                        <a:latin typeface="微软雅黑" charset="0"/>
+                        <a:ea typeface="微软雅黑" charset="0"/>
+                        <a:cs typeface="微软雅黑" charset="0"/>
                       </a:endParaRPr>
                     </a:p>
                   </a:txBody>
-                  <a:tcPr anchor="ctr">
+                  <a:tcPr marL="91440" marR="91440" marT="45720" marB="45720" anchor="ctr">
                     <a:lnL w="9525" cap="flat" cmpd="sng" algn="ctr">
                       <a:solidFill>
                         <a:srgbClr val="D8DBE0"/>
@@ -3396,7 +3507,7 @@
                     <a:bodyPr/>
                     <a:lstStyle/>
                     <a:p>
-                      <a:pPr marL="0" indent="0" algn="l">
+                      <a:pPr algn="l" indent="0" marL="0">
                         <a:buNone/>
                       </a:pPr>
                       <a:r>
@@ -3404,20 +3515,20 @@
                           <a:solidFill>
                             <a:srgbClr val="1F2329"/>
                           </a:solidFill>
-                          <a:latin typeface="微软雅黑" panose="020B0503020204020204" pitchFamily="34" charset="-122"/>
-                          <a:ea typeface="微软雅黑" panose="020B0503020204020204" pitchFamily="34" charset="-122"/>
-                          <a:cs typeface="微软雅黑" panose="020B0503020204020204" pitchFamily="34" charset="-120"/>
+                          <a:latin typeface="微软雅黑" pitchFamily="34" charset="0"/>
+                          <a:ea typeface="微软雅黑" pitchFamily="34" charset="-122"/>
+                          <a:cs typeface="微软雅黑" pitchFamily="34" charset="-120"/>
                         </a:rPr>
                         <a:t>2选17</a:t>
                       </a:r>
                       <a:endParaRPr lang="en-US" sz="1500" dirty="0">
-                        <a:latin typeface="微软雅黑" panose="020B0503020204020204" pitchFamily="34" charset="-122"/>
-                        <a:ea typeface="微软雅黑" panose="020B0503020204020204" pitchFamily="34" charset="-122"/>
-                        <a:cs typeface="微软雅黑" panose="020B0503020204020204" pitchFamily="34" charset="-122"/>
+                        <a:latin typeface="微软雅黑" charset="0"/>
+                        <a:ea typeface="微软雅黑" charset="0"/>
+                        <a:cs typeface="微软雅黑" charset="0"/>
                       </a:endParaRPr>
                     </a:p>
                   </a:txBody>
-                  <a:tcPr anchor="ctr">
+                  <a:tcPr marL="91440" marR="91440" marT="45720" marB="45720" anchor="ctr">
                     <a:lnL w="9525" cap="flat" cmpd="sng" algn="ctr">
                       <a:solidFill>
                         <a:srgbClr val="D8DBE0"/>
@@ -3464,7 +3575,7 @@
                     <a:bodyPr/>
                     <a:lstStyle/>
                     <a:p>
-                      <a:pPr marL="0" indent="0" algn="l">
+                      <a:pPr algn="l" indent="0" marL="0">
                         <a:buNone/>
                       </a:pPr>
                       <a:r>
@@ -3472,20 +3583,20 @@
                           <a:solidFill>
                             <a:srgbClr val="1F2329"/>
                           </a:solidFill>
-                          <a:latin typeface="微软雅黑" panose="020B0503020204020204" pitchFamily="34" charset="-122"/>
-                          <a:ea typeface="微软雅黑" panose="020B0503020204020204" pitchFamily="34" charset="-122"/>
-                          <a:cs typeface="微软雅黑" panose="020B0503020204020204" pitchFamily="34" charset="-120"/>
+                          <a:latin typeface="微软雅黑" pitchFamily="34" charset="0"/>
+                          <a:ea typeface="微软雅黑" pitchFamily="34" charset="-122"/>
+                          <a:cs typeface="微软雅黑" pitchFamily="34" charset="-120"/>
                         </a:rPr>
                         <a:t>指针语句操作</a:t>
                       </a:r>
                       <a:endParaRPr lang="en-US" sz="1500" dirty="0">
-                        <a:latin typeface="微软雅黑" panose="020B0503020204020204" pitchFamily="34" charset="-122"/>
-                        <a:ea typeface="微软雅黑" panose="020B0503020204020204" pitchFamily="34" charset="-122"/>
-                        <a:cs typeface="微软雅黑" panose="020B0503020204020204" pitchFamily="34" charset="-122"/>
+                        <a:latin typeface="微软雅黑" charset="0"/>
+                        <a:ea typeface="微软雅黑" charset="0"/>
+                        <a:cs typeface="微软雅黑" charset="0"/>
                       </a:endParaRPr>
                     </a:p>
                   </a:txBody>
-                  <a:tcPr anchor="ctr">
+                  <a:tcPr marL="91440" marR="91440" marT="45720" marB="45720" anchor="ctr">
                     <a:lnL w="9525" cap="flat" cmpd="sng" algn="ctr">
                       <a:solidFill>
                         <a:srgbClr val="D8DBE0"/>
@@ -3532,7 +3643,7 @@
                     <a:bodyPr/>
                     <a:lstStyle/>
                     <a:p>
-                      <a:pPr marL="0" indent="0" algn="l">
+                      <a:pPr algn="l" indent="0" marL="0">
                         <a:buNone/>
                       </a:pPr>
                       <a:r>
@@ -3540,20 +3651,20 @@
                           <a:solidFill>
                             <a:srgbClr val="1F2329"/>
                           </a:solidFill>
-                          <a:latin typeface="微软雅黑" panose="020B0503020204020204" pitchFamily="34" charset="-122"/>
-                          <a:ea typeface="微软雅黑" panose="020B0503020204020204" pitchFamily="34" charset="-122"/>
-                          <a:cs typeface="微软雅黑" panose="020B0503020204020204" pitchFamily="34" charset="-120"/>
+                          <a:latin typeface="微软雅黑" pitchFamily="34" charset="0"/>
+                          <a:ea typeface="微软雅黑" pitchFamily="34" charset="-122"/>
+                          <a:cs typeface="微软雅黑" pitchFamily="34" charset="-120"/>
                         </a:rPr>
                         <a:t>删除后继的语句级操作，程序阅读挖空直考形态</a:t>
                       </a:r>
                       <a:endParaRPr lang="en-US" sz="1500" dirty="0">
-                        <a:latin typeface="微软雅黑" panose="020B0503020204020204" pitchFamily="34" charset="-122"/>
-                        <a:ea typeface="微软雅黑" panose="020B0503020204020204" pitchFamily="34" charset="-122"/>
-                        <a:cs typeface="微软雅黑" panose="020B0503020204020204" pitchFamily="34" charset="-122"/>
+                        <a:latin typeface="微软雅黑" charset="0"/>
+                        <a:ea typeface="微软雅黑" charset="0"/>
+                        <a:cs typeface="微软雅黑" charset="0"/>
                       </a:endParaRPr>
                     </a:p>
                   </a:txBody>
-                  <a:tcPr anchor="ctr">
+                  <a:tcPr marL="91440" marR="91440" marT="45720" marB="45720" anchor="ctr">
                     <a:lnL w="9525" cap="flat" cmpd="sng" algn="ctr">
                       <a:solidFill>
                         <a:srgbClr val="D8DBE0"/>
@@ -3602,7 +3713,7 @@
                     <a:bodyPr/>
                     <a:lstStyle/>
                     <a:p>
-                      <a:pPr marL="0" indent="0" algn="l">
+                      <a:pPr algn="l" indent="0" marL="0">
                         <a:buNone/>
                       </a:pPr>
                       <a:r>
@@ -3610,20 +3721,20 @@
                           <a:solidFill>
                             <a:srgbClr val="1F2329"/>
                           </a:solidFill>
-                          <a:latin typeface="微软雅黑" panose="020B0503020204020204" pitchFamily="34" charset="-122"/>
-                          <a:ea typeface="微软雅黑" panose="020B0503020204020204" pitchFamily="34" charset="-122"/>
-                          <a:cs typeface="微软雅黑" panose="020B0503020204020204" pitchFamily="34" charset="-120"/>
+                          <a:latin typeface="微软雅黑" pitchFamily="34" charset="0"/>
+                          <a:ea typeface="微软雅黑" pitchFamily="34" charset="-122"/>
+                          <a:cs typeface="微软雅黑" pitchFamily="34" charset="-120"/>
                         </a:rPr>
                         <a:t>2选18</a:t>
                       </a:r>
                       <a:endParaRPr lang="en-US" sz="1500" dirty="0">
-                        <a:latin typeface="微软雅黑" panose="020B0503020204020204" pitchFamily="34" charset="-122"/>
-                        <a:ea typeface="微软雅黑" panose="020B0503020204020204" pitchFamily="34" charset="-122"/>
-                        <a:cs typeface="微软雅黑" panose="020B0503020204020204" pitchFamily="34" charset="-122"/>
+                        <a:latin typeface="微软雅黑" charset="0"/>
+                        <a:ea typeface="微软雅黑" charset="0"/>
+                        <a:cs typeface="微软雅黑" charset="0"/>
                       </a:endParaRPr>
                     </a:p>
                   </a:txBody>
-                  <a:tcPr anchor="ctr">
+                  <a:tcPr marL="91440" marR="91440" marT="45720" marB="45720" anchor="ctr">
                     <a:lnL w="9525" cap="flat" cmpd="sng" algn="ctr">
                       <a:solidFill>
                         <a:srgbClr val="D8DBE0"/>
@@ -3670,7 +3781,7 @@
                     <a:bodyPr/>
                     <a:lstStyle/>
                     <a:p>
-                      <a:pPr marL="0" indent="0" algn="l">
+                      <a:pPr algn="l" indent="0" marL="0">
                         <a:buNone/>
                       </a:pPr>
                       <a:r>
@@ -3678,20 +3789,20 @@
                           <a:solidFill>
                             <a:srgbClr val="1F2329"/>
                           </a:solidFill>
-                          <a:latin typeface="微软雅黑" panose="020B0503020204020204" pitchFamily="34" charset="-122"/>
-                          <a:ea typeface="微软雅黑" panose="020B0503020204020204" pitchFamily="34" charset="-122"/>
-                          <a:cs typeface="微软雅黑" panose="020B0503020204020204" pitchFamily="34" charset="-120"/>
+                          <a:latin typeface="微软雅黑" pitchFamily="34" charset="0"/>
+                          <a:ea typeface="微软雅黑" pitchFamily="34" charset="-122"/>
+                          <a:cs typeface="微软雅黑" pitchFamily="34" charset="-120"/>
                         </a:rPr>
                         <a:t>指针语句操作</a:t>
                       </a:r>
                       <a:endParaRPr lang="en-US" sz="1500" dirty="0">
-                        <a:latin typeface="微软雅黑" panose="020B0503020204020204" pitchFamily="34" charset="-122"/>
-                        <a:ea typeface="微软雅黑" panose="020B0503020204020204" pitchFamily="34" charset="-122"/>
-                        <a:cs typeface="微软雅黑" panose="020B0503020204020204" pitchFamily="34" charset="-122"/>
+                        <a:latin typeface="微软雅黑" charset="0"/>
+                        <a:ea typeface="微软雅黑" charset="0"/>
+                        <a:cs typeface="微软雅黑" charset="0"/>
                       </a:endParaRPr>
                     </a:p>
                   </a:txBody>
-                  <a:tcPr anchor="ctr">
+                  <a:tcPr marL="91440" marR="91440" marT="45720" marB="45720" anchor="ctr">
                     <a:lnL w="9525" cap="flat" cmpd="sng" algn="ctr">
                       <a:solidFill>
                         <a:srgbClr val="D8DBE0"/>
@@ -3738,7 +3849,7 @@
                     <a:bodyPr/>
                     <a:lstStyle/>
                     <a:p>
-                      <a:pPr marL="0" indent="0" algn="l">
+                      <a:pPr algn="l" indent="0" marL="0">
                         <a:buNone/>
                       </a:pPr>
                       <a:r>
@@ -3746,20 +3857,20 @@
                           <a:solidFill>
                             <a:srgbClr val="1F2329"/>
                           </a:solidFill>
-                          <a:latin typeface="微软雅黑" panose="020B0503020204020204" pitchFamily="34" charset="-122"/>
-                          <a:ea typeface="微软雅黑" panose="020B0503020204020204" pitchFamily="34" charset="-122"/>
-                          <a:cs typeface="微软雅黑" panose="020B0503020204020204" pitchFamily="34" charset="-120"/>
+                          <a:latin typeface="微软雅黑" pitchFamily="34" charset="0"/>
+                          <a:ea typeface="微软雅黑" pitchFamily="34" charset="-122"/>
+                          <a:cs typeface="微软雅黑" pitchFamily="34" charset="-120"/>
                         </a:rPr>
                         <a:t>p后插s的两语句次序（2024阅读2考的是前插需先找前驱</a:t>
                       </a:r>
                       <a:endParaRPr lang="en-US" sz="1500" dirty="0">
-                        <a:latin typeface="微软雅黑" panose="020B0503020204020204" pitchFamily="34" charset="-122"/>
-                        <a:ea typeface="微软雅黑" panose="020B0503020204020204" pitchFamily="34" charset="-122"/>
-                        <a:cs typeface="微软雅黑" panose="020B0503020204020204" pitchFamily="34" charset="-122"/>
+                        <a:latin typeface="微软雅黑" charset="0"/>
+                        <a:ea typeface="微软雅黑" charset="0"/>
+                        <a:cs typeface="微软雅黑" charset="0"/>
                       </a:endParaRPr>
                     </a:p>
                   </a:txBody>
-                  <a:tcPr anchor="ctr">
+                  <a:tcPr marL="91440" marR="91440" marT="45720" marB="45720" anchor="ctr">
                     <a:lnL w="9525" cap="flat" cmpd="sng" algn="ctr">
                       <a:solidFill>
                         <a:srgbClr val="D8DBE0"/>
@@ -3808,7 +3919,7 @@
                     <a:bodyPr/>
                     <a:lstStyle/>
                     <a:p>
-                      <a:pPr marL="0" indent="0" algn="l">
+                      <a:pPr algn="l" indent="0" marL="0">
                         <a:buNone/>
                       </a:pPr>
                       <a:r>
@@ -3816,20 +3927,20 @@
                           <a:solidFill>
                             <a:srgbClr val="1F2329"/>
                           </a:solidFill>
-                          <a:latin typeface="微软雅黑" panose="020B0503020204020204" pitchFamily="34" charset="-122"/>
-                          <a:ea typeface="微软雅黑" panose="020B0503020204020204" pitchFamily="34" charset="-122"/>
-                          <a:cs typeface="微软雅黑" panose="020B0503020204020204" pitchFamily="34" charset="-120"/>
+                          <a:latin typeface="微软雅黑" pitchFamily="34" charset="0"/>
+                          <a:ea typeface="微软雅黑" pitchFamily="34" charset="-122"/>
+                          <a:cs typeface="微软雅黑" pitchFamily="34" charset="-120"/>
                         </a:rPr>
                         <a:t>2答4</a:t>
                       </a:r>
                       <a:endParaRPr lang="en-US" sz="1500" dirty="0">
-                        <a:latin typeface="微软雅黑" panose="020B0503020204020204" pitchFamily="34" charset="-122"/>
-                        <a:ea typeface="微软雅黑" panose="020B0503020204020204" pitchFamily="34" charset="-122"/>
-                        <a:cs typeface="微软雅黑" panose="020B0503020204020204" pitchFamily="34" charset="-122"/>
+                        <a:latin typeface="微软雅黑" charset="0"/>
+                        <a:ea typeface="微软雅黑" charset="0"/>
+                        <a:cs typeface="微软雅黑" charset="0"/>
                       </a:endParaRPr>
                     </a:p>
                   </a:txBody>
-                  <a:tcPr anchor="ctr">
+                  <a:tcPr marL="91440" marR="91440" marT="45720" marB="45720" anchor="ctr">
                     <a:lnL w="9525" cap="flat" cmpd="sng" algn="ctr">
                       <a:solidFill>
                         <a:srgbClr val="D8DBE0"/>
@@ -3876,7 +3987,7 @@
                     <a:bodyPr/>
                     <a:lstStyle/>
                     <a:p>
-                      <a:pPr marL="0" indent="0" algn="l">
+                      <a:pPr algn="l" indent="0" marL="0">
                         <a:buNone/>
                       </a:pPr>
                       <a:r>
@@ -3884,20 +3995,20 @@
                           <a:solidFill>
                             <a:srgbClr val="1F2329"/>
                           </a:solidFill>
-                          <a:latin typeface="微软雅黑" panose="020B0503020204020204" pitchFamily="34" charset="-122"/>
-                          <a:ea typeface="微软雅黑" panose="020B0503020204020204" pitchFamily="34" charset="-122"/>
-                          <a:cs typeface="微软雅黑" panose="020B0503020204020204" pitchFamily="34" charset="-120"/>
+                          <a:latin typeface="微软雅黑" pitchFamily="34" charset="0"/>
+                          <a:ea typeface="微软雅黑" pitchFamily="34" charset="-122"/>
+                          <a:cs typeface="微软雅黑" pitchFamily="34" charset="-120"/>
                         </a:rPr>
                         <a:t>指针代码画图</a:t>
                       </a:r>
                       <a:endParaRPr lang="en-US" sz="1500" dirty="0">
-                        <a:latin typeface="微软雅黑" panose="020B0503020204020204" pitchFamily="34" charset="-122"/>
-                        <a:ea typeface="微软雅黑" panose="020B0503020204020204" pitchFamily="34" charset="-122"/>
-                        <a:cs typeface="微软雅黑" panose="020B0503020204020204" pitchFamily="34" charset="-122"/>
+                        <a:latin typeface="微软雅黑" charset="0"/>
+                        <a:ea typeface="微软雅黑" charset="0"/>
+                        <a:cs typeface="微软雅黑" charset="0"/>
                       </a:endParaRPr>
                     </a:p>
                   </a:txBody>
-                  <a:tcPr anchor="ctr">
+                  <a:tcPr marL="91440" marR="91440" marT="45720" marB="45720" anchor="ctr">
                     <a:lnL w="9525" cap="flat" cmpd="sng" algn="ctr">
                       <a:solidFill>
                         <a:srgbClr val="D8DBE0"/>
@@ -3944,7 +4055,7 @@
                     <a:bodyPr/>
                     <a:lstStyle/>
                     <a:p>
-                      <a:pPr marL="0" indent="0" algn="l">
+                      <a:pPr algn="l" indent="0" marL="0">
                         <a:buNone/>
                       </a:pPr>
                       <a:r>
@@ -3952,20 +4063,20 @@
                           <a:solidFill>
                             <a:srgbClr val="1F2329"/>
                           </a:solidFill>
-                          <a:latin typeface="微软雅黑" panose="020B0503020204020204" pitchFamily="34" charset="-122"/>
-                          <a:ea typeface="微软雅黑" panose="020B0503020204020204" pitchFamily="34" charset="-122"/>
-                          <a:cs typeface="微软雅黑" panose="020B0503020204020204" pitchFamily="34" charset="-120"/>
+                          <a:latin typeface="微软雅黑" pitchFamily="34" charset="0"/>
+                          <a:ea typeface="微软雅黑" pitchFamily="34" charset="-122"/>
+                          <a:cs typeface="微软雅黑" pitchFamily="34" charset="-120"/>
                         </a:rPr>
                         <a:t>执行程序段画链表结果图，读指针代码的基本功</a:t>
                       </a:r>
                       <a:endParaRPr lang="en-US" sz="1500" dirty="0">
-                        <a:latin typeface="微软雅黑" panose="020B0503020204020204" pitchFamily="34" charset="-122"/>
-                        <a:ea typeface="微软雅黑" panose="020B0503020204020204" pitchFamily="34" charset="-122"/>
-                        <a:cs typeface="微软雅黑" panose="020B0503020204020204" pitchFamily="34" charset="-122"/>
+                        <a:latin typeface="微软雅黑" charset="0"/>
+                        <a:ea typeface="微软雅黑" charset="0"/>
+                        <a:cs typeface="微软雅黑" charset="0"/>
                       </a:endParaRPr>
                     </a:p>
                   </a:txBody>
-                  <a:tcPr anchor="ctr">
+                  <a:tcPr marL="91440" marR="91440" marT="45720" marB="45720" anchor="ctr">
                     <a:lnL w="9525" cap="flat" cmpd="sng" algn="ctr">
                       <a:solidFill>
                         <a:srgbClr val="D8DBE0"/>
@@ -4014,7 +4125,7 @@
                     <a:bodyPr/>
                     <a:lstStyle/>
                     <a:p>
-                      <a:pPr marL="0" indent="0" algn="l">
+                      <a:pPr algn="l" indent="0" marL="0">
                         <a:buNone/>
                       </a:pPr>
                       <a:r>
@@ -4022,20 +4133,20 @@
                           <a:solidFill>
                             <a:srgbClr val="1F2329"/>
                           </a:solidFill>
-                          <a:latin typeface="微软雅黑" panose="020B0503020204020204" pitchFamily="34" charset="-122"/>
-                          <a:ea typeface="微软雅黑" panose="020B0503020204020204" pitchFamily="34" charset="-122"/>
-                          <a:cs typeface="微软雅黑" panose="020B0503020204020204" pitchFamily="34" charset="-120"/>
+                          <a:latin typeface="微软雅黑" pitchFamily="34" charset="0"/>
+                          <a:ea typeface="微软雅黑" pitchFamily="34" charset="-122"/>
+                          <a:cs typeface="微软雅黑" pitchFamily="34" charset="-120"/>
                         </a:rPr>
                         <a:t>2答5</a:t>
                       </a:r>
                       <a:endParaRPr lang="en-US" sz="1500" dirty="0">
-                        <a:latin typeface="微软雅黑" panose="020B0503020204020204" pitchFamily="34" charset="-122"/>
-                        <a:ea typeface="微软雅黑" panose="020B0503020204020204" pitchFamily="34" charset="-122"/>
-                        <a:cs typeface="微软雅黑" panose="020B0503020204020204" pitchFamily="34" charset="-122"/>
+                        <a:latin typeface="微软雅黑" charset="0"/>
+                        <a:ea typeface="微软雅黑" charset="0"/>
+                        <a:cs typeface="微软雅黑" charset="0"/>
                       </a:endParaRPr>
                     </a:p>
                   </a:txBody>
-                  <a:tcPr anchor="ctr">
+                  <a:tcPr marL="91440" marR="91440" marT="45720" marB="45720" anchor="ctr">
                     <a:lnL w="9525" cap="flat" cmpd="sng" algn="ctr">
                       <a:solidFill>
                         <a:srgbClr val="D8DBE0"/>
@@ -4082,7 +4193,7 @@
                     <a:bodyPr/>
                     <a:lstStyle/>
                     <a:p>
-                      <a:pPr marL="0" indent="0" algn="l">
+                      <a:pPr algn="l" indent="0" marL="0">
                         <a:buNone/>
                       </a:pPr>
                       <a:r>
@@ -4090,20 +4201,20 @@
                           <a:solidFill>
                             <a:srgbClr val="1F2329"/>
                           </a:solidFill>
-                          <a:latin typeface="微软雅黑" panose="020B0503020204020204" pitchFamily="34" charset="-122"/>
-                          <a:ea typeface="微软雅黑" panose="020B0503020204020204" pitchFamily="34" charset="-122"/>
-                          <a:cs typeface="微软雅黑" panose="020B0503020204020204" pitchFamily="34" charset="-120"/>
+                          <a:latin typeface="微软雅黑" pitchFamily="34" charset="0"/>
+                          <a:ea typeface="微软雅黑" pitchFamily="34" charset="-122"/>
+                          <a:cs typeface="微软雅黑" pitchFamily="34" charset="-120"/>
                         </a:rPr>
                         <a:t>指针代码画图</a:t>
                       </a:r>
                       <a:endParaRPr lang="en-US" sz="1500" dirty="0">
-                        <a:latin typeface="微软雅黑" panose="020B0503020204020204" pitchFamily="34" charset="-122"/>
-                        <a:ea typeface="微软雅黑" panose="020B0503020204020204" pitchFamily="34" charset="-122"/>
-                        <a:cs typeface="微软雅黑" panose="020B0503020204020204" pitchFamily="34" charset="-122"/>
+                        <a:latin typeface="微软雅黑" charset="0"/>
+                        <a:ea typeface="微软雅黑" charset="0"/>
+                        <a:cs typeface="微软雅黑" charset="0"/>
                       </a:endParaRPr>
                     </a:p>
                   </a:txBody>
-                  <a:tcPr anchor="ctr">
+                  <a:tcPr marL="91440" marR="91440" marT="45720" marB="45720" anchor="ctr">
                     <a:lnL w="9525" cap="flat" cmpd="sng" algn="ctr">
                       <a:solidFill>
                         <a:srgbClr val="D8DBE0"/>
@@ -4150,7 +4261,7 @@
                     <a:bodyPr/>
                     <a:lstStyle/>
                     <a:p>
-                      <a:pPr marL="0" indent="0" algn="l">
+                      <a:pPr algn="l" indent="0" marL="0">
                         <a:buNone/>
                       </a:pPr>
                       <a:r>
@@ -4158,20 +4269,20 @@
                           <a:solidFill>
                             <a:srgbClr val="1F2329"/>
                           </a:solidFill>
-                          <a:latin typeface="微软雅黑" panose="020B0503020204020204" pitchFamily="34" charset="-122"/>
-                          <a:ea typeface="微软雅黑" panose="020B0503020204020204" pitchFamily="34" charset="-122"/>
-                          <a:cs typeface="微软雅黑" panose="020B0503020204020204" pitchFamily="34" charset="-120"/>
+                          <a:latin typeface="微软雅黑" pitchFamily="34" charset="0"/>
+                          <a:ea typeface="微软雅黑" pitchFamily="34" charset="-122"/>
+                          <a:cs typeface="微软雅黑" pitchFamily="34" charset="-120"/>
                         </a:rPr>
                         <a:t>同上，画指针与链表示意图</a:t>
                       </a:r>
                       <a:endParaRPr lang="en-US" sz="1500" dirty="0">
-                        <a:latin typeface="微软雅黑" panose="020B0503020204020204" pitchFamily="34" charset="-122"/>
-                        <a:ea typeface="微软雅黑" panose="020B0503020204020204" pitchFamily="34" charset="-122"/>
-                        <a:cs typeface="微软雅黑" panose="020B0503020204020204" pitchFamily="34" charset="-122"/>
+                        <a:latin typeface="微软雅黑" charset="0"/>
+                        <a:ea typeface="微软雅黑" charset="0"/>
+                        <a:cs typeface="微软雅黑" charset="0"/>
                       </a:endParaRPr>
                     </a:p>
                   </a:txBody>
-                  <a:tcPr anchor="ctr">
+                  <a:tcPr marL="91440" marR="91440" marT="45720" marB="45720" anchor="ctr">
                     <a:lnL w="9525" cap="flat" cmpd="sng" algn="ctr">
                       <a:solidFill>
                         <a:srgbClr val="D8DBE0"/>
@@ -4220,7 +4331,7 @@
                     <a:bodyPr/>
                     <a:lstStyle/>
                     <a:p>
-                      <a:pPr marL="0" indent="0" algn="l">
+                      <a:pPr algn="l" indent="0" marL="0">
                         <a:buNone/>
                       </a:pPr>
                       <a:r>
@@ -4228,20 +4339,20 @@
                           <a:solidFill>
                             <a:srgbClr val="1F2329"/>
                           </a:solidFill>
-                          <a:latin typeface="微软雅黑" panose="020B0503020204020204" pitchFamily="34" charset="-122"/>
-                          <a:ea typeface="微软雅黑" panose="020B0503020204020204" pitchFamily="34" charset="-122"/>
-                          <a:cs typeface="微软雅黑" panose="020B0503020204020204" pitchFamily="34" charset="-120"/>
+                          <a:latin typeface="微软雅黑" pitchFamily="34" charset="0"/>
+                          <a:ea typeface="微软雅黑" pitchFamily="34" charset="-122"/>
+                          <a:cs typeface="微软雅黑" pitchFamily="34" charset="-120"/>
                         </a:rPr>
                         <a:t>2答6</a:t>
                       </a:r>
                       <a:endParaRPr lang="en-US" sz="1500" dirty="0">
-                        <a:latin typeface="微软雅黑" panose="020B0503020204020204" pitchFamily="34" charset="-122"/>
-                        <a:ea typeface="微软雅黑" panose="020B0503020204020204" pitchFamily="34" charset="-122"/>
-                        <a:cs typeface="微软雅黑" panose="020B0503020204020204" pitchFamily="34" charset="-122"/>
+                        <a:latin typeface="微软雅黑" charset="0"/>
+                        <a:ea typeface="微软雅黑" charset="0"/>
+                        <a:cs typeface="微软雅黑" charset="0"/>
                       </a:endParaRPr>
                     </a:p>
                   </a:txBody>
-                  <a:tcPr anchor="ctr">
+                  <a:tcPr marL="91440" marR="91440" marT="45720" marB="45720" anchor="ctr">
                     <a:lnL w="9525" cap="flat" cmpd="sng" algn="ctr">
                       <a:solidFill>
                         <a:srgbClr val="D8DBE0"/>
@@ -4288,7 +4399,7 @@
                     <a:bodyPr/>
                     <a:lstStyle/>
                     <a:p>
-                      <a:pPr marL="0" indent="0" algn="l">
+                      <a:pPr algn="l" indent="0" marL="0">
                         <a:buNone/>
                       </a:pPr>
                       <a:r>
@@ -4296,20 +4407,20 @@
                           <a:solidFill>
                             <a:srgbClr val="1F2329"/>
                           </a:solidFill>
-                          <a:latin typeface="微软雅黑" panose="020B0503020204020204" pitchFamily="34" charset="-122"/>
-                          <a:ea typeface="微软雅黑" panose="020B0503020204020204" pitchFamily="34" charset="-122"/>
-                          <a:cs typeface="微软雅黑" panose="020B0503020204020204" pitchFamily="34" charset="-120"/>
+                          <a:latin typeface="微软雅黑" pitchFamily="34" charset="0"/>
+                          <a:ea typeface="微软雅黑" pitchFamily="34" charset="-122"/>
+                          <a:cs typeface="微软雅黑" pitchFamily="34" charset="-120"/>
                         </a:rPr>
                         <a:t>结点插入语句序列</a:t>
                       </a:r>
                       <a:endParaRPr lang="en-US" sz="1500" dirty="0">
-                        <a:latin typeface="微软雅黑" panose="020B0503020204020204" pitchFamily="34" charset="-122"/>
-                        <a:ea typeface="微软雅黑" panose="020B0503020204020204" pitchFamily="34" charset="-122"/>
-                        <a:cs typeface="微软雅黑" panose="020B0503020204020204" pitchFamily="34" charset="-122"/>
+                        <a:latin typeface="微软雅黑" charset="0"/>
+                        <a:ea typeface="微软雅黑" charset="0"/>
+                        <a:cs typeface="微软雅黑" charset="0"/>
                       </a:endParaRPr>
                     </a:p>
                   </a:txBody>
-                  <a:tcPr anchor="ctr">
+                  <a:tcPr marL="91440" marR="91440" marT="45720" marB="45720" anchor="ctr">
                     <a:lnL w="9525" cap="flat" cmpd="sng" algn="ctr">
                       <a:solidFill>
                         <a:srgbClr val="D8DBE0"/>
@@ -4356,7 +4467,7 @@
                     <a:bodyPr/>
                     <a:lstStyle/>
                     <a:p>
-                      <a:pPr marL="0" indent="0" algn="l">
+                      <a:pPr algn="l" indent="0" marL="0">
                         <a:buNone/>
                       </a:pPr>
                       <a:r>
@@ -4364,20 +4475,20 @@
                           <a:solidFill>
                             <a:srgbClr val="1F2329"/>
                           </a:solidFill>
-                          <a:latin typeface="微软雅黑" panose="020B0503020204020204" pitchFamily="34" charset="-122"/>
-                          <a:ea typeface="微软雅黑" panose="020B0503020204020204" pitchFamily="34" charset="-122"/>
-                          <a:cs typeface="微软雅黑" panose="020B0503020204020204" pitchFamily="34" charset="-120"/>
+                          <a:latin typeface="微软雅黑" pitchFamily="34" charset="0"/>
+                          <a:ea typeface="微软雅黑" pitchFamily="34" charset="-122"/>
+                          <a:cs typeface="微软雅黑" pitchFamily="34" charset="-120"/>
                         </a:rPr>
                         <a:t>无头结点前插/后插选语句，2024阅读2同型（前插需先找前驱）</a:t>
                       </a:r>
                       <a:endParaRPr lang="en-US" sz="1500" dirty="0">
-                        <a:latin typeface="微软雅黑" panose="020B0503020204020204" pitchFamily="34" charset="-122"/>
-                        <a:ea typeface="微软雅黑" panose="020B0503020204020204" pitchFamily="34" charset="-122"/>
-                        <a:cs typeface="微软雅黑" panose="020B0503020204020204" pitchFamily="34" charset="-122"/>
+                        <a:latin typeface="微软雅黑" charset="0"/>
+                        <a:ea typeface="微软雅黑" charset="0"/>
+                        <a:cs typeface="微软雅黑" charset="0"/>
                       </a:endParaRPr>
                     </a:p>
                   </a:txBody>
-                  <a:tcPr anchor="ctr">
+                  <a:tcPr marL="91440" marR="91440" marT="45720" marB="45720" anchor="ctr">
                     <a:lnL w="9525" cap="flat" cmpd="sng" algn="ctr">
                       <a:solidFill>
                         <a:srgbClr val="D8DBE0"/>
@@ -4426,7 +4537,7 @@
                     <a:bodyPr/>
                     <a:lstStyle/>
                     <a:p>
-                      <a:pPr marL="0" indent="0" algn="l">
+                      <a:pPr algn="l" indent="0" marL="0">
                         <a:buNone/>
                       </a:pPr>
                       <a:r>
@@ -4434,20 +4545,20 @@
                           <a:solidFill>
                             <a:srgbClr val="1F2329"/>
                           </a:solidFill>
-                          <a:latin typeface="微软雅黑" panose="020B0503020204020204" pitchFamily="34" charset="-122"/>
-                          <a:ea typeface="微软雅黑" panose="020B0503020204020204" pitchFamily="34" charset="-122"/>
-                          <a:cs typeface="微软雅黑" panose="020B0503020204020204" pitchFamily="34" charset="-120"/>
+                          <a:latin typeface="微软雅黑" pitchFamily="34" charset="0"/>
+                          <a:ea typeface="微软雅黑" pitchFamily="34" charset="-122"/>
+                          <a:cs typeface="微软雅黑" pitchFamily="34" charset="-120"/>
                         </a:rPr>
                         <a:t>2答7</a:t>
                       </a:r>
                       <a:endParaRPr lang="en-US" sz="1500" dirty="0">
-                        <a:latin typeface="微软雅黑" panose="020B0503020204020204" pitchFamily="34" charset="-122"/>
-                        <a:ea typeface="微软雅黑" panose="020B0503020204020204" pitchFamily="34" charset="-122"/>
-                        <a:cs typeface="微软雅黑" panose="020B0503020204020204" pitchFamily="34" charset="-122"/>
+                        <a:latin typeface="微软雅黑" charset="0"/>
+                        <a:ea typeface="微软雅黑" charset="0"/>
+                        <a:cs typeface="微软雅黑" charset="0"/>
                       </a:endParaRPr>
                     </a:p>
                   </a:txBody>
-                  <a:tcPr anchor="ctr">
+                  <a:tcPr marL="91440" marR="91440" marT="45720" marB="45720" anchor="ctr">
                     <a:lnL w="9525" cap="flat" cmpd="sng" algn="ctr">
                       <a:solidFill>
                         <a:srgbClr val="D8DBE0"/>
@@ -4494,7 +4605,7 @@
                     <a:bodyPr/>
                     <a:lstStyle/>
                     <a:p>
-                      <a:pPr marL="0" indent="0" algn="l">
+                      <a:pPr algn="l" indent="0" marL="0">
                         <a:buNone/>
                       </a:pPr>
                       <a:r>
@@ -4502,20 +4613,20 @@
                           <a:solidFill>
                             <a:srgbClr val="1F2329"/>
                           </a:solidFill>
-                          <a:latin typeface="微软雅黑" panose="020B0503020204020204" pitchFamily="34" charset="-122"/>
-                          <a:ea typeface="微软雅黑" panose="020B0503020204020204" pitchFamily="34" charset="-122"/>
-                          <a:cs typeface="微软雅黑" panose="020B0503020204020204" pitchFamily="34" charset="-120"/>
+                          <a:latin typeface="微软雅黑" pitchFamily="34" charset="0"/>
+                          <a:ea typeface="微软雅黑" pitchFamily="34" charset="-122"/>
+                          <a:cs typeface="微软雅黑" pitchFamily="34" charset="-120"/>
                         </a:rPr>
                         <a:t>结点插入语句序列</a:t>
                       </a:r>
                       <a:endParaRPr lang="en-US" sz="1500" dirty="0">
-                        <a:latin typeface="微软雅黑" panose="020B0503020204020204" pitchFamily="34" charset="-122"/>
-                        <a:ea typeface="微软雅黑" panose="020B0503020204020204" pitchFamily="34" charset="-122"/>
-                        <a:cs typeface="微软雅黑" panose="020B0503020204020204" pitchFamily="34" charset="-122"/>
+                        <a:latin typeface="微软雅黑" charset="0"/>
+                        <a:ea typeface="微软雅黑" charset="0"/>
+                        <a:cs typeface="微软雅黑" charset="0"/>
                       </a:endParaRPr>
                     </a:p>
                   </a:txBody>
-                  <a:tcPr anchor="ctr">
+                  <a:tcPr marL="91440" marR="91440" marT="45720" marB="45720" anchor="ctr">
                     <a:lnL w="9525" cap="flat" cmpd="sng" algn="ctr">
                       <a:solidFill>
                         <a:srgbClr val="D8DBE0"/>
@@ -4562,7 +4673,7 @@
                     <a:bodyPr/>
                     <a:lstStyle/>
                     <a:p>
-                      <a:pPr marL="0" indent="0" algn="l">
+                      <a:pPr algn="l" indent="0" marL="0">
                         <a:buNone/>
                       </a:pPr>
                       <a:r>
@@ -4570,20 +4681,20 @@
                           <a:solidFill>
                             <a:srgbClr val="1F2329"/>
                           </a:solidFill>
-                          <a:latin typeface="微软雅黑" panose="020B0503020204020204" pitchFamily="34" charset="-122"/>
-                          <a:ea typeface="微软雅黑" panose="020B0503020204020204" pitchFamily="34" charset="-122"/>
-                          <a:cs typeface="微软雅黑" panose="020B0503020204020204" pitchFamily="34" charset="-120"/>
+                          <a:latin typeface="微软雅黑" pitchFamily="34" charset="0"/>
+                          <a:ea typeface="微软雅黑" pitchFamily="34" charset="-122"/>
+                          <a:cs typeface="微软雅黑" pitchFamily="34" charset="-120"/>
                         </a:rPr>
                         <a:t>带头结点版本，认结构（有无头结点）对比训练</a:t>
                       </a:r>
                       <a:endParaRPr lang="en-US" sz="1500" dirty="0">
-                        <a:latin typeface="微软雅黑" panose="020B0503020204020204" pitchFamily="34" charset="-122"/>
-                        <a:ea typeface="微软雅黑" panose="020B0503020204020204" pitchFamily="34" charset="-122"/>
-                        <a:cs typeface="微软雅黑" panose="020B0503020204020204" pitchFamily="34" charset="-122"/>
+                        <a:latin typeface="微软雅黑" charset="0"/>
+                        <a:ea typeface="微软雅黑" charset="0"/>
+                        <a:cs typeface="微软雅黑" charset="0"/>
                       </a:endParaRPr>
                     </a:p>
                   </a:txBody>
-                  <a:tcPr anchor="ctr">
+                  <a:tcPr marL="91440" marR="91440" marT="45720" marB="45720" anchor="ctr">
                     <a:lnL w="9525" cap="flat" cmpd="sng" algn="ctr">
                       <a:solidFill>
                         <a:srgbClr val="D8DBE0"/>
@@ -4640,7 +4751,7 @@
 
 <file path=ppt/slides/slide4.xml><?xml version="1.0" encoding="utf-8"?>
 <p:sld xmlns:a="http://schemas.openxmlformats.org/drawingml/2006/main" xmlns:r="http://schemas.openxmlformats.org/officeDocument/2006/relationships" xmlns:p="http://schemas.openxmlformats.org/presentationml/2006/main">
-  <p:cSld>
+  <p:cSld name="Slide 4">
     <p:bg>
       <p:bgPr>
         <a:blipFill dpi="0" rotWithShape="1">
@@ -4684,12 +4795,13 @@
             <a:avLst/>
           </a:prstGeom>
           <a:noFill/>
+          <a:ln/>
         </p:spPr>
         <p:txBody>
           <a:bodyPr wrap="square" rtlCol="0" anchor="ctr"/>
           <a:lstStyle/>
           <a:p>
-            <a:pPr marL="0" indent="0" algn="r">
+            <a:pPr algn="r" indent="0" marL="0">
               <a:buNone/>
             </a:pPr>
             <a:r>
@@ -4697,9 +4809,9 @@
                 <a:solidFill>
                   <a:srgbClr val="8A9099"/>
                 </a:solidFill>
-                <a:latin typeface="微软雅黑" panose="020B0503020204020204" pitchFamily="34" charset="-122"/>
-                <a:ea typeface="微软雅黑" panose="020B0503020204020204" pitchFamily="34" charset="-122"/>
-                <a:cs typeface="微软雅黑" panose="020B0503020204020204" pitchFamily="34" charset="-120"/>
+                <a:latin typeface="微软雅黑" pitchFamily="34" charset="0"/>
+                <a:ea typeface="微软雅黑" pitchFamily="34" charset="-122"/>
+                <a:cs typeface="微软雅黑" pitchFamily="34" charset="-120"/>
               </a:rPr>
               <a:t>4 / 9</a:t>
             </a:r>
@@ -4722,12 +4834,13 @@
             <a:avLst/>
           </a:prstGeom>
           <a:noFill/>
+          <a:ln/>
         </p:spPr>
         <p:txBody>
           <a:bodyPr wrap="square" rtlCol="0" anchor="ctr"/>
           <a:lstStyle/>
           <a:p>
-            <a:pPr marL="0" indent="0" algn="l">
+            <a:pPr algn="l" indent="0" marL="0">
               <a:buNone/>
             </a:pPr>
             <a:r>
@@ -4735,9 +4848,9 @@
                 <a:solidFill>
                   <a:srgbClr val="1F4E9C"/>
                 </a:solidFill>
-                <a:latin typeface="微软雅黑" panose="020B0503020204020204" pitchFamily="34" charset="-122"/>
-                <a:ea typeface="微软雅黑" panose="020B0503020204020204" pitchFamily="34" charset="-122"/>
-                <a:cs typeface="微软雅黑" panose="020B0503020204020204" pitchFamily="34" charset="-120"/>
+                <a:latin typeface="微软雅黑" pitchFamily="34" charset="0"/>
+                <a:ea typeface="微软雅黑" pitchFamily="34" charset="-122"/>
+                <a:cs typeface="微软雅黑" pitchFamily="34" charset="-120"/>
               </a:rPr>
               <a:t>有价值必做</a:t>
             </a:r>
@@ -4760,12 +4873,13 @@
             <a:avLst/>
           </a:prstGeom>
           <a:noFill/>
+          <a:ln/>
         </p:spPr>
         <p:txBody>
           <a:bodyPr wrap="square" rtlCol="0" anchor="ctr"/>
           <a:lstStyle/>
           <a:p>
-            <a:pPr marL="0" indent="0" algn="l">
+            <a:pPr algn="l" indent="0" marL="0">
               <a:buNone/>
             </a:pPr>
             <a:r>
@@ -4773,9 +4887,9 @@
                 <a:solidFill>
                   <a:srgbClr val="1F2329"/>
                 </a:solidFill>
-                <a:latin typeface="微软雅黑" panose="020B0503020204020204" pitchFamily="34" charset="-122"/>
-                <a:ea typeface="微软雅黑" panose="020B0503020204020204" pitchFamily="34" charset="-122"/>
-                <a:cs typeface="微软雅黑" panose="020B0503020204020204" pitchFamily="34" charset="-120"/>
+                <a:latin typeface="微软雅黑" pitchFamily="34" charset="0"/>
+                <a:ea typeface="微软雅黑" pitchFamily="34" charset="-122"/>
+                <a:cs typeface="微软雅黑" pitchFamily="34" charset="-120"/>
               </a:rPr>
               <a:t>必做题（2/4）</a:t>
             </a:r>
@@ -4789,11 +4903,17 @@
           <p:cNvGraphicFramePr>
             <a:graphicFrameLocks noGrp="1"/>
           </p:cNvGraphicFramePr>
-          <p:nvPr/>
+          <p:nvPr>
+            <p:extLst>
+              <p:ext uri="{D42A27DB-BD31-4B8C-83A1-F6EECF244321}">
+                <p14:modId xmlns:p14="http://schemas.microsoft.com/office/powerpoint/2010/main" val="1579011935"/>
+              </p:ext>
+            </p:extLst>
+          </p:nvPr>
         </p:nvGraphicFramePr>
         <p:xfrm>
           <a:off x="822960" y="2395728"/>
-          <a:ext cx="10545775" cy="2944368"/>
+          <a:ext cx="10545775" cy="914400"/>
         </p:xfrm>
         <a:graphic>
           <a:graphicData uri="http://schemas.openxmlformats.org/drawingml/2006/table">
@@ -4810,7 +4930,7 @@
                     <a:bodyPr/>
                     <a:lstStyle/>
                     <a:p>
-                      <a:pPr marL="0" indent="0" algn="l">
+                      <a:pPr algn="l" indent="0" marL="0">
                         <a:buNone/>
                       </a:pPr>
                       <a:r>
@@ -4818,20 +4938,20 @@
                           <a:solidFill>
                             <a:srgbClr val="1F4E9C"/>
                           </a:solidFill>
-                          <a:latin typeface="微软雅黑" panose="020B0503020204020204" pitchFamily="34" charset="-122"/>
-                          <a:ea typeface="微软雅黑" panose="020B0503020204020204" pitchFamily="34" charset="-122"/>
-                          <a:cs typeface="微软雅黑" panose="020B0503020204020204" pitchFamily="34" charset="-120"/>
+                          <a:latin typeface="微软雅黑" pitchFamily="34" charset="0"/>
+                          <a:ea typeface="微软雅黑" pitchFamily="34" charset="-122"/>
+                          <a:cs typeface="微软雅黑" pitchFamily="34" charset="-120"/>
                         </a:rPr>
                         <a:t>题号</a:t>
                       </a:r>
                       <a:endParaRPr lang="en-US" sz="1500" dirty="0">
-                        <a:latin typeface="微软雅黑" panose="020B0503020204020204" pitchFamily="34" charset="-122"/>
-                        <a:ea typeface="微软雅黑" panose="020B0503020204020204" pitchFamily="34" charset="-122"/>
-                        <a:cs typeface="微软雅黑" panose="020B0503020204020204" pitchFamily="34" charset="-122"/>
+                        <a:latin typeface="微软雅黑" charset="0"/>
+                        <a:ea typeface="微软雅黑" charset="0"/>
+                        <a:cs typeface="微软雅黑" charset="0"/>
                       </a:endParaRPr>
                     </a:p>
                   </a:txBody>
-                  <a:tcPr anchor="ctr">
+                  <a:tcPr marL="91440" marR="91440" marT="45720" marB="45720" anchor="ctr">
                     <a:lnL w="9525" cap="flat" cmpd="sng" algn="ctr">
                       <a:solidFill>
                         <a:srgbClr val="D8DBE0"/>
@@ -4878,7 +4998,7 @@
                     <a:bodyPr/>
                     <a:lstStyle/>
                     <a:p>
-                      <a:pPr marL="0" indent="0" algn="l">
+                      <a:pPr algn="l" indent="0" marL="0">
                         <a:buNone/>
                       </a:pPr>
                       <a:r>
@@ -4886,20 +5006,20 @@
                           <a:solidFill>
                             <a:srgbClr val="1F4E9C"/>
                           </a:solidFill>
-                          <a:latin typeface="微软雅黑" panose="020B0503020204020204" pitchFamily="34" charset="-122"/>
-                          <a:ea typeface="微软雅黑" panose="020B0503020204020204" pitchFamily="34" charset="-122"/>
-                          <a:cs typeface="微软雅黑" panose="020B0503020204020204" pitchFamily="34" charset="-120"/>
+                          <a:latin typeface="微软雅黑" pitchFamily="34" charset="0"/>
+                          <a:ea typeface="微软雅黑" pitchFamily="34" charset="-122"/>
+                          <a:cs typeface="微软雅黑" pitchFamily="34" charset="-120"/>
                         </a:rPr>
                         <a:t>考点</a:t>
                       </a:r>
                       <a:endParaRPr lang="en-US" sz="1500" dirty="0">
-                        <a:latin typeface="微软雅黑" panose="020B0503020204020204" pitchFamily="34" charset="-122"/>
-                        <a:ea typeface="微软雅黑" panose="020B0503020204020204" pitchFamily="34" charset="-122"/>
-                        <a:cs typeface="微软雅黑" panose="020B0503020204020204" pitchFamily="34" charset="-122"/>
+                        <a:latin typeface="微软雅黑" charset="0"/>
+                        <a:ea typeface="微软雅黑" charset="0"/>
+                        <a:cs typeface="微软雅黑" charset="0"/>
                       </a:endParaRPr>
                     </a:p>
                   </a:txBody>
-                  <a:tcPr anchor="ctr">
+                  <a:tcPr marL="91440" marR="91440" marT="45720" marB="45720" anchor="ctr">
                     <a:lnL w="9525" cap="flat" cmpd="sng" algn="ctr">
                       <a:solidFill>
                         <a:srgbClr val="D8DBE0"/>
@@ -4946,7 +5066,7 @@
                     <a:bodyPr/>
                     <a:lstStyle/>
                     <a:p>
-                      <a:pPr marL="0" indent="0" algn="l">
+                      <a:pPr algn="l" indent="0" marL="0">
                         <a:buNone/>
                       </a:pPr>
                       <a:r>
@@ -4954,20 +5074,20 @@
                           <a:solidFill>
                             <a:srgbClr val="1F4E9C"/>
                           </a:solidFill>
-                          <a:latin typeface="微软雅黑" panose="020B0503020204020204" pitchFamily="34" charset="-122"/>
-                          <a:ea typeface="微软雅黑" panose="020B0503020204020204" pitchFamily="34" charset="-122"/>
-                          <a:cs typeface="微软雅黑" panose="020B0503020204020204" pitchFamily="34" charset="-120"/>
+                          <a:latin typeface="微软雅黑" pitchFamily="34" charset="0"/>
+                          <a:ea typeface="微软雅黑" pitchFamily="34" charset="-122"/>
+                          <a:cs typeface="微软雅黑" pitchFamily="34" charset="-120"/>
                         </a:rPr>
                         <a:t>价值</a:t>
                       </a:r>
                       <a:endParaRPr lang="en-US" sz="1500" dirty="0">
-                        <a:latin typeface="微软雅黑" panose="020B0503020204020204" pitchFamily="34" charset="-122"/>
-                        <a:ea typeface="微软雅黑" panose="020B0503020204020204" pitchFamily="34" charset="-122"/>
-                        <a:cs typeface="微软雅黑" panose="020B0503020204020204" pitchFamily="34" charset="-122"/>
+                        <a:latin typeface="微软雅黑" charset="0"/>
+                        <a:ea typeface="微软雅黑" charset="0"/>
+                        <a:cs typeface="微软雅黑" charset="0"/>
                       </a:endParaRPr>
                     </a:p>
                   </a:txBody>
-                  <a:tcPr anchor="ctr">
+                  <a:tcPr marL="91440" marR="91440" marT="45720" marB="45720" anchor="ctr">
                     <a:lnL w="9525" cap="flat" cmpd="sng" algn="ctr">
                       <a:solidFill>
                         <a:srgbClr val="D8DBE0"/>
@@ -5016,7 +5136,7 @@
                     <a:bodyPr/>
                     <a:lstStyle/>
                     <a:p>
-                      <a:pPr marL="0" indent="0" algn="l">
+                      <a:pPr algn="l" indent="0" marL="0">
                         <a:buNone/>
                       </a:pPr>
                       <a:r>
@@ -5024,20 +5144,20 @@
                           <a:solidFill>
                             <a:srgbClr val="1F2329"/>
                           </a:solidFill>
-                          <a:latin typeface="微软雅黑" panose="020B0503020204020204" pitchFamily="34" charset="-122"/>
-                          <a:ea typeface="微软雅黑" panose="020B0503020204020204" pitchFamily="34" charset="-122"/>
-                          <a:cs typeface="微软雅黑" panose="020B0503020204020204" pitchFamily="34" charset="-120"/>
+                          <a:latin typeface="微软雅黑" pitchFamily="34" charset="0"/>
+                          <a:ea typeface="微软雅黑" pitchFamily="34" charset="-122"/>
+                          <a:cs typeface="微软雅黑" pitchFamily="34" charset="-120"/>
                         </a:rPr>
                         <a:t>2答8</a:t>
                       </a:r>
                       <a:endParaRPr lang="en-US" sz="1500" dirty="0">
-                        <a:latin typeface="微软雅黑" panose="020B0503020204020204" pitchFamily="34" charset="-122"/>
-                        <a:ea typeface="微软雅黑" panose="020B0503020204020204" pitchFamily="34" charset="-122"/>
-                        <a:cs typeface="微软雅黑" panose="020B0503020204020204" pitchFamily="34" charset="-122"/>
+                        <a:latin typeface="微软雅黑" charset="0"/>
+                        <a:ea typeface="微软雅黑" charset="0"/>
+                        <a:cs typeface="微软雅黑" charset="0"/>
                       </a:endParaRPr>
                     </a:p>
                   </a:txBody>
-                  <a:tcPr anchor="ctr">
+                  <a:tcPr marL="91440" marR="91440" marT="45720" marB="45720" anchor="ctr">
                     <a:lnL w="9525" cap="flat" cmpd="sng" algn="ctr">
                       <a:solidFill>
                         <a:srgbClr val="D8DBE0"/>
@@ -5084,7 +5204,7 @@
                     <a:bodyPr/>
                     <a:lstStyle/>
                     <a:p>
-                      <a:pPr marL="0" indent="0" algn="l">
+                      <a:pPr algn="l" indent="0" marL="0">
                         <a:buNone/>
                       </a:pPr>
                       <a:r>
@@ -5092,20 +5212,20 @@
                           <a:solidFill>
                             <a:srgbClr val="1F2329"/>
                           </a:solidFill>
-                          <a:latin typeface="微软雅黑" panose="020B0503020204020204" pitchFamily="34" charset="-122"/>
-                          <a:ea typeface="微软雅黑" panose="020B0503020204020204" pitchFamily="34" charset="-122"/>
-                          <a:cs typeface="微软雅黑" panose="020B0503020204020204" pitchFamily="34" charset="-120"/>
+                          <a:latin typeface="微软雅黑" pitchFamily="34" charset="0"/>
+                          <a:ea typeface="微软雅黑" pitchFamily="34" charset="-122"/>
+                          <a:cs typeface="微软雅黑" pitchFamily="34" charset="-120"/>
                         </a:rPr>
                         <a:t>双链表指针次序</a:t>
                       </a:r>
                       <a:endParaRPr lang="en-US" sz="1500" dirty="0">
-                        <a:latin typeface="微软雅黑" panose="020B0503020204020204" pitchFamily="34" charset="-122"/>
-                        <a:ea typeface="微软雅黑" panose="020B0503020204020204" pitchFamily="34" charset="-122"/>
-                        <a:cs typeface="微软雅黑" panose="020B0503020204020204" pitchFamily="34" charset="-122"/>
+                        <a:latin typeface="微软雅黑" charset="0"/>
+                        <a:ea typeface="微软雅黑" charset="0"/>
+                        <a:cs typeface="微软雅黑" charset="0"/>
                       </a:endParaRPr>
                     </a:p>
                   </a:txBody>
-                  <a:tcPr anchor="ctr">
+                  <a:tcPr marL="91440" marR="91440" marT="45720" marB="45720" anchor="ctr">
                     <a:lnL w="9525" cap="flat" cmpd="sng" algn="ctr">
                       <a:solidFill>
                         <a:srgbClr val="D8DBE0"/>
@@ -5152,7 +5272,7 @@
                     <a:bodyPr/>
                     <a:lstStyle/>
                     <a:p>
-                      <a:pPr marL="0" indent="0" algn="l">
+                      <a:pPr algn="l" indent="0" marL="0">
                         <a:buNone/>
                       </a:pPr>
                       <a:r>
@@ -5160,20 +5280,20 @@
                           <a:solidFill>
                             <a:srgbClr val="1F2329"/>
                           </a:solidFill>
-                          <a:latin typeface="微软雅黑" panose="020B0503020204020204" pitchFamily="34" charset="-122"/>
-                          <a:ea typeface="微软雅黑" panose="020B0503020204020204" pitchFamily="34" charset="-122"/>
-                          <a:cs typeface="微软雅黑" panose="020B0503020204020204" pitchFamily="34" charset="-120"/>
+                          <a:latin typeface="微软雅黑" pitchFamily="34" charset="0"/>
+                          <a:ea typeface="微软雅黑" pitchFamily="34" charset="-122"/>
+                          <a:cs typeface="微软雅黑" pitchFamily="34" charset="-120"/>
                         </a:rPr>
                         <a:t>双向链表中间结点插删选语句，2025阅读2同型</a:t>
                       </a:r>
                       <a:endParaRPr lang="en-US" sz="1500" dirty="0">
-                        <a:latin typeface="微软雅黑" panose="020B0503020204020204" pitchFamily="34" charset="-122"/>
-                        <a:ea typeface="微软雅黑" panose="020B0503020204020204" pitchFamily="34" charset="-122"/>
-                        <a:cs typeface="微软雅黑" panose="020B0503020204020204" pitchFamily="34" charset="-122"/>
+                        <a:latin typeface="微软雅黑" charset="0"/>
+                        <a:ea typeface="微软雅黑" charset="0"/>
+                        <a:cs typeface="微软雅黑" charset="0"/>
                       </a:endParaRPr>
                     </a:p>
                   </a:txBody>
-                  <a:tcPr anchor="ctr">
+                  <a:tcPr marL="91440" marR="91440" marT="45720" marB="45720" anchor="ctr">
                     <a:lnL w="9525" cap="flat" cmpd="sng" algn="ctr">
                       <a:solidFill>
                         <a:srgbClr val="D8DBE0"/>
@@ -5222,7 +5342,7 @@
                     <a:bodyPr/>
                     <a:lstStyle/>
                     <a:p>
-                      <a:pPr marL="0" indent="0" algn="l">
+                      <a:pPr algn="l" indent="0" marL="0">
                         <a:buNone/>
                       </a:pPr>
                       <a:r>
@@ -5230,20 +5350,20 @@
                           <a:solidFill>
                             <a:srgbClr val="1F2329"/>
                           </a:solidFill>
-                          <a:latin typeface="微软雅黑" panose="020B0503020204020204" pitchFamily="34" charset="-122"/>
-                          <a:ea typeface="微软雅黑" panose="020B0503020204020204" pitchFamily="34" charset="-122"/>
-                          <a:cs typeface="微软雅黑" panose="020B0503020204020204" pitchFamily="34" charset="-120"/>
+                          <a:latin typeface="微软雅黑" pitchFamily="34" charset="0"/>
+                          <a:ea typeface="微软雅黑" pitchFamily="34" charset="-122"/>
+                          <a:cs typeface="微软雅黑" pitchFamily="34" charset="-120"/>
                         </a:rPr>
                         <a:t>2答9</a:t>
                       </a:r>
                       <a:endParaRPr lang="en-US" sz="1500" dirty="0">
-                        <a:latin typeface="微软雅黑" panose="020B0503020204020204" pitchFamily="34" charset="-122"/>
-                        <a:ea typeface="微软雅黑" panose="020B0503020204020204" pitchFamily="34" charset="-122"/>
-                        <a:cs typeface="微软雅黑" panose="020B0503020204020204" pitchFamily="34" charset="-122"/>
+                        <a:latin typeface="微软雅黑" charset="0"/>
+                        <a:ea typeface="微软雅黑" charset="0"/>
+                        <a:cs typeface="微软雅黑" charset="0"/>
                       </a:endParaRPr>
                     </a:p>
                   </a:txBody>
-                  <a:tcPr anchor="ctr">
+                  <a:tcPr marL="91440" marR="91440" marT="45720" marB="45720" anchor="ctr">
                     <a:lnL w="9525" cap="flat" cmpd="sng" algn="ctr">
                       <a:solidFill>
                         <a:srgbClr val="D8DBE0"/>
@@ -5290,7 +5410,7 @@
                     <a:bodyPr/>
                     <a:lstStyle/>
                     <a:p>
-                      <a:pPr marL="0" indent="0" algn="l">
+                      <a:pPr algn="l" indent="0" marL="0">
                         <a:buNone/>
                       </a:pPr>
                       <a:r>
@@ -5298,20 +5418,20 @@
                           <a:solidFill>
                             <a:srgbClr val="1F2329"/>
                           </a:solidFill>
-                          <a:latin typeface="微软雅黑" panose="020B0503020204020204" pitchFamily="34" charset="-122"/>
-                          <a:ea typeface="微软雅黑" panose="020B0503020204020204" pitchFamily="34" charset="-122"/>
-                          <a:cs typeface="微软雅黑" panose="020B0503020204020204" pitchFamily="34" charset="-120"/>
+                          <a:latin typeface="微软雅黑" pitchFamily="34" charset="0"/>
+                          <a:ea typeface="微软雅黑" pitchFamily="34" charset="-122"/>
+                          <a:cs typeface="微软雅黑" pitchFamily="34" charset="-120"/>
                         </a:rPr>
                         <a:t>读代码说功能</a:t>
                       </a:r>
                       <a:endParaRPr lang="en-US" sz="1500" dirty="0">
-                        <a:latin typeface="微软雅黑" panose="020B0503020204020204" pitchFamily="34" charset="-122"/>
-                        <a:ea typeface="微软雅黑" panose="020B0503020204020204" pitchFamily="34" charset="-122"/>
-                        <a:cs typeface="微软雅黑" panose="020B0503020204020204" pitchFamily="34" charset="-122"/>
+                        <a:latin typeface="微软雅黑" charset="0"/>
+                        <a:ea typeface="微软雅黑" charset="0"/>
+                        <a:cs typeface="微软雅黑" charset="0"/>
                       </a:endParaRPr>
                     </a:p>
                   </a:txBody>
-                  <a:tcPr anchor="ctr">
+                  <a:tcPr marL="91440" marR="91440" marT="45720" marB="45720" anchor="ctr">
                     <a:lnL w="9525" cap="flat" cmpd="sng" algn="ctr">
                       <a:solidFill>
                         <a:srgbClr val="D8DBE0"/>
@@ -5358,7 +5478,7 @@
                     <a:bodyPr/>
                     <a:lstStyle/>
                     <a:p>
-                      <a:pPr marL="0" indent="0" algn="l">
+                      <a:pPr algn="l" indent="0" marL="0">
                         <a:buNone/>
                       </a:pPr>
                       <a:r>
@@ -5366,20 +5486,20 @@
                           <a:solidFill>
                             <a:srgbClr val="1F2329"/>
                           </a:solidFill>
-                          <a:latin typeface="微软雅黑" panose="020B0503020204020204" pitchFamily="34" charset="-122"/>
-                          <a:ea typeface="微软雅黑" panose="020B0503020204020204" pitchFamily="34" charset="-122"/>
-                          <a:cs typeface="微软雅黑" panose="020B0503020204020204" pitchFamily="34" charset="-120"/>
+                          <a:latin typeface="微软雅黑" pitchFamily="34" charset="0"/>
+                          <a:ea typeface="微软雅黑" pitchFamily="34" charset="-122"/>
+                          <a:cs typeface="微软雅黑" pitchFamily="34" charset="-120"/>
                         </a:rPr>
                         <a:t>简述链表算法功能，程序阅读「描述功能「题型同型</a:t>
                       </a:r>
                       <a:endParaRPr lang="en-US" sz="1500" dirty="0">
-                        <a:latin typeface="微软雅黑" panose="020B0503020204020204" pitchFamily="34" charset="-122"/>
-                        <a:ea typeface="微软雅黑" panose="020B0503020204020204" pitchFamily="34" charset="-122"/>
-                        <a:cs typeface="微软雅黑" panose="020B0503020204020204" pitchFamily="34" charset="-122"/>
+                        <a:latin typeface="微软雅黑" charset="0"/>
+                        <a:ea typeface="微软雅黑" charset="0"/>
+                        <a:cs typeface="微软雅黑" charset="0"/>
                       </a:endParaRPr>
                     </a:p>
                   </a:txBody>
-                  <a:tcPr anchor="ctr">
+                  <a:tcPr marL="91440" marR="91440" marT="45720" marB="45720" anchor="ctr">
                     <a:lnL w="9525" cap="flat" cmpd="sng" algn="ctr">
                       <a:solidFill>
                         <a:srgbClr val="D8DBE0"/>
@@ -5428,7 +5548,7 @@
                     <a:bodyPr/>
                     <a:lstStyle/>
                     <a:p>
-                      <a:pPr marL="0" indent="0" algn="l">
+                      <a:pPr algn="l" indent="0" marL="0">
                         <a:buNone/>
                       </a:pPr>
                       <a:r>
@@ -5436,20 +5556,20 @@
                           <a:solidFill>
                             <a:srgbClr val="1F2329"/>
                           </a:solidFill>
-                          <a:latin typeface="微软雅黑" panose="020B0503020204020204" pitchFamily="34" charset="-122"/>
-                          <a:ea typeface="微软雅黑" panose="020B0503020204020204" pitchFamily="34" charset="-122"/>
-                          <a:cs typeface="微软雅黑" panose="020B0503020204020204" pitchFamily="34" charset="-120"/>
+                          <a:latin typeface="微软雅黑" pitchFamily="34" charset="0"/>
+                          <a:ea typeface="微软雅黑" pitchFamily="34" charset="-122"/>
+                          <a:cs typeface="微软雅黑" pitchFamily="34" charset="-120"/>
                         </a:rPr>
                         <a:t>2答10</a:t>
                       </a:r>
                       <a:endParaRPr lang="en-US" sz="1500" dirty="0">
-                        <a:latin typeface="微软雅黑" panose="020B0503020204020204" pitchFamily="34" charset="-122"/>
-                        <a:ea typeface="微软雅黑" panose="020B0503020204020204" pitchFamily="34" charset="-122"/>
-                        <a:cs typeface="微软雅黑" panose="020B0503020204020204" pitchFamily="34" charset="-122"/>
+                        <a:latin typeface="微软雅黑" charset="0"/>
+                        <a:ea typeface="微软雅黑" charset="0"/>
+                        <a:cs typeface="微软雅黑" charset="0"/>
                       </a:endParaRPr>
                     </a:p>
                   </a:txBody>
-                  <a:tcPr anchor="ctr">
+                  <a:tcPr marL="91440" marR="91440" marT="45720" marB="45720" anchor="ctr">
                     <a:lnL w="9525" cap="flat" cmpd="sng" algn="ctr">
                       <a:solidFill>
                         <a:srgbClr val="D8DBE0"/>
@@ -5496,7 +5616,7 @@
                     <a:bodyPr/>
                     <a:lstStyle/>
                     <a:p>
-                      <a:pPr marL="0" indent="0" algn="l">
+                      <a:pPr algn="l" indent="0" marL="0">
                         <a:buNone/>
                       </a:pPr>
                       <a:r>
@@ -5504,20 +5624,20 @@
                           <a:solidFill>
                             <a:srgbClr val="1F2329"/>
                           </a:solidFill>
-                          <a:latin typeface="微软雅黑" panose="020B0503020204020204" pitchFamily="34" charset="-122"/>
-                          <a:ea typeface="微软雅黑" panose="020B0503020204020204" pitchFamily="34" charset="-122"/>
-                          <a:cs typeface="微软雅黑" panose="020B0503020204020204" pitchFamily="34" charset="-120"/>
+                          <a:latin typeface="微软雅黑" pitchFamily="34" charset="0"/>
+                          <a:ea typeface="微软雅黑" pitchFamily="34" charset="-122"/>
+                          <a:cs typeface="微软雅黑" pitchFamily="34" charset="-120"/>
                         </a:rPr>
                         <a:t>读代码纠错</a:t>
                       </a:r>
                       <a:endParaRPr lang="en-US" sz="1500" dirty="0">
-                        <a:latin typeface="微软雅黑" panose="020B0503020204020204" pitchFamily="34" charset="-122"/>
-                        <a:ea typeface="微软雅黑" panose="020B0503020204020204" pitchFamily="34" charset="-122"/>
-                        <a:cs typeface="微软雅黑" panose="020B0503020204020204" pitchFamily="34" charset="-122"/>
+                        <a:latin typeface="微软雅黑" charset="0"/>
+                        <a:ea typeface="微软雅黑" charset="0"/>
+                        <a:cs typeface="微软雅黑" charset="0"/>
                       </a:endParaRPr>
                     </a:p>
                   </a:txBody>
-                  <a:tcPr anchor="ctr">
+                  <a:tcPr marL="91440" marR="91440" marT="45720" marB="45720" anchor="ctr">
                     <a:lnL w="9525" cap="flat" cmpd="sng" algn="ctr">
                       <a:solidFill>
                         <a:srgbClr val="D8DBE0"/>
@@ -5564,7 +5684,7 @@
                     <a:bodyPr/>
                     <a:lstStyle/>
                     <a:p>
-                      <a:pPr marL="0" indent="0" algn="l">
+                      <a:pPr algn="l" indent="0" marL="0">
                         <a:buNone/>
                       </a:pPr>
                       <a:r>
@@ -5572,20 +5692,20 @@
                           <a:solidFill>
                             <a:srgbClr val="1F2329"/>
                           </a:solidFill>
-                          <a:latin typeface="微软雅黑" panose="020B0503020204020204" pitchFamily="34" charset="-122"/>
-                          <a:ea typeface="微软雅黑" panose="020B0503020204020204" pitchFamily="34" charset="-122"/>
-                          <a:cs typeface="微软雅黑" panose="020B0503020204020204" pitchFamily="34" charset="-120"/>
+                          <a:latin typeface="微软雅黑" pitchFamily="34" charset="0"/>
+                          <a:ea typeface="微软雅黑" pitchFamily="34" charset="-122"/>
+                          <a:cs typeface="微软雅黑" pitchFamily="34" charset="-120"/>
                         </a:rPr>
                         <a:t>分析链表函数能否安全完成并改正，程序阅读变式</a:t>
                       </a:r>
                       <a:endParaRPr lang="en-US" sz="1500" dirty="0">
-                        <a:latin typeface="微软雅黑" panose="020B0503020204020204" pitchFamily="34" charset="-122"/>
-                        <a:ea typeface="微软雅黑" panose="020B0503020204020204" pitchFamily="34" charset="-122"/>
-                        <a:cs typeface="微软雅黑" panose="020B0503020204020204" pitchFamily="34" charset="-122"/>
+                        <a:latin typeface="微软雅黑" charset="0"/>
+                        <a:ea typeface="微软雅黑" charset="0"/>
+                        <a:cs typeface="微软雅黑" charset="0"/>
                       </a:endParaRPr>
                     </a:p>
                   </a:txBody>
-                  <a:tcPr anchor="ctr">
+                  <a:tcPr marL="91440" marR="91440" marT="45720" marB="45720" anchor="ctr">
                     <a:lnL w="9525" cap="flat" cmpd="sng" algn="ctr">
                       <a:solidFill>
                         <a:srgbClr val="D8DBE0"/>
@@ -5634,7 +5754,7 @@
                     <a:bodyPr/>
                     <a:lstStyle/>
                     <a:p>
-                      <a:pPr marL="0" indent="0" algn="l">
+                      <a:pPr algn="l" indent="0" marL="0">
                         <a:buNone/>
                       </a:pPr>
                       <a:r>
@@ -5642,20 +5762,20 @@
                           <a:solidFill>
                             <a:srgbClr val="1F2329"/>
                           </a:solidFill>
-                          <a:latin typeface="微软雅黑" panose="020B0503020204020204" pitchFamily="34" charset="-122"/>
-                          <a:ea typeface="微软雅黑" panose="020B0503020204020204" pitchFamily="34" charset="-122"/>
-                          <a:cs typeface="微软雅黑" panose="020B0503020204020204" pitchFamily="34" charset="-120"/>
+                          <a:latin typeface="微软雅黑" pitchFamily="34" charset="0"/>
+                          <a:ea typeface="微软雅黑" pitchFamily="34" charset="-122"/>
+                          <a:cs typeface="微软雅黑" pitchFamily="34" charset="-120"/>
                         </a:rPr>
                         <a:t>2算3</a:t>
                       </a:r>
                       <a:endParaRPr lang="en-US" sz="1500" dirty="0">
-                        <a:latin typeface="微软雅黑" panose="020B0503020204020204" pitchFamily="34" charset="-122"/>
-                        <a:ea typeface="微软雅黑" panose="020B0503020204020204" pitchFamily="34" charset="-122"/>
-                        <a:cs typeface="微软雅黑" panose="020B0503020204020204" pitchFamily="34" charset="-122"/>
+                        <a:latin typeface="微软雅黑" charset="0"/>
+                        <a:ea typeface="微软雅黑" charset="0"/>
+                        <a:cs typeface="微软雅黑" charset="0"/>
                       </a:endParaRPr>
                     </a:p>
                   </a:txBody>
-                  <a:tcPr anchor="ctr">
+                  <a:tcPr marL="91440" marR="91440" marT="45720" marB="45720" anchor="ctr">
                     <a:lnL w="9525" cap="flat" cmpd="sng" algn="ctr">
                       <a:solidFill>
                         <a:srgbClr val="D8DBE0"/>
@@ -5702,7 +5822,7 @@
                     <a:bodyPr/>
                     <a:lstStyle/>
                     <a:p>
-                      <a:pPr marL="0" indent="0" algn="l">
+                      <a:pPr algn="l" indent="0" marL="0">
                         <a:buNone/>
                       </a:pPr>
                       <a:r>
@@ -5710,20 +5830,20 @@
                           <a:solidFill>
                             <a:srgbClr val="1F2329"/>
                           </a:solidFill>
-                          <a:latin typeface="微软雅黑" panose="020B0503020204020204" pitchFamily="34" charset="-122"/>
-                          <a:ea typeface="微软雅黑" panose="020B0503020204020204" pitchFamily="34" charset="-122"/>
-                          <a:cs typeface="微软雅黑" panose="020B0503020204020204" pitchFamily="34" charset="-120"/>
+                          <a:latin typeface="微软雅黑" pitchFamily="34" charset="0"/>
+                          <a:ea typeface="微软雅黑" pitchFamily="34" charset="-122"/>
+                          <a:cs typeface="微软雅黑" pitchFamily="34" charset="-120"/>
                         </a:rPr>
                         <a:t>有序表比较（双指针）</a:t>
                       </a:r>
                       <a:endParaRPr lang="en-US" sz="1500" dirty="0">
-                        <a:latin typeface="微软雅黑" panose="020B0503020204020204" pitchFamily="34" charset="-122"/>
-                        <a:ea typeface="微软雅黑" panose="020B0503020204020204" pitchFamily="34" charset="-122"/>
-                        <a:cs typeface="微软雅黑" panose="020B0503020204020204" pitchFamily="34" charset="-122"/>
+                        <a:latin typeface="微软雅黑" charset="0"/>
+                        <a:ea typeface="微软雅黑" charset="0"/>
+                        <a:cs typeface="微软雅黑" charset="0"/>
                       </a:endParaRPr>
                     </a:p>
                   </a:txBody>
-                  <a:tcPr anchor="ctr">
+                  <a:tcPr marL="91440" marR="91440" marT="45720" marB="45720" anchor="ctr">
                     <a:lnL w="9525" cap="flat" cmpd="sng" algn="ctr">
                       <a:solidFill>
                         <a:srgbClr val="D8DBE0"/>
@@ -5770,7 +5890,7 @@
                     <a:bodyPr/>
                     <a:lstStyle/>
                     <a:p>
-                      <a:pPr marL="0" indent="0" algn="l">
+                      <a:pPr algn="l" indent="0" marL="0">
                         <a:buNone/>
                       </a:pPr>
                       <a:r>
@@ -5778,20 +5898,20 @@
                           <a:solidFill>
                             <a:srgbClr val="1F2329"/>
                           </a:solidFill>
-                          <a:latin typeface="微软雅黑" panose="020B0503020204020204" pitchFamily="34" charset="-122"/>
-                          <a:ea typeface="微软雅黑" panose="020B0503020204020204" pitchFamily="34" charset="-122"/>
-                          <a:cs typeface="微软雅黑" panose="020B0503020204020204" pitchFamily="34" charset="-120"/>
+                          <a:latin typeface="微软雅黑" pitchFamily="34" charset="0"/>
+                          <a:ea typeface="微软雅黑" pitchFamily="34" charset="-122"/>
+                          <a:cs typeface="微软雅黑" pitchFamily="34" charset="-120"/>
                         </a:rPr>
                         <a:t>除去最大公共前缀后比较A、B大小：双指针比较推进骨架</a:t>
                       </a:r>
                       <a:endParaRPr lang="en-US" sz="1500" dirty="0">
-                        <a:latin typeface="微软雅黑" panose="020B0503020204020204" pitchFamily="34" charset="-122"/>
-                        <a:ea typeface="微软雅黑" panose="020B0503020204020204" pitchFamily="34" charset="-122"/>
-                        <a:cs typeface="微软雅黑" panose="020B0503020204020204" pitchFamily="34" charset="-122"/>
+                        <a:latin typeface="微软雅黑" charset="0"/>
+                        <a:ea typeface="微软雅黑" charset="0"/>
+                        <a:cs typeface="微软雅黑" charset="0"/>
                       </a:endParaRPr>
                     </a:p>
                   </a:txBody>
-                  <a:tcPr anchor="ctr">
+                  <a:tcPr marL="91440" marR="91440" marT="45720" marB="45720" anchor="ctr">
                     <a:lnL w="9525" cap="flat" cmpd="sng" algn="ctr">
                       <a:solidFill>
                         <a:srgbClr val="D8DBE0"/>
@@ -5840,7 +5960,7 @@
                     <a:bodyPr/>
                     <a:lstStyle/>
                     <a:p>
-                      <a:pPr marL="0" indent="0" algn="l">
+                      <a:pPr algn="l" indent="0" marL="0">
                         <a:buNone/>
                       </a:pPr>
                       <a:r>
@@ -5848,20 +5968,20 @@
                           <a:solidFill>
                             <a:srgbClr val="1F2329"/>
                           </a:solidFill>
-                          <a:latin typeface="微软雅黑" panose="020B0503020204020204" pitchFamily="34" charset="-122"/>
-                          <a:ea typeface="微软雅黑" panose="020B0503020204020204" pitchFamily="34" charset="-122"/>
-                          <a:cs typeface="微软雅黑" panose="020B0503020204020204" pitchFamily="34" charset="-120"/>
+                          <a:latin typeface="微软雅黑" pitchFamily="34" charset="0"/>
+                          <a:ea typeface="微软雅黑" pitchFamily="34" charset="-122"/>
+                          <a:cs typeface="微软雅黑" pitchFamily="34" charset="-120"/>
                         </a:rPr>
                         <a:t>2算4</a:t>
                       </a:r>
                       <a:endParaRPr lang="en-US" sz="1500" dirty="0">
-                        <a:latin typeface="微软雅黑" panose="020B0503020204020204" pitchFamily="34" charset="-122"/>
-                        <a:ea typeface="微软雅黑" panose="020B0503020204020204" pitchFamily="34" charset="-122"/>
-                        <a:cs typeface="微软雅黑" panose="020B0503020204020204" pitchFamily="34" charset="-122"/>
+                        <a:latin typeface="微软雅黑" charset="0"/>
+                        <a:ea typeface="微软雅黑" charset="0"/>
+                        <a:cs typeface="微软雅黑" charset="0"/>
                       </a:endParaRPr>
                     </a:p>
                   </a:txBody>
-                  <a:tcPr anchor="ctr">
+                  <a:tcPr marL="91440" marR="91440" marT="45720" marB="45720" anchor="ctr">
                     <a:lnL w="9525" cap="flat" cmpd="sng" algn="ctr">
                       <a:solidFill>
                         <a:srgbClr val="D8DBE0"/>
@@ -5908,7 +6028,7 @@
                     <a:bodyPr/>
                     <a:lstStyle/>
                     <a:p>
-                      <a:pPr marL="0" indent="0" algn="l">
+                      <a:pPr algn="l" indent="0" marL="0">
                         <a:buNone/>
                       </a:pPr>
                       <a:r>
@@ -5916,20 +6036,20 @@
                           <a:solidFill>
                             <a:srgbClr val="1F2329"/>
                           </a:solidFill>
-                          <a:latin typeface="微软雅黑" panose="020B0503020204020204" pitchFamily="34" charset="-122"/>
-                          <a:ea typeface="微软雅黑" panose="020B0503020204020204" pitchFamily="34" charset="-122"/>
-                          <a:cs typeface="微软雅黑" panose="020B0503020204020204" pitchFamily="34" charset="-120"/>
+                          <a:latin typeface="微软雅黑" pitchFamily="34" charset="0"/>
+                          <a:ea typeface="微软雅黑" pitchFamily="34" charset="-122"/>
+                          <a:cs typeface="微软雅黑" pitchFamily="34" charset="-120"/>
                         </a:rPr>
                         <a:t>中位数（二分/归并）</a:t>
                       </a:r>
                       <a:endParaRPr lang="en-US" sz="1500" dirty="0">
-                        <a:latin typeface="微软雅黑" panose="020B0503020204020204" pitchFamily="34" charset="-122"/>
-                        <a:ea typeface="微软雅黑" panose="020B0503020204020204" pitchFamily="34" charset="-122"/>
-                        <a:cs typeface="微软雅黑" panose="020B0503020204020204" pitchFamily="34" charset="-122"/>
+                        <a:latin typeface="微软雅黑" charset="0"/>
+                        <a:ea typeface="微软雅黑" charset="0"/>
+                        <a:cs typeface="微软雅黑" charset="0"/>
                       </a:endParaRPr>
                     </a:p>
                   </a:txBody>
-                  <a:tcPr anchor="ctr">
+                  <a:tcPr marL="91440" marR="91440" marT="45720" marB="45720" anchor="ctr">
                     <a:lnL w="9525" cap="flat" cmpd="sng" algn="ctr">
                       <a:solidFill>
                         <a:srgbClr val="D8DBE0"/>
@@ -5976,7 +6096,7 @@
                     <a:bodyPr/>
                     <a:lstStyle/>
                     <a:p>
-                      <a:pPr marL="0" indent="0" algn="l">
+                      <a:pPr algn="l" indent="0" marL="0">
                         <a:buNone/>
                       </a:pPr>
                       <a:r>
@@ -5984,20 +6104,20 @@
                           <a:solidFill>
                             <a:srgbClr val="1F2329"/>
                           </a:solidFill>
-                          <a:latin typeface="微软雅黑" panose="020B0503020204020204" pitchFamily="34" charset="-122"/>
-                          <a:ea typeface="微软雅黑" panose="020B0503020204020204" pitchFamily="34" charset="-122"/>
-                          <a:cs typeface="微软雅黑" panose="020B0503020204020204" pitchFamily="34" charset="-120"/>
+                          <a:latin typeface="微软雅黑" pitchFamily="34" charset="0"/>
+                          <a:ea typeface="微软雅黑" pitchFamily="34" charset="-122"/>
+                          <a:cs typeface="微软雅黑" pitchFamily="34" charset="-120"/>
                         </a:rPr>
                         <a:t>等长有序表找共同中位数，二分改判定模板训练（408真题）</a:t>
                       </a:r>
                       <a:endParaRPr lang="en-US" sz="1500" dirty="0">
-                        <a:latin typeface="微软雅黑" panose="020B0503020204020204" pitchFamily="34" charset="-122"/>
-                        <a:ea typeface="微软雅黑" panose="020B0503020204020204" pitchFamily="34" charset="-122"/>
-                        <a:cs typeface="微软雅黑" panose="020B0503020204020204" pitchFamily="34" charset="-122"/>
+                        <a:latin typeface="微软雅黑" charset="0"/>
+                        <a:ea typeface="微软雅黑" charset="0"/>
+                        <a:cs typeface="微软雅黑" charset="0"/>
                       </a:endParaRPr>
                     </a:p>
                   </a:txBody>
-                  <a:tcPr anchor="ctr">
+                  <a:tcPr marL="91440" marR="91440" marT="45720" marB="45720" anchor="ctr">
                     <a:lnL w="9525" cap="flat" cmpd="sng" algn="ctr">
                       <a:solidFill>
                         <a:srgbClr val="D8DBE0"/>
@@ -6046,7 +6166,7 @@
                     <a:bodyPr/>
                     <a:lstStyle/>
                     <a:p>
-                      <a:pPr marL="0" indent="0" algn="l">
+                      <a:pPr algn="l" indent="0" marL="0">
                         <a:buNone/>
                       </a:pPr>
                       <a:r>
@@ -6054,20 +6174,20 @@
                           <a:solidFill>
                             <a:srgbClr val="1F2329"/>
                           </a:solidFill>
-                          <a:latin typeface="微软雅黑" panose="020B0503020204020204" pitchFamily="34" charset="-122"/>
-                          <a:ea typeface="微软雅黑" panose="020B0503020204020204" pitchFamily="34" charset="-122"/>
-                          <a:cs typeface="微软雅黑" panose="020B0503020204020204" pitchFamily="34" charset="-120"/>
+                          <a:latin typeface="微软雅黑" pitchFamily="34" charset="0"/>
+                          <a:ea typeface="微软雅黑" pitchFamily="34" charset="-122"/>
+                          <a:cs typeface="微软雅黑" pitchFamily="34" charset="-120"/>
                         </a:rPr>
                         <a:t>2算6</a:t>
                       </a:r>
                       <a:endParaRPr lang="en-US" sz="1500" dirty="0">
-                        <a:latin typeface="微软雅黑" panose="020B0503020204020204" pitchFamily="34" charset="-122"/>
-                        <a:ea typeface="微软雅黑" panose="020B0503020204020204" pitchFamily="34" charset="-122"/>
-                        <a:cs typeface="微软雅黑" panose="020B0503020204020204" pitchFamily="34" charset="-122"/>
+                        <a:latin typeface="微软雅黑" charset="0"/>
+                        <a:ea typeface="微软雅黑" charset="0"/>
+                        <a:cs typeface="微软雅黑" charset="0"/>
                       </a:endParaRPr>
                     </a:p>
                   </a:txBody>
-                  <a:tcPr anchor="ctr">
+                  <a:tcPr marL="91440" marR="91440" marT="45720" marB="45720" anchor="ctr">
                     <a:lnL w="9525" cap="flat" cmpd="sng" algn="ctr">
                       <a:solidFill>
                         <a:srgbClr val="D8DBE0"/>
@@ -6114,7 +6234,7 @@
                     <a:bodyPr/>
                     <a:lstStyle/>
                     <a:p>
-                      <a:pPr marL="0" indent="0" algn="l">
+                      <a:pPr algn="l" indent="0" marL="0">
                         <a:buNone/>
                       </a:pPr>
                       <a:r>
@@ -6122,20 +6242,20 @@
                           <a:solidFill>
                             <a:srgbClr val="1F2329"/>
                           </a:solidFill>
-                          <a:latin typeface="微软雅黑" panose="020B0503020204020204" pitchFamily="34" charset="-122"/>
-                          <a:ea typeface="微软雅黑" panose="020B0503020204020204" pitchFamily="34" charset="-122"/>
-                          <a:cs typeface="微软雅黑" panose="020B0503020204020204" pitchFamily="34" charset="-120"/>
+                          <a:latin typeface="微软雅黑" pitchFamily="34" charset="0"/>
+                          <a:ea typeface="微软雅黑" pitchFamily="34" charset="-122"/>
+                          <a:cs typeface="微软雅黑" pitchFamily="34" charset="-120"/>
                         </a:rPr>
                         <a:t>倒数第k（快慢指针）</a:t>
                       </a:r>
                       <a:endParaRPr lang="en-US" sz="1500" dirty="0">
-                        <a:latin typeface="微软雅黑" panose="020B0503020204020204" pitchFamily="34" charset="-122"/>
-                        <a:ea typeface="微软雅黑" panose="020B0503020204020204" pitchFamily="34" charset="-122"/>
-                        <a:cs typeface="微软雅黑" panose="020B0503020204020204" pitchFamily="34" charset="-122"/>
+                        <a:latin typeface="微软雅黑" charset="0"/>
+                        <a:ea typeface="微软雅黑" charset="0"/>
+                        <a:cs typeface="微软雅黑" charset="0"/>
                       </a:endParaRPr>
                     </a:p>
                   </a:txBody>
-                  <a:tcPr anchor="ctr">
+                  <a:tcPr marL="91440" marR="91440" marT="45720" marB="45720" anchor="ctr">
                     <a:lnL w="9525" cap="flat" cmpd="sng" algn="ctr">
                       <a:solidFill>
                         <a:srgbClr val="D8DBE0"/>
@@ -6182,7 +6302,7 @@
                     <a:bodyPr/>
                     <a:lstStyle/>
                     <a:p>
-                      <a:pPr marL="0" indent="0" algn="l">
+                      <a:pPr algn="l" indent="0" marL="0">
                         <a:buNone/>
                       </a:pPr>
                       <a:r>
@@ -6190,20 +6310,20 @@
                           <a:solidFill>
                             <a:srgbClr val="1F2329"/>
                           </a:solidFill>
-                          <a:latin typeface="微软雅黑" panose="020B0503020204020204" pitchFamily="34" charset="-122"/>
-                          <a:ea typeface="微软雅黑" panose="020B0503020204020204" pitchFamily="34" charset="-122"/>
-                          <a:cs typeface="微软雅黑" panose="020B0503020204020204" pitchFamily="34" charset="-120"/>
+                          <a:latin typeface="微软雅黑" pitchFamily="34" charset="0"/>
+                          <a:ea typeface="微软雅黑" pitchFamily="34" charset="-122"/>
+                          <a:cs typeface="微软雅黑" pitchFamily="34" charset="-120"/>
                         </a:rPr>
                         <a:t>2025算法设计1原题，快慢指针模板</a:t>
                       </a:r>
                       <a:endParaRPr lang="en-US" sz="1500" dirty="0">
-                        <a:latin typeface="微软雅黑" panose="020B0503020204020204" pitchFamily="34" charset="-122"/>
-                        <a:ea typeface="微软雅黑" panose="020B0503020204020204" pitchFamily="34" charset="-122"/>
-                        <a:cs typeface="微软雅黑" panose="020B0503020204020204" pitchFamily="34" charset="-122"/>
+                        <a:latin typeface="微软雅黑" charset="0"/>
+                        <a:ea typeface="微软雅黑" charset="0"/>
+                        <a:cs typeface="微软雅黑" charset="0"/>
                       </a:endParaRPr>
                     </a:p>
                   </a:txBody>
-                  <a:tcPr anchor="ctr">
+                  <a:tcPr marL="91440" marR="91440" marT="45720" marB="45720" anchor="ctr">
                     <a:lnL w="9525" cap="flat" cmpd="sng" algn="ctr">
                       <a:solidFill>
                         <a:srgbClr val="D8DBE0"/>
@@ -6260,7 +6380,7 @@
 
 <file path=ppt/slides/slide5.xml><?xml version="1.0" encoding="utf-8"?>
 <p:sld xmlns:a="http://schemas.openxmlformats.org/drawingml/2006/main" xmlns:r="http://schemas.openxmlformats.org/officeDocument/2006/relationships" xmlns:p="http://schemas.openxmlformats.org/presentationml/2006/main">
-  <p:cSld>
+  <p:cSld name="Slide 5">
     <p:bg>
       <p:bgPr>
         <a:blipFill dpi="0" rotWithShape="1">
@@ -6304,12 +6424,13 @@
             <a:avLst/>
           </a:prstGeom>
           <a:noFill/>
+          <a:ln/>
         </p:spPr>
         <p:txBody>
           <a:bodyPr wrap="square" rtlCol="0" anchor="ctr"/>
           <a:lstStyle/>
           <a:p>
-            <a:pPr marL="0" indent="0" algn="r">
+            <a:pPr algn="r" indent="0" marL="0">
               <a:buNone/>
             </a:pPr>
             <a:r>
@@ -6317,9 +6438,9 @@
                 <a:solidFill>
                   <a:srgbClr val="8A9099"/>
                 </a:solidFill>
-                <a:latin typeface="微软雅黑" panose="020B0503020204020204" pitchFamily="34" charset="-122"/>
-                <a:ea typeface="微软雅黑" panose="020B0503020204020204" pitchFamily="34" charset="-122"/>
-                <a:cs typeface="微软雅黑" panose="020B0503020204020204" pitchFamily="34" charset="-120"/>
+                <a:latin typeface="微软雅黑" pitchFamily="34" charset="0"/>
+                <a:ea typeface="微软雅黑" pitchFamily="34" charset="-122"/>
+                <a:cs typeface="微软雅黑" pitchFamily="34" charset="-120"/>
               </a:rPr>
               <a:t>5 / 9</a:t>
             </a:r>
@@ -6342,12 +6463,13 @@
             <a:avLst/>
           </a:prstGeom>
           <a:noFill/>
+          <a:ln/>
         </p:spPr>
         <p:txBody>
           <a:bodyPr wrap="square" rtlCol="0" anchor="ctr"/>
           <a:lstStyle/>
           <a:p>
-            <a:pPr marL="0" indent="0" algn="l">
+            <a:pPr algn="l" indent="0" marL="0">
               <a:buNone/>
             </a:pPr>
             <a:r>
@@ -6355,9 +6477,9 @@
                 <a:solidFill>
                   <a:srgbClr val="1F4E9C"/>
                 </a:solidFill>
-                <a:latin typeface="微软雅黑" panose="020B0503020204020204" pitchFamily="34" charset="-122"/>
-                <a:ea typeface="微软雅黑" panose="020B0503020204020204" pitchFamily="34" charset="-122"/>
-                <a:cs typeface="微软雅黑" panose="020B0503020204020204" pitchFamily="34" charset="-120"/>
+                <a:latin typeface="微软雅黑" pitchFamily="34" charset="0"/>
+                <a:ea typeface="微软雅黑" pitchFamily="34" charset="-122"/>
+                <a:cs typeface="微软雅黑" pitchFamily="34" charset="-120"/>
               </a:rPr>
               <a:t>有价值必做</a:t>
             </a:r>
@@ -6380,12 +6502,13 @@
             <a:avLst/>
           </a:prstGeom>
           <a:noFill/>
+          <a:ln/>
         </p:spPr>
         <p:txBody>
           <a:bodyPr wrap="square" rtlCol="0" anchor="ctr"/>
           <a:lstStyle/>
           <a:p>
-            <a:pPr marL="0" indent="0" algn="l">
+            <a:pPr algn="l" indent="0" marL="0">
               <a:buNone/>
             </a:pPr>
             <a:r>
@@ -6393,9 +6516,9 @@
                 <a:solidFill>
                   <a:srgbClr val="1F2329"/>
                 </a:solidFill>
-                <a:latin typeface="微软雅黑" panose="020B0503020204020204" pitchFamily="34" charset="-122"/>
-                <a:ea typeface="微软雅黑" panose="020B0503020204020204" pitchFamily="34" charset="-122"/>
-                <a:cs typeface="微软雅黑" panose="020B0503020204020204" pitchFamily="34" charset="-120"/>
+                <a:latin typeface="微软雅黑" pitchFamily="34" charset="0"/>
+                <a:ea typeface="微软雅黑" pitchFamily="34" charset="-122"/>
+                <a:cs typeface="微软雅黑" pitchFamily="34" charset="-120"/>
               </a:rPr>
               <a:t>必做题（3/4）</a:t>
             </a:r>
@@ -6409,11 +6532,17 @@
           <p:cNvGraphicFramePr>
             <a:graphicFrameLocks noGrp="1"/>
           </p:cNvGraphicFramePr>
-          <p:nvPr/>
+          <p:nvPr>
+            <p:extLst>
+              <p:ext uri="{D42A27DB-BD31-4B8C-83A1-F6EECF244321}">
+                <p14:modId xmlns:p14="http://schemas.microsoft.com/office/powerpoint/2010/main" val="1579011935"/>
+              </p:ext>
+            </p:extLst>
+          </p:nvPr>
         </p:nvGraphicFramePr>
         <p:xfrm>
           <a:off x="822960" y="2395728"/>
-          <a:ext cx="10545775" cy="2944368"/>
+          <a:ext cx="10545775" cy="914400"/>
         </p:xfrm>
         <a:graphic>
           <a:graphicData uri="http://schemas.openxmlformats.org/drawingml/2006/table">
@@ -6430,7 +6559,7 @@
                     <a:bodyPr/>
                     <a:lstStyle/>
                     <a:p>
-                      <a:pPr marL="0" indent="0" algn="l">
+                      <a:pPr algn="l" indent="0" marL="0">
                         <a:buNone/>
                       </a:pPr>
                       <a:r>
@@ -6438,20 +6567,20 @@
                           <a:solidFill>
                             <a:srgbClr val="1F4E9C"/>
                           </a:solidFill>
-                          <a:latin typeface="微软雅黑" panose="020B0503020204020204" pitchFamily="34" charset="-122"/>
-                          <a:ea typeface="微软雅黑" panose="020B0503020204020204" pitchFamily="34" charset="-122"/>
-                          <a:cs typeface="微软雅黑" panose="020B0503020204020204" pitchFamily="34" charset="-120"/>
+                          <a:latin typeface="微软雅黑" pitchFamily="34" charset="0"/>
+                          <a:ea typeface="微软雅黑" pitchFamily="34" charset="-122"/>
+                          <a:cs typeface="微软雅黑" pitchFamily="34" charset="-120"/>
                         </a:rPr>
                         <a:t>题号</a:t>
                       </a:r>
                       <a:endParaRPr lang="en-US" sz="1500" dirty="0">
-                        <a:latin typeface="微软雅黑" panose="020B0503020204020204" pitchFamily="34" charset="-122"/>
-                        <a:ea typeface="微软雅黑" panose="020B0503020204020204" pitchFamily="34" charset="-122"/>
-                        <a:cs typeface="微软雅黑" panose="020B0503020204020204" pitchFamily="34" charset="-122"/>
+                        <a:latin typeface="微软雅黑" charset="0"/>
+                        <a:ea typeface="微软雅黑" charset="0"/>
+                        <a:cs typeface="微软雅黑" charset="0"/>
                       </a:endParaRPr>
                     </a:p>
                   </a:txBody>
-                  <a:tcPr anchor="ctr">
+                  <a:tcPr marL="91440" marR="91440" marT="45720" marB="45720" anchor="ctr">
                     <a:lnL w="9525" cap="flat" cmpd="sng" algn="ctr">
                       <a:solidFill>
                         <a:srgbClr val="D8DBE0"/>
@@ -6498,7 +6627,7 @@
                     <a:bodyPr/>
                     <a:lstStyle/>
                     <a:p>
-                      <a:pPr marL="0" indent="0" algn="l">
+                      <a:pPr algn="l" indent="0" marL="0">
                         <a:buNone/>
                       </a:pPr>
                       <a:r>
@@ -6506,20 +6635,20 @@
                           <a:solidFill>
                             <a:srgbClr val="1F4E9C"/>
                           </a:solidFill>
-                          <a:latin typeface="微软雅黑" panose="020B0503020204020204" pitchFamily="34" charset="-122"/>
-                          <a:ea typeface="微软雅黑" panose="020B0503020204020204" pitchFamily="34" charset="-122"/>
-                          <a:cs typeface="微软雅黑" panose="020B0503020204020204" pitchFamily="34" charset="-120"/>
+                          <a:latin typeface="微软雅黑" pitchFamily="34" charset="0"/>
+                          <a:ea typeface="微软雅黑" pitchFamily="34" charset="-122"/>
+                          <a:cs typeface="微软雅黑" pitchFamily="34" charset="-120"/>
                         </a:rPr>
                         <a:t>考点</a:t>
                       </a:r>
                       <a:endParaRPr lang="en-US" sz="1500" dirty="0">
-                        <a:latin typeface="微软雅黑" panose="020B0503020204020204" pitchFamily="34" charset="-122"/>
-                        <a:ea typeface="微软雅黑" panose="020B0503020204020204" pitchFamily="34" charset="-122"/>
-                        <a:cs typeface="微软雅黑" panose="020B0503020204020204" pitchFamily="34" charset="-122"/>
+                        <a:latin typeface="微软雅黑" charset="0"/>
+                        <a:ea typeface="微软雅黑" charset="0"/>
+                        <a:cs typeface="微软雅黑" charset="0"/>
                       </a:endParaRPr>
                     </a:p>
                   </a:txBody>
-                  <a:tcPr anchor="ctr">
+                  <a:tcPr marL="91440" marR="91440" marT="45720" marB="45720" anchor="ctr">
                     <a:lnL w="9525" cap="flat" cmpd="sng" algn="ctr">
                       <a:solidFill>
                         <a:srgbClr val="D8DBE0"/>
@@ -6566,7 +6695,7 @@
                     <a:bodyPr/>
                     <a:lstStyle/>
                     <a:p>
-                      <a:pPr marL="0" indent="0" algn="l">
+                      <a:pPr algn="l" indent="0" marL="0">
                         <a:buNone/>
                       </a:pPr>
                       <a:r>
@@ -6574,20 +6703,20 @@
                           <a:solidFill>
                             <a:srgbClr val="1F4E9C"/>
                           </a:solidFill>
-                          <a:latin typeface="微软雅黑" panose="020B0503020204020204" pitchFamily="34" charset="-122"/>
-                          <a:ea typeface="微软雅黑" panose="020B0503020204020204" pitchFamily="34" charset="-122"/>
-                          <a:cs typeface="微软雅黑" panose="020B0503020204020204" pitchFamily="34" charset="-120"/>
+                          <a:latin typeface="微软雅黑" pitchFamily="34" charset="0"/>
+                          <a:ea typeface="微软雅黑" pitchFamily="34" charset="-122"/>
+                          <a:cs typeface="微软雅黑" pitchFamily="34" charset="-120"/>
                         </a:rPr>
                         <a:t>价值</a:t>
                       </a:r>
                       <a:endParaRPr lang="en-US" sz="1500" dirty="0">
-                        <a:latin typeface="微软雅黑" panose="020B0503020204020204" pitchFamily="34" charset="-122"/>
-                        <a:ea typeface="微软雅黑" panose="020B0503020204020204" pitchFamily="34" charset="-122"/>
-                        <a:cs typeface="微软雅黑" panose="020B0503020204020204" pitchFamily="34" charset="-122"/>
+                        <a:latin typeface="微软雅黑" charset="0"/>
+                        <a:ea typeface="微软雅黑" charset="0"/>
+                        <a:cs typeface="微软雅黑" charset="0"/>
                       </a:endParaRPr>
                     </a:p>
                   </a:txBody>
-                  <a:tcPr anchor="ctr">
+                  <a:tcPr marL="91440" marR="91440" marT="45720" marB="45720" anchor="ctr">
                     <a:lnL w="9525" cap="flat" cmpd="sng" algn="ctr">
                       <a:solidFill>
                         <a:srgbClr val="D8DBE0"/>
@@ -6636,7 +6765,7 @@
                     <a:bodyPr/>
                     <a:lstStyle/>
                     <a:p>
-                      <a:pPr marL="0" indent="0" algn="l">
+                      <a:pPr algn="l" indent="0" marL="0">
                         <a:buNone/>
                       </a:pPr>
                       <a:r>
@@ -6644,20 +6773,20 @@
                           <a:solidFill>
                             <a:srgbClr val="1F2329"/>
                           </a:solidFill>
-                          <a:latin typeface="微软雅黑" panose="020B0503020204020204" pitchFamily="34" charset="-122"/>
-                          <a:ea typeface="微软雅黑" panose="020B0503020204020204" pitchFamily="34" charset="-122"/>
-                          <a:cs typeface="微软雅黑" panose="020B0503020204020204" pitchFamily="34" charset="-120"/>
+                          <a:latin typeface="微软雅黑" pitchFamily="34" charset="0"/>
+                          <a:ea typeface="微软雅黑" pitchFamily="34" charset="-122"/>
+                          <a:cs typeface="微软雅黑" pitchFamily="34" charset="-120"/>
                         </a:rPr>
                         <a:t>2算12</a:t>
                       </a:r>
                       <a:endParaRPr lang="en-US" sz="1500" dirty="0">
-                        <a:latin typeface="微软雅黑" panose="020B0503020204020204" pitchFamily="34" charset="-122"/>
-                        <a:ea typeface="微软雅黑" panose="020B0503020204020204" pitchFamily="34" charset="-122"/>
-                        <a:cs typeface="微软雅黑" panose="020B0503020204020204" pitchFamily="34" charset="-122"/>
+                        <a:latin typeface="微软雅黑" charset="0"/>
+                        <a:ea typeface="微软雅黑" charset="0"/>
+                        <a:cs typeface="微软雅黑" charset="0"/>
                       </a:endParaRPr>
                     </a:p>
                   </a:txBody>
-                  <a:tcPr anchor="ctr">
+                  <a:tcPr marL="91440" marR="91440" marT="45720" marB="45720" anchor="ctr">
                     <a:lnL w="9525" cap="flat" cmpd="sng" algn="ctr">
                       <a:solidFill>
                         <a:srgbClr val="D8DBE0"/>
@@ -6704,7 +6833,7 @@
                     <a:bodyPr/>
                     <a:lstStyle/>
                     <a:p>
-                      <a:pPr marL="0" indent="0" algn="l">
+                      <a:pPr algn="l" indent="0" marL="0">
                         <a:buNone/>
                       </a:pPr>
                       <a:r>
@@ -6712,20 +6841,20 @@
                           <a:solidFill>
                             <a:srgbClr val="1F2329"/>
                           </a:solidFill>
-                          <a:latin typeface="微软雅黑" panose="020B0503020204020204" pitchFamily="34" charset="-122"/>
-                          <a:ea typeface="微软雅黑" panose="020B0503020204020204" pitchFamily="34" charset="-122"/>
-                          <a:cs typeface="微软雅黑" panose="020B0503020204020204" pitchFamily="34" charset="-120"/>
+                          <a:latin typeface="微软雅黑" pitchFamily="34" charset="0"/>
+                          <a:ea typeface="微软雅黑" pitchFamily="34" charset="-122"/>
+                          <a:cs typeface="微软雅黑" pitchFamily="34" charset="-120"/>
                         </a:rPr>
                         <a:t>条件删除</a:t>
                       </a:r>
                       <a:endParaRPr lang="en-US" sz="1500" dirty="0">
-                        <a:latin typeface="微软雅黑" panose="020B0503020204020204" pitchFamily="34" charset="-122"/>
-                        <a:ea typeface="微软雅黑" panose="020B0503020204020204" pitchFamily="34" charset="-122"/>
-                        <a:cs typeface="微软雅黑" panose="020B0503020204020204" pitchFamily="34" charset="-122"/>
+                        <a:latin typeface="微软雅黑" charset="0"/>
+                        <a:ea typeface="微软雅黑" charset="0"/>
+                        <a:cs typeface="微软雅黑" charset="0"/>
                       </a:endParaRPr>
                     </a:p>
                   </a:txBody>
-                  <a:tcPr anchor="ctr">
+                  <a:tcPr marL="91440" marR="91440" marT="45720" marB="45720" anchor="ctr">
                     <a:lnL w="9525" cap="flat" cmpd="sng" algn="ctr">
                       <a:solidFill>
                         <a:srgbClr val="D8DBE0"/>
@@ -6772,7 +6901,7 @@
                     <a:bodyPr/>
                     <a:lstStyle/>
                     <a:p>
-                      <a:pPr marL="0" indent="0" algn="l">
+                      <a:pPr algn="l" indent="0" marL="0">
                         <a:buNone/>
                       </a:pPr>
                       <a:r>
@@ -6780,20 +6909,20 @@
                           <a:solidFill>
                             <a:srgbClr val="1F2329"/>
                           </a:solidFill>
-                          <a:latin typeface="微软雅黑" panose="020B0503020204020204" pitchFamily="34" charset="-122"/>
-                          <a:ea typeface="微软雅黑" panose="020B0503020204020204" pitchFamily="34" charset="-122"/>
-                          <a:cs typeface="微软雅黑" panose="020B0503020204020204" pitchFamily="34" charset="-120"/>
+                          <a:latin typeface="微软雅黑" pitchFamily="34" charset="0"/>
+                          <a:ea typeface="微软雅黑" pitchFamily="34" charset="-122"/>
+                          <a:cs typeface="微软雅黑" pitchFamily="34" charset="-120"/>
                         </a:rPr>
                         <a:t>有序链表删(mink,maxk)区间，条件删除·前驱跟随模板</a:t>
                       </a:r>
                       <a:endParaRPr lang="en-US" sz="1500" dirty="0">
-                        <a:latin typeface="微软雅黑" panose="020B0503020204020204" pitchFamily="34" charset="-122"/>
-                        <a:ea typeface="微软雅黑" panose="020B0503020204020204" pitchFamily="34" charset="-122"/>
-                        <a:cs typeface="微软雅黑" panose="020B0503020204020204" pitchFamily="34" charset="-122"/>
+                        <a:latin typeface="微软雅黑" charset="0"/>
+                        <a:ea typeface="微软雅黑" charset="0"/>
+                        <a:cs typeface="微软雅黑" charset="0"/>
                       </a:endParaRPr>
                     </a:p>
                   </a:txBody>
-                  <a:tcPr anchor="ctr">
+                  <a:tcPr marL="91440" marR="91440" marT="45720" marB="45720" anchor="ctr">
                     <a:lnL w="9525" cap="flat" cmpd="sng" algn="ctr">
                       <a:solidFill>
                         <a:srgbClr val="D8DBE0"/>
@@ -6842,7 +6971,7 @@
                     <a:bodyPr/>
                     <a:lstStyle/>
                     <a:p>
-                      <a:pPr marL="0" indent="0" algn="l">
+                      <a:pPr algn="l" indent="0" marL="0">
                         <a:buNone/>
                       </a:pPr>
                       <a:r>
@@ -6850,20 +6979,20 @@
                           <a:solidFill>
                             <a:srgbClr val="1F2329"/>
                           </a:solidFill>
-                          <a:latin typeface="微软雅黑" panose="020B0503020204020204" pitchFamily="34" charset="-122"/>
-                          <a:ea typeface="微软雅黑" panose="020B0503020204020204" pitchFamily="34" charset="-122"/>
-                          <a:cs typeface="微软雅黑" panose="020B0503020204020204" pitchFamily="34" charset="-120"/>
+                          <a:latin typeface="微软雅黑" pitchFamily="34" charset="0"/>
+                          <a:ea typeface="微软雅黑" pitchFamily="34" charset="-122"/>
+                          <a:cs typeface="微软雅黑" pitchFamily="34" charset="-120"/>
                         </a:rPr>
                         <a:t>2算15</a:t>
                       </a:r>
                       <a:endParaRPr lang="en-US" sz="1500" dirty="0">
-                        <a:latin typeface="微软雅黑" panose="020B0503020204020204" pitchFamily="34" charset="-122"/>
-                        <a:ea typeface="微软雅黑" panose="020B0503020204020204" pitchFamily="34" charset="-122"/>
-                        <a:cs typeface="微软雅黑" panose="020B0503020204020204" pitchFamily="34" charset="-122"/>
+                        <a:latin typeface="微软雅黑" charset="0"/>
+                        <a:ea typeface="微软雅黑" charset="0"/>
+                        <a:cs typeface="微软雅黑" charset="0"/>
                       </a:endParaRPr>
                     </a:p>
                   </a:txBody>
-                  <a:tcPr anchor="ctr">
+                  <a:tcPr marL="91440" marR="91440" marT="45720" marB="45720" anchor="ctr">
                     <a:lnL w="9525" cap="flat" cmpd="sng" algn="ctr">
                       <a:solidFill>
                         <a:srgbClr val="D8DBE0"/>
@@ -6910,7 +7039,7 @@
                     <a:bodyPr/>
                     <a:lstStyle/>
                     <a:p>
-                      <a:pPr marL="0" indent="0" algn="l">
+                      <a:pPr algn="l" indent="0" marL="0">
                         <a:buNone/>
                       </a:pPr>
                       <a:r>
@@ -6918,20 +7047,20 @@
                           <a:solidFill>
                             <a:srgbClr val="1F2329"/>
                           </a:solidFill>
-                          <a:latin typeface="微软雅黑" panose="020B0503020204020204" pitchFamily="34" charset="-122"/>
-                          <a:ea typeface="微软雅黑" panose="020B0503020204020204" pitchFamily="34" charset="-122"/>
-                          <a:cs typeface="微软雅黑" panose="020B0503020204020204" pitchFamily="34" charset="-120"/>
+                          <a:latin typeface="微软雅黑" pitchFamily="34" charset="0"/>
+                          <a:ea typeface="微软雅黑" pitchFamily="34" charset="-122"/>
+                          <a:cs typeface="微软雅黑" pitchFamily="34" charset="-120"/>
                         </a:rPr>
                         <a:t>顺序表逆置</a:t>
                       </a:r>
                       <a:endParaRPr lang="en-US" sz="1500" dirty="0">
-                        <a:latin typeface="微软雅黑" panose="020B0503020204020204" pitchFamily="34" charset="-122"/>
-                        <a:ea typeface="微软雅黑" panose="020B0503020204020204" pitchFamily="34" charset="-122"/>
-                        <a:cs typeface="微软雅黑" panose="020B0503020204020204" pitchFamily="34" charset="-122"/>
+                        <a:latin typeface="微软雅黑" charset="0"/>
+                        <a:ea typeface="微软雅黑" charset="0"/>
+                        <a:cs typeface="微软雅黑" charset="0"/>
                       </a:endParaRPr>
                     </a:p>
                   </a:txBody>
-                  <a:tcPr anchor="ctr">
+                  <a:tcPr marL="91440" marR="91440" marT="45720" marB="45720" anchor="ctr">
                     <a:lnL w="9525" cap="flat" cmpd="sng" algn="ctr">
                       <a:solidFill>
                         <a:srgbClr val="D8DBE0"/>
@@ -6978,7 +7107,7 @@
                     <a:bodyPr/>
                     <a:lstStyle/>
                     <a:p>
-                      <a:pPr marL="0" indent="0" algn="l">
+                      <a:pPr algn="l" indent="0" marL="0">
                         <a:buNone/>
                       </a:pPr>
                       <a:r>
@@ -6986,20 +7115,20 @@
                           <a:solidFill>
                             <a:srgbClr val="1F2329"/>
                           </a:solidFill>
-                          <a:latin typeface="微软雅黑" panose="020B0503020204020204" pitchFamily="34" charset="-122"/>
-                          <a:ea typeface="微软雅黑" panose="020B0503020204020204" pitchFamily="34" charset="-122"/>
-                          <a:cs typeface="微软雅黑" panose="020B0503020204020204" pitchFamily="34" charset="-120"/>
+                          <a:latin typeface="微软雅黑" pitchFamily="34" charset="0"/>
+                          <a:ea typeface="微软雅黑" pitchFamily="34" charset="-122"/>
+                          <a:cs typeface="微软雅黑" pitchFamily="34" charset="-120"/>
                         </a:rPr>
                         <a:t>就地逆置模板（顺序表版）</a:t>
                       </a:r>
                       <a:endParaRPr lang="en-US" sz="1500" dirty="0">
-                        <a:latin typeface="微软雅黑" panose="020B0503020204020204" pitchFamily="34" charset="-122"/>
-                        <a:ea typeface="微软雅黑" panose="020B0503020204020204" pitchFamily="34" charset="-122"/>
-                        <a:cs typeface="微软雅黑" panose="020B0503020204020204" pitchFamily="34" charset="-122"/>
+                        <a:latin typeface="微软雅黑" charset="0"/>
+                        <a:ea typeface="微软雅黑" charset="0"/>
+                        <a:cs typeface="微软雅黑" charset="0"/>
                       </a:endParaRPr>
                     </a:p>
                   </a:txBody>
-                  <a:tcPr anchor="ctr">
+                  <a:tcPr marL="91440" marR="91440" marT="45720" marB="45720" anchor="ctr">
                     <a:lnL w="9525" cap="flat" cmpd="sng" algn="ctr">
                       <a:solidFill>
                         <a:srgbClr val="D8DBE0"/>
@@ -7048,7 +7177,7 @@
                     <a:bodyPr/>
                     <a:lstStyle/>
                     <a:p>
-                      <a:pPr marL="0" indent="0" algn="l">
+                      <a:pPr algn="l" indent="0" marL="0">
                         <a:buNone/>
                       </a:pPr>
                       <a:r>
@@ -7056,20 +7185,20 @@
                           <a:solidFill>
                             <a:srgbClr val="1F2329"/>
                           </a:solidFill>
-                          <a:latin typeface="微软雅黑" panose="020B0503020204020204" pitchFamily="34" charset="-122"/>
-                          <a:ea typeface="微软雅黑" panose="020B0503020204020204" pitchFamily="34" charset="-122"/>
-                          <a:cs typeface="微软雅黑" panose="020B0503020204020204" pitchFamily="34" charset="-120"/>
+                          <a:latin typeface="微软雅黑" pitchFamily="34" charset="0"/>
+                          <a:ea typeface="微软雅黑" pitchFamily="34" charset="-122"/>
+                          <a:cs typeface="微软雅黑" pitchFamily="34" charset="-120"/>
                         </a:rPr>
                         <a:t>2算17</a:t>
                       </a:r>
                       <a:endParaRPr lang="en-US" sz="1500" dirty="0">
-                        <a:latin typeface="微软雅黑" panose="020B0503020204020204" pitchFamily="34" charset="-122"/>
-                        <a:ea typeface="微软雅黑" panose="020B0503020204020204" pitchFamily="34" charset="-122"/>
-                        <a:cs typeface="微软雅黑" panose="020B0503020204020204" pitchFamily="34" charset="-122"/>
+                        <a:latin typeface="微软雅黑" charset="0"/>
+                        <a:ea typeface="微软雅黑" charset="0"/>
+                        <a:cs typeface="微软雅黑" charset="0"/>
                       </a:endParaRPr>
                     </a:p>
                   </a:txBody>
-                  <a:tcPr anchor="ctr">
+                  <a:tcPr marL="91440" marR="91440" marT="45720" marB="45720" anchor="ctr">
                     <a:lnL w="9525" cap="flat" cmpd="sng" algn="ctr">
                       <a:solidFill>
                         <a:srgbClr val="D8DBE0"/>
@@ -7116,7 +7245,7 @@
                     <a:bodyPr/>
                     <a:lstStyle/>
                     <a:p>
-                      <a:pPr marL="0" indent="0" algn="l">
+                      <a:pPr algn="l" indent="0" marL="0">
                         <a:buNone/>
                       </a:pPr>
                       <a:r>
@@ -7124,20 +7253,20 @@
                           <a:solidFill>
                             <a:srgbClr val="1F2329"/>
                           </a:solidFill>
-                          <a:latin typeface="微软雅黑" panose="020B0503020204020204" pitchFamily="34" charset="-122"/>
-                          <a:ea typeface="微软雅黑" panose="020B0503020204020204" pitchFamily="34" charset="-122"/>
-                          <a:cs typeface="微软雅黑" panose="020B0503020204020204" pitchFamily="34" charset="-120"/>
+                          <a:latin typeface="微软雅黑" pitchFamily="34" charset="0"/>
+                          <a:ea typeface="微软雅黑" pitchFamily="34" charset="-122"/>
+                          <a:cs typeface="微软雅黑" pitchFamily="34" charset="-120"/>
                         </a:rPr>
                         <a:t>单链表逆置（头插法）</a:t>
                       </a:r>
                       <a:endParaRPr lang="en-US" sz="1500" dirty="0">
-                        <a:latin typeface="微软雅黑" panose="020B0503020204020204" pitchFamily="34" charset="-122"/>
-                        <a:ea typeface="微软雅黑" panose="020B0503020204020204" pitchFamily="34" charset="-122"/>
-                        <a:cs typeface="微软雅黑" panose="020B0503020204020204" pitchFamily="34" charset="-122"/>
+                        <a:latin typeface="微软雅黑" charset="0"/>
+                        <a:ea typeface="微软雅黑" charset="0"/>
+                        <a:cs typeface="微软雅黑" charset="0"/>
                       </a:endParaRPr>
                     </a:p>
                   </a:txBody>
-                  <a:tcPr anchor="ctr">
+                  <a:tcPr marL="91440" marR="91440" marT="45720" marB="45720" anchor="ctr">
                     <a:lnL w="9525" cap="flat" cmpd="sng" algn="ctr">
                       <a:solidFill>
                         <a:srgbClr val="D8DBE0"/>
@@ -7184,7 +7313,7 @@
                     <a:bodyPr/>
                     <a:lstStyle/>
                     <a:p>
-                      <a:pPr marL="0" indent="0" algn="l">
+                      <a:pPr algn="l" indent="0" marL="0">
                         <a:buNone/>
                       </a:pPr>
                       <a:r>
@@ -7192,20 +7321,20 @@
                           <a:solidFill>
                             <a:srgbClr val="1F2329"/>
                           </a:solidFill>
-                          <a:latin typeface="微软雅黑" panose="020B0503020204020204" pitchFamily="34" charset="-122"/>
-                          <a:ea typeface="微软雅黑" panose="020B0503020204020204" pitchFamily="34" charset="-122"/>
-                          <a:cs typeface="微软雅黑" panose="020B0503020204020204" pitchFamily="34" charset="-120"/>
+                          <a:latin typeface="微软雅黑" pitchFamily="34" charset="0"/>
+                          <a:ea typeface="微软雅黑" pitchFamily="34" charset="-122"/>
+                          <a:cs typeface="微软雅黑" pitchFamily="34" charset="-120"/>
                         </a:rPr>
                         <a:t>头插法模板核心，2024阅读3、2023循环段倒置用同一动作</a:t>
                       </a:r>
                       <a:endParaRPr lang="en-US" sz="1500" dirty="0">
-                        <a:latin typeface="微软雅黑" panose="020B0503020204020204" pitchFamily="34" charset="-122"/>
-                        <a:ea typeface="微软雅黑" panose="020B0503020204020204" pitchFamily="34" charset="-122"/>
-                        <a:cs typeface="微软雅黑" panose="020B0503020204020204" pitchFamily="34" charset="-122"/>
+                        <a:latin typeface="微软雅黑" charset="0"/>
+                        <a:ea typeface="微软雅黑" charset="0"/>
+                        <a:cs typeface="微软雅黑" charset="0"/>
                       </a:endParaRPr>
                     </a:p>
                   </a:txBody>
-                  <a:tcPr anchor="ctr">
+                  <a:tcPr marL="91440" marR="91440" marT="45720" marB="45720" anchor="ctr">
                     <a:lnL w="9525" cap="flat" cmpd="sng" algn="ctr">
                       <a:solidFill>
                         <a:srgbClr val="D8DBE0"/>
@@ -7254,7 +7383,7 @@
                     <a:bodyPr/>
                     <a:lstStyle/>
                     <a:p>
-                      <a:pPr marL="0" indent="0" algn="l">
+                      <a:pPr algn="l" indent="0" marL="0">
                         <a:buNone/>
                       </a:pPr>
                       <a:r>
@@ -7262,20 +7391,20 @@
                           <a:solidFill>
                             <a:srgbClr val="1F2329"/>
                           </a:solidFill>
-                          <a:latin typeface="微软雅黑" panose="020B0503020204020204" pitchFamily="34" charset="-122"/>
-                          <a:ea typeface="微软雅黑" panose="020B0503020204020204" pitchFamily="34" charset="-122"/>
-                          <a:cs typeface="微软雅黑" panose="020B0503020204020204" pitchFamily="34" charset="-120"/>
+                          <a:latin typeface="微软雅黑" pitchFamily="34" charset="0"/>
+                          <a:ea typeface="微软雅黑" pitchFamily="34" charset="-122"/>
+                          <a:cs typeface="微软雅黑" pitchFamily="34" charset="-120"/>
                         </a:rPr>
                         <a:t>2算21</a:t>
                       </a:r>
                       <a:endParaRPr lang="en-US" sz="1500" dirty="0">
-                        <a:latin typeface="微软雅黑" panose="020B0503020204020204" pitchFamily="34" charset="-122"/>
-                        <a:ea typeface="微软雅黑" panose="020B0503020204020204" pitchFamily="34" charset="-122"/>
-                        <a:cs typeface="微软雅黑" panose="020B0503020204020204" pitchFamily="34" charset="-122"/>
+                        <a:latin typeface="微软雅黑" charset="0"/>
+                        <a:ea typeface="微软雅黑" charset="0"/>
+                        <a:cs typeface="微软雅黑" charset="0"/>
                       </a:endParaRPr>
                     </a:p>
                   </a:txBody>
-                  <a:tcPr anchor="ctr">
+                  <a:tcPr marL="91440" marR="91440" marT="45720" marB="45720" anchor="ctr">
                     <a:lnL w="9525" cap="flat" cmpd="sng" algn="ctr">
                       <a:solidFill>
                         <a:srgbClr val="D8DBE0"/>
@@ -7322,7 +7451,7 @@
                     <a:bodyPr/>
                     <a:lstStyle/>
                     <a:p>
-                      <a:pPr marL="0" indent="0" algn="l">
+                      <a:pPr algn="l" indent="0" marL="0">
                         <a:buNone/>
                       </a:pPr>
                       <a:r>
@@ -7330,20 +7459,20 @@
                           <a:solidFill>
                             <a:srgbClr val="1F2329"/>
                           </a:solidFill>
-                          <a:latin typeface="微软雅黑" panose="020B0503020204020204" pitchFamily="34" charset="-122"/>
-                          <a:ea typeface="微软雅黑" panose="020B0503020204020204" pitchFamily="34" charset="-122"/>
-                          <a:cs typeface="微软雅黑" panose="020B0503020204020204" pitchFamily="34" charset="-120"/>
+                          <a:latin typeface="微软雅黑" pitchFamily="34" charset="0"/>
+                          <a:ea typeface="微软雅黑" pitchFamily="34" charset="-122"/>
+                          <a:cs typeface="微软雅黑" pitchFamily="34" charset="-120"/>
                         </a:rPr>
                         <a:t>归并成递减表</a:t>
                       </a:r>
                       <a:endParaRPr lang="en-US" sz="1500" dirty="0">
-                        <a:latin typeface="微软雅黑" panose="020B0503020204020204" pitchFamily="34" charset="-122"/>
-                        <a:ea typeface="微软雅黑" panose="020B0503020204020204" pitchFamily="34" charset="-122"/>
-                        <a:cs typeface="微软雅黑" panose="020B0503020204020204" pitchFamily="34" charset="-122"/>
+                        <a:latin typeface="微软雅黑" charset="0"/>
+                        <a:ea typeface="微软雅黑" charset="0"/>
+                        <a:cs typeface="微软雅黑" charset="0"/>
                       </a:endParaRPr>
                     </a:p>
                   </a:txBody>
-                  <a:tcPr anchor="ctr">
+                  <a:tcPr marL="91440" marR="91440" marT="45720" marB="45720" anchor="ctr">
                     <a:lnL w="9525" cap="flat" cmpd="sng" algn="ctr">
                       <a:solidFill>
                         <a:srgbClr val="D8DBE0"/>
@@ -7390,7 +7519,7 @@
                     <a:bodyPr/>
                     <a:lstStyle/>
                     <a:p>
-                      <a:pPr marL="0" indent="0" algn="l">
+                      <a:pPr algn="l" indent="0" marL="0">
                         <a:buNone/>
                       </a:pPr>
                       <a:r>
@@ -7398,20 +7527,20 @@
                           <a:solidFill>
                             <a:srgbClr val="1F2329"/>
                           </a:solidFill>
-                          <a:latin typeface="微软雅黑" panose="020B0503020204020204" pitchFamily="34" charset="-122"/>
-                          <a:ea typeface="微软雅黑" panose="020B0503020204020204" pitchFamily="34" charset="-122"/>
-                          <a:cs typeface="微软雅黑" panose="020B0503020204020204" pitchFamily="34" charset="-120"/>
+                          <a:latin typeface="微软雅黑" pitchFamily="34" charset="0"/>
+                          <a:ea typeface="微软雅黑" pitchFamily="34" charset="-122"/>
+                          <a:cs typeface="微软雅黑" pitchFamily="34" charset="-120"/>
                         </a:rPr>
                         <a:t>递增A、B归并为递减C（头插法），2024程序阅读3同型</a:t>
                       </a:r>
                       <a:endParaRPr lang="en-US" sz="1500" dirty="0">
-                        <a:latin typeface="微软雅黑" panose="020B0503020204020204" pitchFamily="34" charset="-122"/>
-                        <a:ea typeface="微软雅黑" panose="020B0503020204020204" pitchFamily="34" charset="-122"/>
-                        <a:cs typeface="微软雅黑" panose="020B0503020204020204" pitchFamily="34" charset="-122"/>
+                        <a:latin typeface="微软雅黑" charset="0"/>
+                        <a:ea typeface="微软雅黑" charset="0"/>
+                        <a:cs typeface="微软雅黑" charset="0"/>
                       </a:endParaRPr>
                     </a:p>
                   </a:txBody>
-                  <a:tcPr anchor="ctr">
+                  <a:tcPr marL="91440" marR="91440" marT="45720" marB="45720" anchor="ctr">
                     <a:lnL w="9525" cap="flat" cmpd="sng" algn="ctr">
                       <a:solidFill>
                         <a:srgbClr val="D8DBE0"/>
@@ -7460,7 +7589,7 @@
                     <a:bodyPr/>
                     <a:lstStyle/>
                     <a:p>
-                      <a:pPr marL="0" indent="0" algn="l">
+                      <a:pPr algn="l" indent="0" marL="0">
                         <a:buNone/>
                       </a:pPr>
                       <a:r>
@@ -7468,20 +7597,20 @@
                           <a:solidFill>
                             <a:srgbClr val="1F2329"/>
                           </a:solidFill>
-                          <a:latin typeface="微软雅黑" panose="020B0503020204020204" pitchFamily="34" charset="-122"/>
-                          <a:ea typeface="微软雅黑" panose="020B0503020204020204" pitchFamily="34" charset="-122"/>
-                          <a:cs typeface="微软雅黑" panose="020B0503020204020204" pitchFamily="34" charset="-120"/>
+                          <a:latin typeface="微软雅黑" pitchFamily="34" charset="0"/>
+                          <a:ea typeface="微软雅黑" pitchFamily="34" charset="-122"/>
+                          <a:cs typeface="微软雅黑" pitchFamily="34" charset="-120"/>
                         </a:rPr>
                         <a:t>2算27</a:t>
                       </a:r>
                       <a:endParaRPr lang="en-US" sz="1500" dirty="0">
-                        <a:latin typeface="微软雅黑" panose="020B0503020204020204" pitchFamily="34" charset="-122"/>
-                        <a:ea typeface="微软雅黑" panose="020B0503020204020204" pitchFamily="34" charset="-122"/>
-                        <a:cs typeface="微软雅黑" panose="020B0503020204020204" pitchFamily="34" charset="-122"/>
+                        <a:latin typeface="微软雅黑" charset="0"/>
+                        <a:ea typeface="微软雅黑" charset="0"/>
+                        <a:cs typeface="微软雅黑" charset="0"/>
                       </a:endParaRPr>
                     </a:p>
                   </a:txBody>
-                  <a:tcPr anchor="ctr">
+                  <a:tcPr marL="91440" marR="91440" marT="45720" marB="45720" anchor="ctr">
                     <a:lnL w="9525" cap="flat" cmpd="sng" algn="ctr">
                       <a:solidFill>
                         <a:srgbClr val="D8DBE0"/>
@@ -7528,7 +7657,7 @@
                     <a:bodyPr/>
                     <a:lstStyle/>
                     <a:p>
-                      <a:pPr marL="0" indent="0" algn="l">
+                      <a:pPr algn="l" indent="0" marL="0">
                         <a:buNone/>
                       </a:pPr>
                       <a:r>
@@ -7536,20 +7665,20 @@
                           <a:solidFill>
                             <a:srgbClr val="1F2329"/>
                           </a:solidFill>
-                          <a:latin typeface="微软雅黑" panose="020B0503020204020204" pitchFamily="34" charset="-122"/>
-                          <a:ea typeface="微软雅黑" panose="020B0503020204020204" pitchFamily="34" charset="-122"/>
-                          <a:cs typeface="微软雅黑" panose="020B0503020204020204" pitchFamily="34" charset="-120"/>
+                          <a:latin typeface="微软雅黑" pitchFamily="34" charset="0"/>
+                          <a:ea typeface="微软雅黑" pitchFamily="34" charset="-122"/>
+                          <a:cs typeface="微软雅黑" pitchFamily="34" charset="-120"/>
                         </a:rPr>
                         <a:t>交集+空间利用</a:t>
                       </a:r>
                       <a:endParaRPr lang="en-US" sz="1500" dirty="0">
-                        <a:latin typeface="微软雅黑" panose="020B0503020204020204" pitchFamily="34" charset="-122"/>
-                        <a:ea typeface="微软雅黑" panose="020B0503020204020204" pitchFamily="34" charset="-122"/>
-                        <a:cs typeface="微软雅黑" panose="020B0503020204020204" pitchFamily="34" charset="-122"/>
+                        <a:latin typeface="微软雅黑" charset="0"/>
+                        <a:ea typeface="微软雅黑" charset="0"/>
+                        <a:cs typeface="微软雅黑" charset="0"/>
                       </a:endParaRPr>
                     </a:p>
                   </a:txBody>
-                  <a:tcPr anchor="ctr">
+                  <a:tcPr marL="91440" marR="91440" marT="45720" marB="45720" anchor="ctr">
                     <a:lnL w="9525" cap="flat" cmpd="sng" algn="ctr">
                       <a:solidFill>
                         <a:srgbClr val="D8DBE0"/>
@@ -7596,7 +7725,7 @@
                     <a:bodyPr/>
                     <a:lstStyle/>
                     <a:p>
-                      <a:pPr marL="0" indent="0" algn="l">
+                      <a:pPr algn="l" indent="0" marL="0">
                         <a:buNone/>
                       </a:pPr>
                       <a:r>
@@ -7604,20 +7733,20 @@
                           <a:solidFill>
                             <a:srgbClr val="1F2329"/>
                           </a:solidFill>
-                          <a:latin typeface="微软雅黑" panose="020B0503020204020204" pitchFamily="34" charset="-122"/>
-                          <a:ea typeface="微软雅黑" panose="020B0503020204020204" pitchFamily="34" charset="-122"/>
-                          <a:cs typeface="微软雅黑" panose="020B0503020204020204" pitchFamily="34" charset="-120"/>
+                          <a:latin typeface="微软雅黑" pitchFamily="34" charset="0"/>
+                          <a:ea typeface="微软雅黑" pitchFamily="34" charset="-122"/>
+                          <a:cs typeface="微软雅黑" pitchFamily="34" charset="-120"/>
                         </a:rPr>
                         <a:t>单链表交集且利用A空间，2026程序阅读3同族（归并+释放结点）</a:t>
                       </a:r>
                       <a:endParaRPr lang="en-US" sz="1500" dirty="0">
-                        <a:latin typeface="微软雅黑" panose="020B0503020204020204" pitchFamily="34" charset="-122"/>
-                        <a:ea typeface="微软雅黑" panose="020B0503020204020204" pitchFamily="34" charset="-122"/>
-                        <a:cs typeface="微软雅黑" panose="020B0503020204020204" pitchFamily="34" charset="-122"/>
+                        <a:latin typeface="微软雅黑" charset="0"/>
+                        <a:ea typeface="微软雅黑" charset="0"/>
+                        <a:cs typeface="微软雅黑" charset="0"/>
                       </a:endParaRPr>
                     </a:p>
                   </a:txBody>
-                  <a:tcPr anchor="ctr">
+                  <a:tcPr marL="91440" marR="91440" marT="45720" marB="45720" anchor="ctr">
                     <a:lnL w="9525" cap="flat" cmpd="sng" algn="ctr">
                       <a:solidFill>
                         <a:srgbClr val="D8DBE0"/>
@@ -7666,7 +7795,7 @@
                     <a:bodyPr/>
                     <a:lstStyle/>
                     <a:p>
-                      <a:pPr marL="0" indent="0" algn="l">
+                      <a:pPr algn="l" indent="0" marL="0">
                         <a:buNone/>
                       </a:pPr>
                       <a:r>
@@ -7674,20 +7803,20 @@
                           <a:solidFill>
                             <a:srgbClr val="1F2329"/>
                           </a:solidFill>
-                          <a:latin typeface="微软雅黑" panose="020B0503020204020204" pitchFamily="34" charset="-122"/>
-                          <a:ea typeface="微软雅黑" panose="020B0503020204020204" pitchFamily="34" charset="-122"/>
-                          <a:cs typeface="微软雅黑" panose="020B0503020204020204" pitchFamily="34" charset="-120"/>
+                          <a:latin typeface="微软雅黑" pitchFamily="34" charset="0"/>
+                          <a:ea typeface="微软雅黑" pitchFamily="34" charset="-122"/>
+                          <a:cs typeface="微软雅黑" pitchFamily="34" charset="-120"/>
                         </a:rPr>
                         <a:t>2算30</a:t>
                       </a:r>
                       <a:endParaRPr lang="en-US" sz="1500" dirty="0">
-                        <a:latin typeface="微软雅黑" panose="020B0503020204020204" pitchFamily="34" charset="-122"/>
-                        <a:ea typeface="微软雅黑" panose="020B0503020204020204" pitchFamily="34" charset="-122"/>
-                        <a:cs typeface="微软雅黑" panose="020B0503020204020204" pitchFamily="34" charset="-122"/>
+                        <a:latin typeface="微软雅黑" charset="0"/>
+                        <a:ea typeface="微软雅黑" charset="0"/>
+                        <a:cs typeface="微软雅黑" charset="0"/>
                       </a:endParaRPr>
                     </a:p>
                   </a:txBody>
-                  <a:tcPr anchor="ctr">
+                  <a:tcPr marL="91440" marR="91440" marT="45720" marB="45720" anchor="ctr">
                     <a:lnL w="9525" cap="flat" cmpd="sng" algn="ctr">
                       <a:solidFill>
                         <a:srgbClr val="D8DBE0"/>
@@ -7734,7 +7863,7 @@
                     <a:bodyPr/>
                     <a:lstStyle/>
                     <a:p>
-                      <a:pPr marL="0" indent="0" algn="l">
+                      <a:pPr algn="l" indent="0" marL="0">
                         <a:buNone/>
                       </a:pPr>
                       <a:r>
@@ -7742,20 +7871,20 @@
                           <a:solidFill>
                             <a:srgbClr val="1F2329"/>
                           </a:solidFill>
-                          <a:latin typeface="微软雅黑" panose="020B0503020204020204" pitchFamily="34" charset="-122"/>
-                          <a:ea typeface="微软雅黑" panose="020B0503020204020204" pitchFamily="34" charset="-122"/>
-                          <a:cs typeface="微软雅黑" panose="020B0503020204020204" pitchFamily="34" charset="-120"/>
+                          <a:latin typeface="微软雅黑" pitchFamily="34" charset="0"/>
+                          <a:ea typeface="微软雅黑" pitchFamily="34" charset="-122"/>
+                          <a:cs typeface="微软雅黑" pitchFamily="34" charset="-120"/>
                         </a:rPr>
                         <a:t>循环链表删除</a:t>
                       </a:r>
                       <a:endParaRPr lang="en-US" sz="1500" dirty="0">
-                        <a:latin typeface="微软雅黑" panose="020B0503020204020204" pitchFamily="34" charset="-122"/>
-                        <a:ea typeface="微软雅黑" panose="020B0503020204020204" pitchFamily="34" charset="-122"/>
-                        <a:cs typeface="微软雅黑" panose="020B0503020204020204" pitchFamily="34" charset="-122"/>
+                        <a:latin typeface="微软雅黑" charset="0"/>
+                        <a:ea typeface="微软雅黑" charset="0"/>
+                        <a:cs typeface="微软雅黑" charset="0"/>
                       </a:endParaRPr>
                     </a:p>
                   </a:txBody>
-                  <a:tcPr anchor="ctr">
+                  <a:tcPr marL="91440" marR="91440" marT="45720" marB="45720" anchor="ctr">
                     <a:lnL w="9525" cap="flat" cmpd="sng" algn="ctr">
                       <a:solidFill>
                         <a:srgbClr val="D8DBE0"/>
@@ -7802,7 +7931,7 @@
                     <a:bodyPr/>
                     <a:lstStyle/>
                     <a:p>
-                      <a:pPr marL="0" indent="0" algn="l">
+                      <a:pPr algn="l" indent="0" marL="0">
                         <a:buNone/>
                       </a:pPr>
                       <a:r>
@@ -7810,20 +7939,20 @@
                           <a:solidFill>
                             <a:srgbClr val="1F2329"/>
                           </a:solidFill>
-                          <a:latin typeface="微软雅黑" panose="020B0503020204020204" pitchFamily="34" charset="-122"/>
-                          <a:ea typeface="微软雅黑" panose="020B0503020204020204" pitchFamily="34" charset="-122"/>
-                          <a:cs typeface="微软雅黑" panose="020B0503020204020204" pitchFamily="34" charset="-120"/>
+                          <a:latin typeface="微软雅黑" pitchFamily="34" charset="0"/>
+                          <a:ea typeface="微软雅黑" pitchFamily="34" charset="-122"/>
+                          <a:cs typeface="微软雅黑" pitchFamily="34" charset="-120"/>
                         </a:rPr>
                         <a:t>无头指针循环链表删前驱，2026约瑟夫环的核心动作</a:t>
                       </a:r>
                       <a:endParaRPr lang="en-US" sz="1500" dirty="0">
-                        <a:latin typeface="微软雅黑" panose="020B0503020204020204" pitchFamily="34" charset="-122"/>
-                        <a:ea typeface="微软雅黑" panose="020B0503020204020204" pitchFamily="34" charset="-122"/>
-                        <a:cs typeface="微软雅黑" panose="020B0503020204020204" pitchFamily="34" charset="-122"/>
+                        <a:latin typeface="微软雅黑" charset="0"/>
+                        <a:ea typeface="微软雅黑" charset="0"/>
+                        <a:cs typeface="微软雅黑" charset="0"/>
                       </a:endParaRPr>
                     </a:p>
                   </a:txBody>
-                  <a:tcPr anchor="ctr">
+                  <a:tcPr marL="91440" marR="91440" marT="45720" marB="45720" anchor="ctr">
                     <a:lnL w="9525" cap="flat" cmpd="sng" algn="ctr">
                       <a:solidFill>
                         <a:srgbClr val="D8DBE0"/>
@@ -7880,7 +8009,7 @@
 
 <file path=ppt/slides/slide6.xml><?xml version="1.0" encoding="utf-8"?>
 <p:sld xmlns:a="http://schemas.openxmlformats.org/drawingml/2006/main" xmlns:r="http://schemas.openxmlformats.org/officeDocument/2006/relationships" xmlns:p="http://schemas.openxmlformats.org/presentationml/2006/main">
-  <p:cSld>
+  <p:cSld name="Slide 6">
     <p:bg>
       <p:bgPr>
         <a:blipFill dpi="0" rotWithShape="1">
@@ -7924,12 +8053,13 @@
             <a:avLst/>
           </a:prstGeom>
           <a:noFill/>
+          <a:ln/>
         </p:spPr>
         <p:txBody>
           <a:bodyPr wrap="square" rtlCol="0" anchor="ctr"/>
           <a:lstStyle/>
           <a:p>
-            <a:pPr marL="0" indent="0" algn="r">
+            <a:pPr algn="r" indent="0" marL="0">
               <a:buNone/>
             </a:pPr>
             <a:r>
@@ -7937,9 +8067,9 @@
                 <a:solidFill>
                   <a:srgbClr val="8A9099"/>
                 </a:solidFill>
-                <a:latin typeface="微软雅黑" panose="020B0503020204020204" pitchFamily="34" charset="-122"/>
-                <a:ea typeface="微软雅黑" panose="020B0503020204020204" pitchFamily="34" charset="-122"/>
-                <a:cs typeface="微软雅黑" panose="020B0503020204020204" pitchFamily="34" charset="-120"/>
+                <a:latin typeface="微软雅黑" pitchFamily="34" charset="0"/>
+                <a:ea typeface="微软雅黑" pitchFamily="34" charset="-122"/>
+                <a:cs typeface="微软雅黑" pitchFamily="34" charset="-120"/>
               </a:rPr>
               <a:t>6 / 9</a:t>
             </a:r>
@@ -7962,12 +8092,13 @@
             <a:avLst/>
           </a:prstGeom>
           <a:noFill/>
+          <a:ln/>
         </p:spPr>
         <p:txBody>
           <a:bodyPr wrap="square" rtlCol="0" anchor="ctr"/>
           <a:lstStyle/>
           <a:p>
-            <a:pPr marL="0" indent="0" algn="l">
+            <a:pPr algn="l" indent="0" marL="0">
               <a:buNone/>
             </a:pPr>
             <a:r>
@@ -7975,9 +8106,9 @@
                 <a:solidFill>
                   <a:srgbClr val="1F4E9C"/>
                 </a:solidFill>
-                <a:latin typeface="微软雅黑" panose="020B0503020204020204" pitchFamily="34" charset="-122"/>
-                <a:ea typeface="微软雅黑" panose="020B0503020204020204" pitchFamily="34" charset="-122"/>
-                <a:cs typeface="微软雅黑" panose="020B0503020204020204" pitchFamily="34" charset="-120"/>
+                <a:latin typeface="微软雅黑" pitchFamily="34" charset="0"/>
+                <a:ea typeface="微软雅黑" pitchFamily="34" charset="-122"/>
+                <a:cs typeface="微软雅黑" pitchFamily="34" charset="-120"/>
               </a:rPr>
               <a:t>有价值必做</a:t>
             </a:r>
@@ -8000,12 +8131,13 @@
             <a:avLst/>
           </a:prstGeom>
           <a:noFill/>
+          <a:ln/>
         </p:spPr>
         <p:txBody>
           <a:bodyPr wrap="square" rtlCol="0" anchor="ctr"/>
           <a:lstStyle/>
           <a:p>
-            <a:pPr marL="0" indent="0" algn="l">
+            <a:pPr algn="l" indent="0" marL="0">
               <a:buNone/>
             </a:pPr>
             <a:r>
@@ -8013,9 +8145,9 @@
                 <a:solidFill>
                   <a:srgbClr val="1F2329"/>
                 </a:solidFill>
-                <a:latin typeface="微软雅黑" panose="020B0503020204020204" pitchFamily="34" charset="-122"/>
-                <a:ea typeface="微软雅黑" panose="020B0503020204020204" pitchFamily="34" charset="-122"/>
-                <a:cs typeface="微软雅黑" panose="020B0503020204020204" pitchFamily="34" charset="-120"/>
+                <a:latin typeface="微软雅黑" pitchFamily="34" charset="0"/>
+                <a:ea typeface="微软雅黑" pitchFamily="34" charset="-122"/>
+                <a:cs typeface="微软雅黑" pitchFamily="34" charset="-120"/>
               </a:rPr>
               <a:t>必做题（4/4）</a:t>
             </a:r>
@@ -8029,11 +8161,17 @@
           <p:cNvGraphicFramePr>
             <a:graphicFrameLocks noGrp="1"/>
           </p:cNvGraphicFramePr>
-          <p:nvPr/>
+          <p:nvPr>
+            <p:extLst>
+              <p:ext uri="{D42A27DB-BD31-4B8C-83A1-F6EECF244321}">
+                <p14:modId xmlns:p14="http://schemas.microsoft.com/office/powerpoint/2010/main" val="1579011935"/>
+              </p:ext>
+            </p:extLst>
+          </p:nvPr>
         </p:nvGraphicFramePr>
         <p:xfrm>
           <a:off x="822960" y="2395728"/>
-          <a:ext cx="10545775" cy="2523744"/>
+          <a:ext cx="10545775" cy="914400"/>
         </p:xfrm>
         <a:graphic>
           <a:graphicData uri="http://schemas.openxmlformats.org/drawingml/2006/table">
@@ -8050,7 +8188,7 @@
                     <a:bodyPr/>
                     <a:lstStyle/>
                     <a:p>
-                      <a:pPr marL="0" indent="0" algn="l">
+                      <a:pPr algn="l" indent="0" marL="0">
                         <a:buNone/>
                       </a:pPr>
                       <a:r>
@@ -8058,20 +8196,20 @@
                           <a:solidFill>
                             <a:srgbClr val="1F4E9C"/>
                           </a:solidFill>
-                          <a:latin typeface="微软雅黑" panose="020B0503020204020204" pitchFamily="34" charset="-122"/>
-                          <a:ea typeface="微软雅黑" panose="020B0503020204020204" pitchFamily="34" charset="-122"/>
-                          <a:cs typeface="微软雅黑" panose="020B0503020204020204" pitchFamily="34" charset="-120"/>
+                          <a:latin typeface="微软雅黑" pitchFamily="34" charset="0"/>
+                          <a:ea typeface="微软雅黑" pitchFamily="34" charset="-122"/>
+                          <a:cs typeface="微软雅黑" pitchFamily="34" charset="-120"/>
                         </a:rPr>
                         <a:t>题号</a:t>
                       </a:r>
                       <a:endParaRPr lang="en-US" sz="1500" dirty="0">
-                        <a:latin typeface="微软雅黑" panose="020B0503020204020204" pitchFamily="34" charset="-122"/>
-                        <a:ea typeface="微软雅黑" panose="020B0503020204020204" pitchFamily="34" charset="-122"/>
-                        <a:cs typeface="微软雅黑" panose="020B0503020204020204" pitchFamily="34" charset="-122"/>
+                        <a:latin typeface="微软雅黑" charset="0"/>
+                        <a:ea typeface="微软雅黑" charset="0"/>
+                        <a:cs typeface="微软雅黑" charset="0"/>
                       </a:endParaRPr>
                     </a:p>
                   </a:txBody>
-                  <a:tcPr anchor="ctr">
+                  <a:tcPr marL="91440" marR="91440" marT="45720" marB="45720" anchor="ctr">
                     <a:lnL w="9525" cap="flat" cmpd="sng" algn="ctr">
                       <a:solidFill>
                         <a:srgbClr val="D8DBE0"/>
@@ -8118,7 +8256,7 @@
                     <a:bodyPr/>
                     <a:lstStyle/>
                     <a:p>
-                      <a:pPr marL="0" indent="0" algn="l">
+                      <a:pPr algn="l" indent="0" marL="0">
                         <a:buNone/>
                       </a:pPr>
                       <a:r>
@@ -8126,20 +8264,20 @@
                           <a:solidFill>
                             <a:srgbClr val="1F4E9C"/>
                           </a:solidFill>
-                          <a:latin typeface="微软雅黑" panose="020B0503020204020204" pitchFamily="34" charset="-122"/>
-                          <a:ea typeface="微软雅黑" panose="020B0503020204020204" pitchFamily="34" charset="-122"/>
-                          <a:cs typeface="微软雅黑" panose="020B0503020204020204" pitchFamily="34" charset="-120"/>
+                          <a:latin typeface="微软雅黑" pitchFamily="34" charset="0"/>
+                          <a:ea typeface="微软雅黑" pitchFamily="34" charset="-122"/>
+                          <a:cs typeface="微软雅黑" pitchFamily="34" charset="-120"/>
                         </a:rPr>
                         <a:t>考点</a:t>
                       </a:r>
                       <a:endParaRPr lang="en-US" sz="1500" dirty="0">
-                        <a:latin typeface="微软雅黑" panose="020B0503020204020204" pitchFamily="34" charset="-122"/>
-                        <a:ea typeface="微软雅黑" panose="020B0503020204020204" pitchFamily="34" charset="-122"/>
-                        <a:cs typeface="微软雅黑" panose="020B0503020204020204" pitchFamily="34" charset="-122"/>
+                        <a:latin typeface="微软雅黑" charset="0"/>
+                        <a:ea typeface="微软雅黑" charset="0"/>
+                        <a:cs typeface="微软雅黑" charset="0"/>
                       </a:endParaRPr>
                     </a:p>
                   </a:txBody>
-                  <a:tcPr anchor="ctr">
+                  <a:tcPr marL="91440" marR="91440" marT="45720" marB="45720" anchor="ctr">
                     <a:lnL w="9525" cap="flat" cmpd="sng" algn="ctr">
                       <a:solidFill>
                         <a:srgbClr val="D8DBE0"/>
@@ -8186,7 +8324,7 @@
                     <a:bodyPr/>
                     <a:lstStyle/>
                     <a:p>
-                      <a:pPr marL="0" indent="0" algn="l">
+                      <a:pPr algn="l" indent="0" marL="0">
                         <a:buNone/>
                       </a:pPr>
                       <a:r>
@@ -8194,20 +8332,20 @@
                           <a:solidFill>
                             <a:srgbClr val="1F4E9C"/>
                           </a:solidFill>
-                          <a:latin typeface="微软雅黑" panose="020B0503020204020204" pitchFamily="34" charset="-122"/>
-                          <a:ea typeface="微软雅黑" panose="020B0503020204020204" pitchFamily="34" charset="-122"/>
-                          <a:cs typeface="微软雅黑" panose="020B0503020204020204" pitchFamily="34" charset="-120"/>
+                          <a:latin typeface="微软雅黑" pitchFamily="34" charset="0"/>
+                          <a:ea typeface="微软雅黑" pitchFamily="34" charset="-122"/>
+                          <a:cs typeface="微软雅黑" pitchFamily="34" charset="-120"/>
                         </a:rPr>
                         <a:t>价值</a:t>
                       </a:r>
                       <a:endParaRPr lang="en-US" sz="1500" dirty="0">
-                        <a:latin typeface="微软雅黑" panose="020B0503020204020204" pitchFamily="34" charset="-122"/>
-                        <a:ea typeface="微软雅黑" panose="020B0503020204020204" pitchFamily="34" charset="-122"/>
-                        <a:cs typeface="微软雅黑" panose="020B0503020204020204" pitchFamily="34" charset="-122"/>
+                        <a:latin typeface="微软雅黑" charset="0"/>
+                        <a:ea typeface="微软雅黑" charset="0"/>
+                        <a:cs typeface="微软雅黑" charset="0"/>
                       </a:endParaRPr>
                     </a:p>
                   </a:txBody>
-                  <a:tcPr anchor="ctr">
+                  <a:tcPr marL="91440" marR="91440" marT="45720" marB="45720" anchor="ctr">
                     <a:lnL w="9525" cap="flat" cmpd="sng" algn="ctr">
                       <a:solidFill>
                         <a:srgbClr val="D8DBE0"/>
@@ -8256,7 +8394,7 @@
                     <a:bodyPr/>
                     <a:lstStyle/>
                     <a:p>
-                      <a:pPr marL="0" indent="0" algn="l">
+                      <a:pPr algn="l" indent="0" marL="0">
                         <a:buNone/>
                       </a:pPr>
                       <a:r>
@@ -8264,20 +8402,20 @@
                           <a:solidFill>
                             <a:srgbClr val="1F2329"/>
                           </a:solidFill>
-                          <a:latin typeface="微软雅黑" panose="020B0503020204020204" pitchFamily="34" charset="-122"/>
-                          <a:ea typeface="微软雅黑" panose="020B0503020204020204" pitchFamily="34" charset="-122"/>
-                          <a:cs typeface="微软雅黑" panose="020B0503020204020204" pitchFamily="34" charset="-120"/>
+                          <a:latin typeface="微软雅黑" pitchFamily="34" charset="0"/>
+                          <a:ea typeface="微软雅黑" pitchFamily="34" charset="-122"/>
+                          <a:cs typeface="微软雅黑" pitchFamily="34" charset="-120"/>
                         </a:rPr>
                         <a:t>2算31</a:t>
                       </a:r>
                       <a:endParaRPr lang="en-US" sz="1500" dirty="0">
-                        <a:latin typeface="微软雅黑" panose="020B0503020204020204" pitchFamily="34" charset="-122"/>
-                        <a:ea typeface="微软雅黑" panose="020B0503020204020204" pitchFamily="34" charset="-122"/>
-                        <a:cs typeface="微软雅黑" panose="020B0503020204020204" pitchFamily="34" charset="-122"/>
+                        <a:latin typeface="微软雅黑" charset="0"/>
+                        <a:ea typeface="微软雅黑" charset="0"/>
+                        <a:cs typeface="微软雅黑" charset="0"/>
                       </a:endParaRPr>
                     </a:p>
                   </a:txBody>
-                  <a:tcPr anchor="ctr">
+                  <a:tcPr marL="91440" marR="91440" marT="45720" marB="45720" anchor="ctr">
                     <a:lnL w="9525" cap="flat" cmpd="sng" algn="ctr">
                       <a:solidFill>
                         <a:srgbClr val="D8DBE0"/>
@@ -8324,7 +8462,7 @@
                     <a:bodyPr/>
                     <a:lstStyle/>
                     <a:p>
-                      <a:pPr marL="0" indent="0" algn="l">
+                      <a:pPr algn="l" indent="0" marL="0">
                         <a:buNone/>
                       </a:pPr>
                       <a:r>
@@ -8332,20 +8470,20 @@
                           <a:solidFill>
                             <a:srgbClr val="1F2329"/>
                           </a:solidFill>
-                          <a:latin typeface="微软雅黑" panose="020B0503020204020204" pitchFamily="34" charset="-122"/>
-                          <a:ea typeface="微软雅黑" panose="020B0503020204020204" pitchFamily="34" charset="-122"/>
-                          <a:cs typeface="微软雅黑" panose="020B0503020204020204" pitchFamily="34" charset="-120"/>
+                          <a:latin typeface="微软雅黑" pitchFamily="34" charset="0"/>
+                          <a:ea typeface="微软雅黑" pitchFamily="34" charset="-122"/>
+                          <a:cs typeface="微软雅黑" pitchFamily="34" charset="-120"/>
                         </a:rPr>
                         <a:t>循环链表双向化</a:t>
                       </a:r>
                       <a:endParaRPr lang="en-US" sz="1500" dirty="0">
-                        <a:latin typeface="微软雅黑" panose="020B0503020204020204" pitchFamily="34" charset="-122"/>
-                        <a:ea typeface="微软雅黑" panose="020B0503020204020204" pitchFamily="34" charset="-122"/>
-                        <a:cs typeface="微软雅黑" panose="020B0503020204020204" pitchFamily="34" charset="-122"/>
+                        <a:latin typeface="微软雅黑" charset="0"/>
+                        <a:ea typeface="微软雅黑" charset="0"/>
+                        <a:cs typeface="微软雅黑" charset="0"/>
                       </a:endParaRPr>
                     </a:p>
                   </a:txBody>
-                  <a:tcPr anchor="ctr">
+                  <a:tcPr marL="91440" marR="91440" marT="45720" marB="45720" anchor="ctr">
                     <a:lnL w="9525" cap="flat" cmpd="sng" algn="ctr">
                       <a:solidFill>
                         <a:srgbClr val="D8DBE0"/>
@@ -8392,7 +8530,7 @@
                     <a:bodyPr/>
                     <a:lstStyle/>
                     <a:p>
-                      <a:pPr marL="0" indent="0" algn="l">
+                      <a:pPr algn="l" indent="0" marL="0">
                         <a:buNone/>
                       </a:pPr>
                       <a:r>
@@ -8400,20 +8538,20 @@
                           <a:solidFill>
                             <a:srgbClr val="1F2329"/>
                           </a:solidFill>
-                          <a:latin typeface="微软雅黑" panose="020B0503020204020204" pitchFamily="34" charset="-122"/>
-                          <a:ea typeface="微软雅黑" panose="020B0503020204020204" pitchFamily="34" charset="-122"/>
-                          <a:cs typeface="微软雅黑" panose="020B0503020204020204" pitchFamily="34" charset="-120"/>
+                          <a:latin typeface="微软雅黑" pitchFamily="34" charset="0"/>
+                          <a:ea typeface="微软雅黑" pitchFamily="34" charset="-122"/>
+                          <a:cs typeface="微软雅黑" pitchFamily="34" charset="-120"/>
                         </a:rPr>
                         <a:t>一遍遍历填prior改双向循环，2020双向循环改造同族</a:t>
                       </a:r>
                       <a:endParaRPr lang="en-US" sz="1500" dirty="0">
-                        <a:latin typeface="微软雅黑" panose="020B0503020204020204" pitchFamily="34" charset="-122"/>
-                        <a:ea typeface="微软雅黑" panose="020B0503020204020204" pitchFamily="34" charset="-122"/>
-                        <a:cs typeface="微软雅黑" panose="020B0503020204020204" pitchFamily="34" charset="-122"/>
+                        <a:latin typeface="微软雅黑" charset="0"/>
+                        <a:ea typeface="微软雅黑" charset="0"/>
+                        <a:cs typeface="微软雅黑" charset="0"/>
                       </a:endParaRPr>
                     </a:p>
                   </a:txBody>
-                  <a:tcPr anchor="ctr">
+                  <a:tcPr marL="91440" marR="91440" marT="45720" marB="45720" anchor="ctr">
                     <a:lnL w="9525" cap="flat" cmpd="sng" algn="ctr">
                       <a:solidFill>
                         <a:srgbClr val="D8DBE0"/>
@@ -8462,7 +8600,7 @@
                     <a:bodyPr/>
                     <a:lstStyle/>
                     <a:p>
-                      <a:pPr marL="0" indent="0" algn="l">
+                      <a:pPr algn="l" indent="0" marL="0">
                         <a:buNone/>
                       </a:pPr>
                       <a:r>
@@ -8470,20 +8608,20 @@
                           <a:solidFill>
                             <a:srgbClr val="1F2329"/>
                           </a:solidFill>
-                          <a:latin typeface="微软雅黑" panose="020B0503020204020204" pitchFamily="34" charset="-122"/>
-                          <a:ea typeface="微软雅黑" panose="020B0503020204020204" pitchFamily="34" charset="-122"/>
-                          <a:cs typeface="微软雅黑" panose="020B0503020204020204" pitchFamily="34" charset="-120"/>
+                          <a:latin typeface="微软雅黑" pitchFamily="34" charset="0"/>
+                          <a:ea typeface="微软雅黑" pitchFamily="34" charset="-122"/>
+                          <a:cs typeface="微软雅黑" pitchFamily="34" charset="-120"/>
                         </a:rPr>
                         <a:t>2算32</a:t>
                       </a:r>
                       <a:endParaRPr lang="en-US" sz="1500" dirty="0">
-                        <a:latin typeface="微软雅黑" panose="020B0503020204020204" pitchFamily="34" charset="-122"/>
-                        <a:ea typeface="微软雅黑" panose="020B0503020204020204" pitchFamily="34" charset="-122"/>
-                        <a:cs typeface="微软雅黑" panose="020B0503020204020204" pitchFamily="34" charset="-122"/>
+                        <a:latin typeface="微软雅黑" charset="0"/>
+                        <a:ea typeface="微软雅黑" charset="0"/>
+                        <a:cs typeface="微软雅黑" charset="0"/>
                       </a:endParaRPr>
                     </a:p>
                   </a:txBody>
-                  <a:tcPr anchor="ctr">
+                  <a:tcPr marL="91440" marR="91440" marT="45720" marB="45720" anchor="ctr">
                     <a:lnL w="9525" cap="flat" cmpd="sng" algn="ctr">
                       <a:solidFill>
                         <a:srgbClr val="D8DBE0"/>
@@ -8530,7 +8668,7 @@
                     <a:bodyPr/>
                     <a:lstStyle/>
                     <a:p>
-                      <a:pPr marL="0" indent="0" algn="l">
+                      <a:pPr algn="l" indent="0" marL="0">
                         <a:buNone/>
                       </a:pPr>
                       <a:r>
@@ -8538,20 +8676,20 @@
                           <a:solidFill>
                             <a:srgbClr val="1F2329"/>
                           </a:solidFill>
-                          <a:latin typeface="微软雅黑" panose="020B0503020204020204" pitchFamily="34" charset="-122"/>
-                          <a:ea typeface="微软雅黑" panose="020B0503020204020204" pitchFamily="34" charset="-122"/>
-                          <a:cs typeface="微软雅黑" panose="020B0503020204020204" pitchFamily="34" charset="-120"/>
+                          <a:latin typeface="微软雅黑" pitchFamily="34" charset="0"/>
+                          <a:ea typeface="微软雅黑" pitchFamily="34" charset="-122"/>
+                          <a:cs typeface="微软雅黑" pitchFamily="34" charset="-120"/>
                         </a:rPr>
                         <a:t>拆表</a:t>
                       </a:r>
                       <a:endParaRPr lang="en-US" sz="1500" dirty="0">
-                        <a:latin typeface="微软雅黑" panose="020B0503020204020204" pitchFamily="34" charset="-122"/>
-                        <a:ea typeface="微软雅黑" panose="020B0503020204020204" pitchFamily="34" charset="-122"/>
-                        <a:cs typeface="微软雅黑" panose="020B0503020204020204" pitchFamily="34" charset="-122"/>
+                        <a:latin typeface="微软雅黑" charset="0"/>
+                        <a:ea typeface="微软雅黑" charset="0"/>
+                        <a:cs typeface="微软雅黑" charset="0"/>
                       </a:endParaRPr>
                     </a:p>
                   </a:txBody>
-                  <a:tcPr anchor="ctr">
+                  <a:tcPr marL="91440" marR="91440" marT="45720" marB="45720" anchor="ctr">
                     <a:lnL w="9525" cap="flat" cmpd="sng" algn="ctr">
                       <a:solidFill>
                         <a:srgbClr val="D8DBE0"/>
@@ -8598,7 +8736,7 @@
                     <a:bodyPr/>
                     <a:lstStyle/>
                     <a:p>
-                      <a:pPr marL="0" indent="0" algn="l">
+                      <a:pPr algn="l" indent="0" marL="0">
                         <a:buNone/>
                       </a:pPr>
                       <a:r>
@@ -8606,20 +8744,20 @@
                           <a:solidFill>
                             <a:srgbClr val="1F2329"/>
                           </a:solidFill>
-                          <a:latin typeface="微软雅黑" panose="020B0503020204020204" pitchFamily="34" charset="-122"/>
-                          <a:ea typeface="微软雅黑" panose="020B0503020204020204" pitchFamily="34" charset="-122"/>
-                          <a:cs typeface="微软雅黑" panose="020B0503020204020204" pitchFamily="34" charset="-120"/>
+                          <a:latin typeface="微软雅黑" pitchFamily="34" charset="0"/>
+                          <a:ea typeface="微软雅黑" pitchFamily="34" charset="-122"/>
+                          <a:cs typeface="微软雅黑" pitchFamily="34" charset="-120"/>
                         </a:rPr>
                         <a:t>按类拆成三个链表，拆表模板（2022多项式分解同族）</a:t>
                       </a:r>
                       <a:endParaRPr lang="en-US" sz="1500" dirty="0">
-                        <a:latin typeface="微软雅黑" panose="020B0503020204020204" pitchFamily="34" charset="-122"/>
-                        <a:ea typeface="微软雅黑" panose="020B0503020204020204" pitchFamily="34" charset="-122"/>
-                        <a:cs typeface="微软雅黑" panose="020B0503020204020204" pitchFamily="34" charset="-122"/>
+                        <a:latin typeface="微软雅黑" charset="0"/>
+                        <a:ea typeface="微软雅黑" charset="0"/>
+                        <a:cs typeface="微软雅黑" charset="0"/>
                       </a:endParaRPr>
                     </a:p>
                   </a:txBody>
-                  <a:tcPr anchor="ctr">
+                  <a:tcPr marL="91440" marR="91440" marT="45720" marB="45720" anchor="ctr">
                     <a:lnL w="9525" cap="flat" cmpd="sng" algn="ctr">
                       <a:solidFill>
                         <a:srgbClr val="D8DBE0"/>
@@ -8668,7 +8806,7 @@
                     <a:bodyPr/>
                     <a:lstStyle/>
                     <a:p>
-                      <a:pPr marL="0" indent="0" algn="l">
+                      <a:pPr algn="l" indent="0" marL="0">
                         <a:buNone/>
                       </a:pPr>
                       <a:r>
@@ -8676,20 +8814,20 @@
                           <a:solidFill>
                             <a:srgbClr val="1F2329"/>
                           </a:solidFill>
-                          <a:latin typeface="微软雅黑" panose="020B0503020204020204" pitchFamily="34" charset="-122"/>
-                          <a:ea typeface="微软雅黑" panose="020B0503020204020204" pitchFamily="34" charset="-122"/>
-                          <a:cs typeface="微软雅黑" panose="020B0503020204020204" pitchFamily="34" charset="-120"/>
+                          <a:latin typeface="微软雅黑" pitchFamily="34" charset="0"/>
+                          <a:ea typeface="微软雅黑" pitchFamily="34" charset="-122"/>
+                          <a:cs typeface="微软雅黑" pitchFamily="34" charset="-120"/>
                         </a:rPr>
                         <a:t>2算37</a:t>
                       </a:r>
                       <a:endParaRPr lang="en-US" sz="1500" dirty="0">
-                        <a:latin typeface="微软雅黑" panose="020B0503020204020204" pitchFamily="34" charset="-122"/>
-                        <a:ea typeface="微软雅黑" panose="020B0503020204020204" pitchFamily="34" charset="-122"/>
-                        <a:cs typeface="微软雅黑" panose="020B0503020204020204" pitchFamily="34" charset="-122"/>
+                        <a:latin typeface="微软雅黑" charset="0"/>
+                        <a:ea typeface="微软雅黑" charset="0"/>
+                        <a:cs typeface="微软雅黑" charset="0"/>
                       </a:endParaRPr>
                     </a:p>
                   </a:txBody>
-                  <a:tcPr anchor="ctr">
+                  <a:tcPr marL="91440" marR="91440" marT="45720" marB="45720" anchor="ctr">
                     <a:lnL w="9525" cap="flat" cmpd="sng" algn="ctr">
                       <a:solidFill>
                         <a:srgbClr val="D8DBE0"/>
@@ -8736,7 +8874,7 @@
                     <a:bodyPr/>
                     <a:lstStyle/>
                     <a:p>
-                      <a:pPr marL="0" indent="0" algn="l">
+                      <a:pPr algn="l" indent="0" marL="0">
                         <a:buNone/>
                       </a:pPr>
                       <a:r>
@@ -8744,20 +8882,20 @@
                           <a:solidFill>
                             <a:srgbClr val="1F2329"/>
                           </a:solidFill>
-                          <a:latin typeface="微软雅黑" panose="020B0503020204020204" pitchFamily="34" charset="-122"/>
-                          <a:ea typeface="微软雅黑" panose="020B0503020204020204" pitchFamily="34" charset="-122"/>
-                          <a:cs typeface="微软雅黑" panose="020B0503020204020204" pitchFamily="34" charset="-120"/>
+                          <a:latin typeface="微软雅黑" pitchFamily="34" charset="0"/>
+                          <a:ea typeface="微软雅黑" pitchFamily="34" charset="-122"/>
+                          <a:cs typeface="微软雅黑" pitchFamily="34" charset="-120"/>
                         </a:rPr>
                         <a:t>链表重排</a:t>
                       </a:r>
                       <a:endParaRPr lang="en-US" sz="1500" dirty="0">
-                        <a:latin typeface="微软雅黑" panose="020B0503020204020204" pitchFamily="34" charset="-122"/>
-                        <a:ea typeface="微软雅黑" panose="020B0503020204020204" pitchFamily="34" charset="-122"/>
-                        <a:cs typeface="微软雅黑" panose="020B0503020204020204" pitchFamily="34" charset="-122"/>
+                        <a:latin typeface="微软雅黑" charset="0"/>
+                        <a:ea typeface="微软雅黑" charset="0"/>
+                        <a:cs typeface="微软雅黑" charset="0"/>
                       </a:endParaRPr>
                     </a:p>
                   </a:txBody>
-                  <a:tcPr anchor="ctr">
+                  <a:tcPr marL="91440" marR="91440" marT="45720" marB="45720" anchor="ctr">
                     <a:lnL w="9525" cap="flat" cmpd="sng" algn="ctr">
                       <a:solidFill>
                         <a:srgbClr val="D8DBE0"/>
@@ -8804,7 +8942,7 @@
                     <a:bodyPr/>
                     <a:lstStyle/>
                     <a:p>
-                      <a:pPr marL="0" indent="0" algn="l">
+                      <a:pPr algn="l" indent="0" marL="0">
                         <a:buNone/>
                       </a:pPr>
                       <a:r>
@@ -8812,20 +8950,20 @@
                           <a:solidFill>
                             <a:srgbClr val="1F2329"/>
                           </a:solidFill>
-                          <a:latin typeface="微软雅黑" panose="020B0503020204020204" pitchFamily="34" charset="-122"/>
-                          <a:ea typeface="微软雅黑" panose="020B0503020204020204" pitchFamily="34" charset="-122"/>
-                          <a:cs typeface="微软雅黑" panose="020B0503020204020204" pitchFamily="34" charset="-120"/>
+                          <a:latin typeface="微软雅黑" pitchFamily="34" charset="0"/>
+                          <a:ea typeface="微软雅黑" pitchFamily="34" charset="-122"/>
+                          <a:cs typeface="微软雅黑" pitchFamily="34" charset="-120"/>
                         </a:rPr>
                         <a:t>双向循环链表奇偶位置重排，断链拼接模板</a:t>
                       </a:r>
                       <a:endParaRPr lang="en-US" sz="1500" dirty="0">
-                        <a:latin typeface="微软雅黑" panose="020B0503020204020204" pitchFamily="34" charset="-122"/>
-                        <a:ea typeface="微软雅黑" panose="020B0503020204020204" pitchFamily="34" charset="-122"/>
-                        <a:cs typeface="微软雅黑" panose="020B0503020204020204" pitchFamily="34" charset="-122"/>
+                        <a:latin typeface="微软雅黑" charset="0"/>
+                        <a:ea typeface="微软雅黑" charset="0"/>
+                        <a:cs typeface="微软雅黑" charset="0"/>
                       </a:endParaRPr>
                     </a:p>
                   </a:txBody>
-                  <a:tcPr anchor="ctr">
+                  <a:tcPr marL="91440" marR="91440" marT="45720" marB="45720" anchor="ctr">
                     <a:lnL w="9525" cap="flat" cmpd="sng" algn="ctr">
                       <a:solidFill>
                         <a:srgbClr val="D8DBE0"/>
@@ -8874,7 +9012,7 @@
                     <a:bodyPr/>
                     <a:lstStyle/>
                     <a:p>
-                      <a:pPr marL="0" indent="0" algn="l">
+                      <a:pPr algn="l" indent="0" marL="0">
                         <a:buNone/>
                       </a:pPr>
                       <a:r>
@@ -8882,20 +9020,20 @@
                           <a:solidFill>
                             <a:srgbClr val="1F2329"/>
                           </a:solidFill>
-                          <a:latin typeface="微软雅黑" panose="020B0503020204020204" pitchFamily="34" charset="-122"/>
-                          <a:ea typeface="微软雅黑" panose="020B0503020204020204" pitchFamily="34" charset="-122"/>
-                          <a:cs typeface="微软雅黑" panose="020B0503020204020204" pitchFamily="34" charset="-120"/>
+                          <a:latin typeface="微软雅黑" pitchFamily="34" charset="0"/>
+                          <a:ea typeface="微软雅黑" pitchFamily="34" charset="-122"/>
+                          <a:cs typeface="微软雅黑" pitchFamily="34" charset="-120"/>
                         </a:rPr>
                         <a:t>2算41</a:t>
                       </a:r>
                       <a:endParaRPr lang="en-US" sz="1500" dirty="0">
-                        <a:latin typeface="微软雅黑" panose="020B0503020204020204" pitchFamily="34" charset="-122"/>
-                        <a:ea typeface="微软雅黑" panose="020B0503020204020204" pitchFamily="34" charset="-122"/>
-                        <a:cs typeface="微软雅黑" panose="020B0503020204020204" pitchFamily="34" charset="-122"/>
+                        <a:latin typeface="微软雅黑" charset="0"/>
+                        <a:ea typeface="微软雅黑" charset="0"/>
+                        <a:cs typeface="微软雅黑" charset="0"/>
                       </a:endParaRPr>
                     </a:p>
                   </a:txBody>
-                  <a:tcPr anchor="ctr">
+                  <a:tcPr marL="91440" marR="91440" marT="45720" marB="45720" anchor="ctr">
                     <a:lnL w="9525" cap="flat" cmpd="sng" algn="ctr">
                       <a:solidFill>
                         <a:srgbClr val="D8DBE0"/>
@@ -8942,7 +9080,7 @@
                     <a:bodyPr/>
                     <a:lstStyle/>
                     <a:p>
-                      <a:pPr marL="0" indent="0" algn="l">
+                      <a:pPr algn="l" indent="0" marL="0">
                         <a:buNone/>
                       </a:pPr>
                       <a:r>
@@ -8950,20 +9088,20 @@
                           <a:solidFill>
                             <a:srgbClr val="1F2329"/>
                           </a:solidFill>
-                          <a:latin typeface="微软雅黑" panose="020B0503020204020204" pitchFamily="34" charset="-122"/>
-                          <a:ea typeface="微软雅黑" panose="020B0503020204020204" pitchFamily="34" charset="-122"/>
-                          <a:cs typeface="微软雅黑" panose="020B0503020204020204" pitchFamily="34" charset="-120"/>
+                          <a:latin typeface="微软雅黑" pitchFamily="34" charset="0"/>
+                          <a:ea typeface="微软雅黑" pitchFamily="34" charset="-122"/>
+                          <a:cs typeface="微软雅黑" pitchFamily="34" charset="-120"/>
                         </a:rPr>
                         <a:t>多项式求导（拆表）</a:t>
                       </a:r>
                       <a:endParaRPr lang="en-US" sz="1500" dirty="0">
-                        <a:latin typeface="微软雅黑" panose="020B0503020204020204" pitchFamily="34" charset="-122"/>
-                        <a:ea typeface="微软雅黑" panose="020B0503020204020204" pitchFamily="34" charset="-122"/>
-                        <a:cs typeface="微软雅黑" panose="020B0503020204020204" pitchFamily="34" charset="-122"/>
+                        <a:latin typeface="微软雅黑" charset="0"/>
+                        <a:ea typeface="微软雅黑" charset="0"/>
+                        <a:cs typeface="微软雅黑" charset="0"/>
                       </a:endParaRPr>
                     </a:p>
                   </a:txBody>
-                  <a:tcPr anchor="ctr">
+                  <a:tcPr marL="91440" marR="91440" marT="45720" marB="45720" anchor="ctr">
                     <a:lnL w="9525" cap="flat" cmpd="sng" algn="ctr">
                       <a:solidFill>
                         <a:srgbClr val="D8DBE0"/>
@@ -9010,7 +9148,7 @@
                     <a:bodyPr/>
                     <a:lstStyle/>
                     <a:p>
-                      <a:pPr marL="0" indent="0" algn="l">
+                      <a:pPr algn="l" indent="0" marL="0">
                         <a:buNone/>
                       </a:pPr>
                       <a:r>
@@ -9018,20 +9156,20 @@
                           <a:solidFill>
                             <a:srgbClr val="1F2329"/>
                           </a:solidFill>
-                          <a:latin typeface="微软雅黑" panose="020B0503020204020204" pitchFamily="34" charset="-122"/>
-                          <a:ea typeface="微软雅黑" panose="020B0503020204020204" pitchFamily="34" charset="-122"/>
-                          <a:cs typeface="微软雅黑" panose="020B0503020204020204" pitchFamily="34" charset="-120"/>
+                          <a:latin typeface="微软雅黑" pitchFamily="34" charset="0"/>
+                          <a:ea typeface="微软雅黑" pitchFamily="34" charset="-122"/>
+                          <a:cs typeface="微软雅黑" pitchFamily="34" charset="-120"/>
                         </a:rPr>
                         <a:t>循环链表稀疏多项式求导、利用原结点空间并释放无用结点，2022真题1同结构</a:t>
                       </a:r>
                       <a:endParaRPr lang="en-US" sz="1500" dirty="0">
-                        <a:latin typeface="微软雅黑" panose="020B0503020204020204" pitchFamily="34" charset="-122"/>
-                        <a:ea typeface="微软雅黑" panose="020B0503020204020204" pitchFamily="34" charset="-122"/>
-                        <a:cs typeface="微软雅黑" panose="020B0503020204020204" pitchFamily="34" charset="-122"/>
+                        <a:latin typeface="微软雅黑" charset="0"/>
+                        <a:ea typeface="微软雅黑" charset="0"/>
+                        <a:cs typeface="微软雅黑" charset="0"/>
                       </a:endParaRPr>
                     </a:p>
                   </a:txBody>
-                  <a:tcPr anchor="ctr">
+                  <a:tcPr marL="91440" marR="91440" marT="45720" marB="45720" anchor="ctr">
                     <a:lnL w="9525" cap="flat" cmpd="sng" algn="ctr">
                       <a:solidFill>
                         <a:srgbClr val="D8DBE0"/>
@@ -9080,7 +9218,7 @@
                     <a:bodyPr/>
                     <a:lstStyle/>
                     <a:p>
-                      <a:pPr marL="0" indent="0" algn="l">
+                      <a:pPr algn="l" indent="0" marL="0">
                         <a:buNone/>
                       </a:pPr>
                       <a:r>
@@ -9088,20 +9226,20 @@
                           <a:solidFill>
                             <a:srgbClr val="1F2329"/>
                           </a:solidFill>
-                          <a:latin typeface="微软雅黑" panose="020B0503020204020204" pitchFamily="34" charset="-122"/>
-                          <a:ea typeface="微软雅黑" panose="020B0503020204020204" pitchFamily="34" charset="-122"/>
-                          <a:cs typeface="微软雅黑" panose="020B0503020204020204" pitchFamily="34" charset="-120"/>
+                          <a:latin typeface="微软雅黑" pitchFamily="34" charset="0"/>
+                          <a:ea typeface="微软雅黑" pitchFamily="34" charset="-122"/>
+                          <a:cs typeface="微软雅黑" pitchFamily="34" charset="-120"/>
                         </a:rPr>
                         <a:t>2算42</a:t>
                       </a:r>
                       <a:endParaRPr lang="en-US" sz="1500" dirty="0">
-                        <a:latin typeface="微软雅黑" panose="020B0503020204020204" pitchFamily="34" charset="-122"/>
-                        <a:ea typeface="微软雅黑" panose="020B0503020204020204" pitchFamily="34" charset="-122"/>
-                        <a:cs typeface="微软雅黑" panose="020B0503020204020204" pitchFamily="34" charset="-122"/>
+                        <a:latin typeface="微软雅黑" charset="0"/>
+                        <a:ea typeface="微软雅黑" charset="0"/>
+                        <a:cs typeface="微软雅黑" charset="0"/>
                       </a:endParaRPr>
                     </a:p>
                   </a:txBody>
-                  <a:tcPr anchor="ctr">
+                  <a:tcPr marL="91440" marR="91440" marT="45720" marB="45720" anchor="ctr">
                     <a:lnL w="9525" cap="flat" cmpd="sng" algn="ctr">
                       <a:solidFill>
                         <a:srgbClr val="D8DBE0"/>
@@ -9148,7 +9286,7 @@
                     <a:bodyPr/>
                     <a:lstStyle/>
                     <a:p>
-                      <a:pPr marL="0" indent="0" algn="l">
+                      <a:pPr algn="l" indent="0" marL="0">
                         <a:buNone/>
                       </a:pPr>
                       <a:r>
@@ -9156,20 +9294,20 @@
                           <a:solidFill>
                             <a:srgbClr val="1F2329"/>
                           </a:solidFill>
-                          <a:latin typeface="微软雅黑" panose="020B0503020204020204" pitchFamily="34" charset="-122"/>
-                          <a:ea typeface="微软雅黑" panose="020B0503020204020204" pitchFamily="34" charset="-122"/>
-                          <a:cs typeface="微软雅黑" panose="020B0503020204020204" pitchFamily="34" charset="-120"/>
+                          <a:latin typeface="微软雅黑" pitchFamily="34" charset="0"/>
+                          <a:ea typeface="微软雅黑" pitchFamily="34" charset="-122"/>
+                          <a:cs typeface="微软雅黑" pitchFamily="34" charset="-120"/>
                         </a:rPr>
                         <a:t>多项式奇偶分解</a:t>
                       </a:r>
                       <a:endParaRPr lang="en-US" sz="1500" dirty="0">
-                        <a:latin typeface="微软雅黑" panose="020B0503020204020204" pitchFamily="34" charset="-122"/>
-                        <a:ea typeface="微软雅黑" panose="020B0503020204020204" pitchFamily="34" charset="-122"/>
-                        <a:cs typeface="微软雅黑" panose="020B0503020204020204" pitchFamily="34" charset="-122"/>
+                        <a:latin typeface="微软雅黑" charset="0"/>
+                        <a:ea typeface="微软雅黑" charset="0"/>
+                        <a:cs typeface="微软雅黑" charset="0"/>
                       </a:endParaRPr>
                     </a:p>
                   </a:txBody>
-                  <a:tcPr anchor="ctr">
+                  <a:tcPr marL="91440" marR="91440" marT="45720" marB="45720" anchor="ctr">
                     <a:lnL w="9525" cap="flat" cmpd="sng" algn="ctr">
                       <a:solidFill>
                         <a:srgbClr val="D8DBE0"/>
@@ -9216,7 +9354,7 @@
                     <a:bodyPr/>
                     <a:lstStyle/>
                     <a:p>
-                      <a:pPr marL="0" indent="0" algn="l">
+                      <a:pPr algn="l" indent="0" marL="0">
                         <a:buNone/>
                       </a:pPr>
                       <a:r>
@@ -9224,20 +9362,20 @@
                           <a:solidFill>
                             <a:srgbClr val="1F2329"/>
                           </a:solidFill>
-                          <a:latin typeface="微软雅黑" panose="020B0503020204020204" pitchFamily="34" charset="-122"/>
-                          <a:ea typeface="微软雅黑" panose="020B0503020204020204" pitchFamily="34" charset="-122"/>
-                          <a:cs typeface="微软雅黑" panose="020B0503020204020204" pitchFamily="34" charset="-120"/>
+                          <a:latin typeface="微软雅黑" pitchFamily="34" charset="0"/>
+                          <a:ea typeface="微软雅黑" pitchFamily="34" charset="-122"/>
+                          <a:cs typeface="微软雅黑" pitchFamily="34" charset="-120"/>
                         </a:rPr>
                         <a:t>循环链表多项式按奇偶拆分并利用原空间，2022真题1原题</a:t>
                       </a:r>
                       <a:endParaRPr lang="en-US" sz="1500" dirty="0">
-                        <a:latin typeface="微软雅黑" panose="020B0503020204020204" pitchFamily="34" charset="-122"/>
-                        <a:ea typeface="微软雅黑" panose="020B0503020204020204" pitchFamily="34" charset="-122"/>
-                        <a:cs typeface="微软雅黑" panose="020B0503020204020204" pitchFamily="34" charset="-122"/>
+                        <a:latin typeface="微软雅黑" charset="0"/>
+                        <a:ea typeface="微软雅黑" charset="0"/>
+                        <a:cs typeface="微软雅黑" charset="0"/>
                       </a:endParaRPr>
                     </a:p>
                   </a:txBody>
-                  <a:tcPr anchor="ctr">
+                  <a:tcPr marL="91440" marR="91440" marT="45720" marB="45720" anchor="ctr">
                     <a:lnL w="9525" cap="flat" cmpd="sng" algn="ctr">
                       <a:solidFill>
                         <a:srgbClr val="D8DBE0"/>
@@ -9294,7 +9432,7 @@
 
 <file path=ppt/slides/slide7.xml><?xml version="1.0" encoding="utf-8"?>
 <p:sld xmlns:a="http://schemas.openxmlformats.org/drawingml/2006/main" xmlns:r="http://schemas.openxmlformats.org/officeDocument/2006/relationships" xmlns:p="http://schemas.openxmlformats.org/presentationml/2006/main">
-  <p:cSld>
+  <p:cSld name="Slide 7">
     <p:bg>
       <p:bgPr>
         <a:blipFill dpi="0" rotWithShape="1">
@@ -9338,12 +9476,13 @@
             <a:avLst/>
           </a:prstGeom>
           <a:noFill/>
+          <a:ln/>
         </p:spPr>
         <p:txBody>
           <a:bodyPr wrap="square" rtlCol="0" anchor="ctr"/>
           <a:lstStyle/>
           <a:p>
-            <a:pPr marL="0" indent="0" algn="r">
+            <a:pPr algn="r" indent="0" marL="0">
               <a:buNone/>
             </a:pPr>
             <a:r>
@@ -9351,11 +9490,11 @@
                 <a:solidFill>
                   <a:srgbClr val="8A9099"/>
                 </a:solidFill>
-                <a:latin typeface="微软雅黑" panose="020B0503020204020204" pitchFamily="34" charset="-122"/>
-                <a:ea typeface="微软雅黑" panose="020B0503020204020204" pitchFamily="34" charset="-122"/>
-                <a:cs typeface="微软雅黑" panose="020B0503020204020204" pitchFamily="34" charset="-120"/>
+                <a:latin typeface="微软雅黑" pitchFamily="34" charset="0"/>
+                <a:ea typeface="微软雅黑" pitchFamily="34" charset="-122"/>
+                <a:cs typeface="微软雅黑" pitchFamily="34" charset="-120"/>
               </a:rPr>
-              <a:t>8 / 9</a:t>
+              <a:t>7 / 9</a:t>
             </a:r>
             <a:endParaRPr lang="en-US" sz="1000" dirty="0"/>
           </a:p>
@@ -9376,12 +9515,13 @@
             <a:avLst/>
           </a:prstGeom>
           <a:noFill/>
+          <a:ln/>
         </p:spPr>
         <p:txBody>
           <a:bodyPr wrap="square" rtlCol="0" anchor="ctr"/>
           <a:lstStyle/>
           <a:p>
-            <a:pPr marL="0" indent="0" algn="l">
+            <a:pPr algn="l" indent="0" marL="0">
               <a:buNone/>
             </a:pPr>
             <a:r>
@@ -9389,11 +9529,11 @@
                 <a:solidFill>
                   <a:srgbClr val="1F4E9C"/>
                 </a:solidFill>
-                <a:latin typeface="微软雅黑" panose="020B0503020204020204" pitchFamily="34" charset="-122"/>
-                <a:ea typeface="微软雅黑" panose="020B0503020204020204" pitchFamily="34" charset="-122"/>
-                <a:cs typeface="微软雅黑" panose="020B0503020204020204" pitchFamily="34" charset="-120"/>
+                <a:latin typeface="微软雅黑" pitchFamily="34" charset="0"/>
+                <a:ea typeface="微软雅黑" pitchFamily="34" charset="-122"/>
+                <a:cs typeface="微软雅黑" pitchFamily="34" charset="-120"/>
               </a:rPr>
-              <a:t>完全不做</a:t>
+              <a:t>可做可不做</a:t>
             </a:r>
             <a:endParaRPr lang="en-US" sz="1400" dirty="0"/>
           </a:p>
@@ -9414,12 +9554,13 @@
             <a:avLst/>
           </a:prstGeom>
           <a:noFill/>
+          <a:ln/>
         </p:spPr>
         <p:txBody>
           <a:bodyPr wrap="square" rtlCol="0" anchor="ctr"/>
           <a:lstStyle/>
           <a:p>
-            <a:pPr marL="0" indent="0" algn="l">
+            <a:pPr algn="l" indent="0" marL="0">
               <a:buNone/>
             </a:pPr>
             <a:r>
@@ -9427,11 +9568,11 @@
                 <a:solidFill>
                   <a:srgbClr val="1F2329"/>
                 </a:solidFill>
-                <a:latin typeface="微软雅黑" panose="020B0503020204020204" pitchFamily="34" charset="-122"/>
-                <a:ea typeface="微软雅黑" panose="020B0503020204020204" pitchFamily="34" charset="-122"/>
-                <a:cs typeface="微软雅黑" panose="020B0503020204020204" pitchFamily="34" charset="-120"/>
+                <a:latin typeface="微软雅黑" pitchFamily="34" charset="0"/>
+                <a:ea typeface="微软雅黑" pitchFamily="34" charset="-122"/>
+                <a:cs typeface="微软雅黑" pitchFamily="34" charset="-120"/>
               </a:rPr>
-              <a:t>完全不做清单</a:t>
+              <a:t>可做可不做清单</a:t>
             </a:r>
             <a:endParaRPr lang="en-US" sz="2800" dirty="0"/>
           </a:p>
@@ -9439,11 +9580,17 @@
       </p:sp>
       <p:graphicFrame>
         <p:nvGraphicFramePr>
-          <p:cNvPr id="9" name="Table 0"/>
+          <p:cNvPr id="8" name="Table 0"/>
           <p:cNvGraphicFramePr>
             <a:graphicFrameLocks noGrp="1"/>
           </p:cNvGraphicFramePr>
-          <p:nvPr/>
+          <p:nvPr>
+            <p:extLst>
+              <p:ext uri="{D42A27DB-BD31-4B8C-83A1-F6EECF244321}">
+                <p14:modId xmlns:p14="http://schemas.microsoft.com/office/powerpoint/2010/main" val="1579011935"/>
+              </p:ext>
+            </p:extLst>
+          </p:nvPr>
         </p:nvGraphicFramePr>
         <p:xfrm>
           <a:off x="822960" y="2395728"/>
@@ -9463,7 +9610,7 @@
                     <a:bodyPr/>
                     <a:lstStyle/>
                     <a:p>
-                      <a:pPr marL="0" indent="0" algn="l">
+                      <a:pPr algn="l" indent="0" marL="0">
                         <a:buNone/>
                       </a:pPr>
                       <a:r>
@@ -9471,20 +9618,20 @@
                           <a:solidFill>
                             <a:srgbClr val="1F4E9C"/>
                           </a:solidFill>
-                          <a:latin typeface="微软雅黑" panose="020B0503020204020204" pitchFamily="34" charset="-122"/>
-                          <a:ea typeface="微软雅黑" panose="020B0503020204020204" pitchFamily="34" charset="-122"/>
-                          <a:cs typeface="微软雅黑" panose="020B0503020204020204" pitchFamily="34" charset="-120"/>
+                          <a:latin typeface="微软雅黑" pitchFamily="34" charset="0"/>
+                          <a:ea typeface="微软雅黑" pitchFamily="34" charset="-122"/>
+                          <a:cs typeface="微软雅黑" pitchFamily="34" charset="-120"/>
                         </a:rPr>
-                        <a:t>内容</a:t>
+                        <a:t>分组</a:t>
                       </a:r>
                       <a:endParaRPr lang="en-US" sz="1500" dirty="0">
-                        <a:latin typeface="微软雅黑" panose="020B0503020204020204" pitchFamily="34" charset="-122"/>
-                        <a:ea typeface="微软雅黑" panose="020B0503020204020204" pitchFamily="34" charset="-122"/>
-                        <a:cs typeface="微软雅黑" panose="020B0503020204020204" pitchFamily="34" charset="-122"/>
+                        <a:latin typeface="微软雅黑" charset="0"/>
+                        <a:ea typeface="微软雅黑" charset="0"/>
+                        <a:cs typeface="微软雅黑" charset="0"/>
                       </a:endParaRPr>
                     </a:p>
                   </a:txBody>
-                  <a:tcPr anchor="ctr">
+                  <a:tcPr marL="91440" marR="91440" marT="45720" marB="45720" anchor="ctr">
                     <a:lnL w="9525" cap="flat" cmpd="sng" algn="ctr">
                       <a:solidFill>
                         <a:srgbClr val="D8DBE0"/>
@@ -9531,7 +9678,7 @@
                     <a:bodyPr/>
                     <a:lstStyle/>
                     <a:p>
-                      <a:pPr marL="0" indent="0" algn="l">
+                      <a:pPr algn="l" indent="0" marL="0">
                         <a:buNone/>
                       </a:pPr>
                       <a:r>
@@ -9539,20 +9686,20 @@
                           <a:solidFill>
                             <a:srgbClr val="1F4E9C"/>
                           </a:solidFill>
-                          <a:latin typeface="微软雅黑" panose="020B0503020204020204" pitchFamily="34" charset="-122"/>
-                          <a:ea typeface="微软雅黑" panose="020B0503020204020204" pitchFamily="34" charset="-122"/>
-                          <a:cs typeface="微软雅黑" panose="020B0503020204020204" pitchFamily="34" charset="-120"/>
+                          <a:latin typeface="微软雅黑" pitchFamily="34" charset="0"/>
+                          <a:ea typeface="微软雅黑" pitchFamily="34" charset="-122"/>
+                          <a:cs typeface="微软雅黑" pitchFamily="34" charset="-120"/>
                         </a:rPr>
                         <a:t>题号</a:t>
                       </a:r>
                       <a:endParaRPr lang="en-US" sz="1500" dirty="0">
-                        <a:latin typeface="微软雅黑" panose="020B0503020204020204" pitchFamily="34" charset="-122"/>
-                        <a:ea typeface="微软雅黑" panose="020B0503020204020204" pitchFamily="34" charset="-122"/>
-                        <a:cs typeface="微软雅黑" panose="020B0503020204020204" pitchFamily="34" charset="-122"/>
+                        <a:latin typeface="微软雅黑" charset="0"/>
+                        <a:ea typeface="微软雅黑" charset="0"/>
+                        <a:cs typeface="微软雅黑" charset="0"/>
                       </a:endParaRPr>
                     </a:p>
                   </a:txBody>
-                  <a:tcPr anchor="ctr">
+                  <a:tcPr marL="91440" marR="91440" marT="45720" marB="45720" anchor="ctr">
                     <a:lnL w="9525" cap="flat" cmpd="sng" algn="ctr">
                       <a:solidFill>
                         <a:srgbClr val="D8DBE0"/>
@@ -9601,7 +9748,7 @@
                     <a:bodyPr/>
                     <a:lstStyle/>
                     <a:p>
-                      <a:pPr marL="0" indent="0" algn="l">
+                      <a:pPr algn="l" indent="0" marL="0">
                         <a:buNone/>
                       </a:pPr>
                       <a:r>
@@ -9609,20 +9756,20 @@
                           <a:solidFill>
                             <a:srgbClr val="1F2329"/>
                           </a:solidFill>
-                          <a:latin typeface="微软雅黑" panose="020B0503020204020204" pitchFamily="34" charset="-122"/>
-                          <a:ea typeface="微软雅黑" panose="020B0503020204020204" pitchFamily="34" charset="-122"/>
-                          <a:cs typeface="微软雅黑" panose="020B0503020204020204" pitchFamily="34" charset="-120"/>
+                          <a:latin typeface="微软雅黑" pitchFamily="34" charset="0"/>
+                          <a:ea typeface="微软雅黑" pitchFamily="34" charset="-122"/>
+                          <a:cs typeface="微软雅黑" pitchFamily="34" charset="-120"/>
                         </a:rPr>
-                        <a:t>异或指针链表</a:t>
+                        <a:t>选择题：线性表概念与复杂度（存储结构特点、判…</a:t>
                       </a:r>
                       <a:endParaRPr lang="en-US" sz="1500" dirty="0">
-                        <a:latin typeface="微软雅黑" panose="020B0503020204020204" pitchFamily="34" charset="-122"/>
-                        <a:ea typeface="微软雅黑" panose="020B0503020204020204" pitchFamily="34" charset="-122"/>
-                        <a:cs typeface="微软雅黑" panose="020B0503020204020204" pitchFamily="34" charset="-122"/>
+                        <a:latin typeface="微软雅黑" charset="0"/>
+                        <a:ea typeface="微软雅黑" charset="0"/>
+                        <a:cs typeface="微软雅黑" charset="0"/>
                       </a:endParaRPr>
                     </a:p>
                   </a:txBody>
-                  <a:tcPr anchor="ctr">
+                  <a:tcPr marL="91440" marR="91440" marT="45720" marB="45720" anchor="ctr">
                     <a:lnL w="9525" cap="flat" cmpd="sng" algn="ctr">
                       <a:solidFill>
                         <a:srgbClr val="D8DBE0"/>
@@ -9669,7 +9816,7 @@
                     <a:bodyPr/>
                     <a:lstStyle/>
                     <a:p>
-                      <a:pPr marL="0" indent="0" algn="l">
+                      <a:pPr algn="l" indent="0" marL="0">
                         <a:buNone/>
                       </a:pPr>
                       <a:r>
@@ -9677,20 +9824,434 @@
                           <a:solidFill>
                             <a:srgbClr val="1F2329"/>
                           </a:solidFill>
-                          <a:latin typeface="微软雅黑" panose="020B0503020204020204" pitchFamily="34" charset="-122"/>
-                          <a:ea typeface="微软雅黑" panose="020B0503020204020204" pitchFamily="34" charset="-122"/>
-                          <a:cs typeface="微软雅黑" panose="020B0503020204020204" pitchFamily="34" charset="-120"/>
+                          <a:latin typeface="微软雅黑" pitchFamily="34" charset="0"/>
+                          <a:ea typeface="微软雅黑" pitchFamily="34" charset="-122"/>
+                          <a:cs typeface="微软雅黑" pitchFamily="34" charset="-120"/>
                         </a:rPr>
-                        <a:t>算34—36</a:t>
+                        <a:t>选1—16、19—23</a:t>
                       </a:r>
                       <a:endParaRPr lang="en-US" sz="1500" dirty="0">
-                        <a:latin typeface="微软雅黑" panose="020B0503020204020204" pitchFamily="34" charset="-122"/>
-                        <a:ea typeface="微软雅黑" panose="020B0503020204020204" pitchFamily="34" charset="-122"/>
-                        <a:cs typeface="微软雅黑" panose="020B0503020204020204" pitchFamily="34" charset="-122"/>
+                        <a:latin typeface="微软雅黑" charset="0"/>
+                        <a:ea typeface="微软雅黑" charset="0"/>
+                        <a:cs typeface="微软雅黑" charset="0"/>
                       </a:endParaRPr>
                     </a:p>
                   </a:txBody>
-                  <a:tcPr anchor="ctr">
+                  <a:tcPr marL="91440" marR="91440" marT="45720" marB="45720" anchor="ctr">
+                    <a:lnL w="9525" cap="flat" cmpd="sng" algn="ctr">
+                      <a:solidFill>
+                        <a:srgbClr val="D8DBE0"/>
+                      </a:solidFill>
+                      <a:prstDash val="solid"/>
+                      <a:round/>
+                      <a:headEnd type="none" w="med" len="med"/>
+                      <a:tailEnd type="none" w="med" len="med"/>
+                    </a:lnL>
+                    <a:lnR w="9525" cap="flat" cmpd="sng" algn="ctr">
+                      <a:solidFill>
+                        <a:srgbClr val="D8DBE0"/>
+                      </a:solidFill>
+                      <a:prstDash val="solid"/>
+                      <a:round/>
+                      <a:headEnd type="none" w="med" len="med"/>
+                      <a:tailEnd type="none" w="med" len="med"/>
+                    </a:lnR>
+                    <a:lnT w="9525" cap="flat" cmpd="sng" algn="ctr">
+                      <a:solidFill>
+                        <a:srgbClr val="D8DBE0"/>
+                      </a:solidFill>
+                      <a:prstDash val="solid"/>
+                      <a:round/>
+                      <a:headEnd type="none" w="med" len="med"/>
+                      <a:tailEnd type="none" w="med" len="med"/>
+                    </a:lnT>
+                    <a:lnB w="9525" cap="flat" cmpd="sng" algn="ctr">
+                      <a:solidFill>
+                        <a:srgbClr val="D8DBE0"/>
+                      </a:solidFill>
+                      <a:prstDash val="solid"/>
+                      <a:round/>
+                      <a:headEnd type="none" w="med" len="med"/>
+                      <a:tailEnd type="none" w="med" len="med"/>
+                    </a:lnB>
+                    <a:solidFill>
+                      <a:srgbClr val="FFFFFF"/>
+                    </a:solidFill>
+                  </a:tcPr>
+                </a:tc>
+              </a:tr>
+              <a:tr h="420624">
+                <a:tc>
+                  <a:txBody>
+                    <a:bodyPr/>
+                    <a:lstStyle/>
+                    <a:p>
+                      <a:pPr algn="l" indent="0" marL="0">
+                        <a:buNone/>
+                      </a:pPr>
+                      <a:r>
+                        <a:rPr lang="en-US" sz="1500" dirty="0">
+                          <a:solidFill>
+                            <a:srgbClr val="1F2329"/>
+                          </a:solidFill>
+                          <a:latin typeface="微软雅黑" pitchFamily="34" charset="0"/>
+                          <a:ea typeface="微软雅黑" pitchFamily="34" charset="-122"/>
+                          <a:cs typeface="微软雅黑" pitchFamily="34" charset="-120"/>
+                        </a:rPr>
+                        <a:t>解答题：线性表概念巩固（头指针辨析、顺序链式…</a:t>
+                      </a:r>
+                      <a:endParaRPr lang="en-US" sz="1500" dirty="0">
+                        <a:latin typeface="微软雅黑" charset="0"/>
+                        <a:ea typeface="微软雅黑" charset="0"/>
+                        <a:cs typeface="微软雅黑" charset="0"/>
+                      </a:endParaRPr>
+                    </a:p>
+                  </a:txBody>
+                  <a:tcPr marL="91440" marR="91440" marT="45720" marB="45720" anchor="ctr">
+                    <a:lnL w="9525" cap="flat" cmpd="sng" algn="ctr">
+                      <a:solidFill>
+                        <a:srgbClr val="D8DBE0"/>
+                      </a:solidFill>
+                      <a:prstDash val="solid"/>
+                      <a:round/>
+                      <a:headEnd type="none" w="med" len="med"/>
+                      <a:tailEnd type="none" w="med" len="med"/>
+                    </a:lnL>
+                    <a:lnR w="9525" cap="flat" cmpd="sng" algn="ctr">
+                      <a:solidFill>
+                        <a:srgbClr val="D8DBE0"/>
+                      </a:solidFill>
+                      <a:prstDash val="solid"/>
+                      <a:round/>
+                      <a:headEnd type="none" w="med" len="med"/>
+                      <a:tailEnd type="none" w="med" len="med"/>
+                    </a:lnR>
+                    <a:lnT w="9525" cap="flat" cmpd="sng" algn="ctr">
+                      <a:solidFill>
+                        <a:srgbClr val="D8DBE0"/>
+                      </a:solidFill>
+                      <a:prstDash val="solid"/>
+                      <a:round/>
+                      <a:headEnd type="none" w="med" len="med"/>
+                      <a:tailEnd type="none" w="med" len="med"/>
+                    </a:lnT>
+                    <a:lnB w="9525" cap="flat" cmpd="sng" algn="ctr">
+                      <a:solidFill>
+                        <a:srgbClr val="D8DBE0"/>
+                      </a:solidFill>
+                      <a:prstDash val="solid"/>
+                      <a:round/>
+                      <a:headEnd type="none" w="med" len="med"/>
+                      <a:tailEnd type="none" w="med" len="med"/>
+                    </a:lnB>
+                    <a:solidFill>
+                      <a:srgbClr val="FFFFFF"/>
+                    </a:solidFill>
+                  </a:tcPr>
+                </a:tc>
+                <a:tc>
+                  <a:txBody>
+                    <a:bodyPr/>
+                    <a:lstStyle/>
+                    <a:p>
+                      <a:pPr algn="l" indent="0" marL="0">
+                        <a:buNone/>
+                      </a:pPr>
+                      <a:r>
+                        <a:rPr lang="en-US" sz="1500" dirty="0">
+                          <a:solidFill>
+                            <a:srgbClr val="1F2329"/>
+                          </a:solidFill>
+                          <a:latin typeface="微软雅黑" pitchFamily="34" charset="0"/>
+                          <a:ea typeface="微软雅黑" pitchFamily="34" charset="-122"/>
+                          <a:cs typeface="微软雅黑" pitchFamily="34" charset="-120"/>
+                        </a:rPr>
+                        <a:t>答1—3</a:t>
+                      </a:r>
+                      <a:endParaRPr lang="en-US" sz="1500" dirty="0">
+                        <a:latin typeface="微软雅黑" charset="0"/>
+                        <a:ea typeface="微软雅黑" charset="0"/>
+                        <a:cs typeface="微软雅黑" charset="0"/>
+                      </a:endParaRPr>
+                    </a:p>
+                  </a:txBody>
+                  <a:tcPr marL="91440" marR="91440" marT="45720" marB="45720" anchor="ctr">
+                    <a:lnL w="9525" cap="flat" cmpd="sng" algn="ctr">
+                      <a:solidFill>
+                        <a:srgbClr val="D8DBE0"/>
+                      </a:solidFill>
+                      <a:prstDash val="solid"/>
+                      <a:round/>
+                      <a:headEnd type="none" w="med" len="med"/>
+                      <a:tailEnd type="none" w="med" len="med"/>
+                    </a:lnL>
+                    <a:lnR w="9525" cap="flat" cmpd="sng" algn="ctr">
+                      <a:solidFill>
+                        <a:srgbClr val="D8DBE0"/>
+                      </a:solidFill>
+                      <a:prstDash val="solid"/>
+                      <a:round/>
+                      <a:headEnd type="none" w="med" len="med"/>
+                      <a:tailEnd type="none" w="med" len="med"/>
+                    </a:lnR>
+                    <a:lnT w="9525" cap="flat" cmpd="sng" algn="ctr">
+                      <a:solidFill>
+                        <a:srgbClr val="D8DBE0"/>
+                      </a:solidFill>
+                      <a:prstDash val="solid"/>
+                      <a:round/>
+                      <a:headEnd type="none" w="med" len="med"/>
+                      <a:tailEnd type="none" w="med" len="med"/>
+                    </a:lnT>
+                    <a:lnB w="9525" cap="flat" cmpd="sng" algn="ctr">
+                      <a:solidFill>
+                        <a:srgbClr val="D8DBE0"/>
+                      </a:solidFill>
+                      <a:prstDash val="solid"/>
+                      <a:round/>
+                      <a:headEnd type="none" w="med" len="med"/>
+                      <a:tailEnd type="none" w="med" len="med"/>
+                    </a:lnB>
+                    <a:solidFill>
+                      <a:srgbClr val="FFFFFF"/>
+                    </a:solidFill>
+                  </a:tcPr>
+                </a:tc>
+              </a:tr>
+              <a:tr h="420624">
+                <a:tc>
+                  <a:txBody>
+                    <a:bodyPr/>
+                    <a:lstStyle/>
+                    <a:p>
+                      <a:pPr algn="l" indent="0" marL="0">
+                        <a:buNone/>
+                      </a:pPr>
+                      <a:r>
+                        <a:rPr lang="en-US" sz="1500" dirty="0">
+                          <a:solidFill>
+                            <a:srgbClr val="1F2329"/>
+                          </a:solidFill>
+                          <a:latin typeface="微软雅黑" pitchFamily="34" charset="0"/>
+                          <a:ea typeface="微软雅黑" pitchFamily="34" charset="-122"/>
+                          <a:cs typeface="微软雅黑" pitchFamily="34" charset="-120"/>
+                        </a:rPr>
+                        <a:t>算法设计题：线性表基本操作与归并家族变式（定…</a:t>
+                      </a:r>
+                      <a:endParaRPr lang="en-US" sz="1500" dirty="0">
+                        <a:latin typeface="微软雅黑" charset="0"/>
+                        <a:ea typeface="微软雅黑" charset="0"/>
+                        <a:cs typeface="微软雅黑" charset="0"/>
+                      </a:endParaRPr>
+                    </a:p>
+                  </a:txBody>
+                  <a:tcPr marL="91440" marR="91440" marT="45720" marB="45720" anchor="ctr">
+                    <a:lnL w="9525" cap="flat" cmpd="sng" algn="ctr">
+                      <a:solidFill>
+                        <a:srgbClr val="D8DBE0"/>
+                      </a:solidFill>
+                      <a:prstDash val="solid"/>
+                      <a:round/>
+                      <a:headEnd type="none" w="med" len="med"/>
+                      <a:tailEnd type="none" w="med" len="med"/>
+                    </a:lnL>
+                    <a:lnR w="9525" cap="flat" cmpd="sng" algn="ctr">
+                      <a:solidFill>
+                        <a:srgbClr val="D8DBE0"/>
+                      </a:solidFill>
+                      <a:prstDash val="solid"/>
+                      <a:round/>
+                      <a:headEnd type="none" w="med" len="med"/>
+                      <a:tailEnd type="none" w="med" len="med"/>
+                    </a:lnR>
+                    <a:lnT w="9525" cap="flat" cmpd="sng" algn="ctr">
+                      <a:solidFill>
+                        <a:srgbClr val="D8DBE0"/>
+                      </a:solidFill>
+                      <a:prstDash val="solid"/>
+                      <a:round/>
+                      <a:headEnd type="none" w="med" len="med"/>
+                      <a:tailEnd type="none" w="med" len="med"/>
+                    </a:lnT>
+                    <a:lnB w="9525" cap="flat" cmpd="sng" algn="ctr">
+                      <a:solidFill>
+                        <a:srgbClr val="D8DBE0"/>
+                      </a:solidFill>
+                      <a:prstDash val="solid"/>
+                      <a:round/>
+                      <a:headEnd type="none" w="med" len="med"/>
+                      <a:tailEnd type="none" w="med" len="med"/>
+                    </a:lnB>
+                    <a:solidFill>
+                      <a:srgbClr val="FFFFFF"/>
+                    </a:solidFill>
+                  </a:tcPr>
+                </a:tc>
+                <a:tc>
+                  <a:txBody>
+                    <a:bodyPr/>
+                    <a:lstStyle/>
+                    <a:p>
+                      <a:pPr algn="l" indent="0" marL="0">
+                        <a:buNone/>
+                      </a:pPr>
+                      <a:r>
+                        <a:rPr lang="en-US" sz="1500" dirty="0">
+                          <a:solidFill>
+                            <a:srgbClr val="1F2329"/>
+                          </a:solidFill>
+                          <a:latin typeface="微软雅黑" pitchFamily="34" charset="0"/>
+                          <a:ea typeface="微软雅黑" pitchFamily="34" charset="-122"/>
+                          <a:cs typeface="微软雅黑" pitchFamily="34" charset="-120"/>
+                        </a:rPr>
+                        <a:t>算1、2、5、7—11、13、14、16、18—20…</a:t>
+                      </a:r>
+                      <a:endParaRPr lang="en-US" sz="1500" dirty="0">
+                        <a:latin typeface="微软雅黑" charset="0"/>
+                        <a:ea typeface="微软雅黑" charset="0"/>
+                        <a:cs typeface="微软雅黑" charset="0"/>
+                      </a:endParaRPr>
+                    </a:p>
+                  </a:txBody>
+                  <a:tcPr marL="91440" marR="91440" marT="45720" marB="45720" anchor="ctr">
+                    <a:lnL w="9525" cap="flat" cmpd="sng" algn="ctr">
+                      <a:solidFill>
+                        <a:srgbClr val="D8DBE0"/>
+                      </a:solidFill>
+                      <a:prstDash val="solid"/>
+                      <a:round/>
+                      <a:headEnd type="none" w="med" len="med"/>
+                      <a:tailEnd type="none" w="med" len="med"/>
+                    </a:lnL>
+                    <a:lnR w="9525" cap="flat" cmpd="sng" algn="ctr">
+                      <a:solidFill>
+                        <a:srgbClr val="D8DBE0"/>
+                      </a:solidFill>
+                      <a:prstDash val="solid"/>
+                      <a:round/>
+                      <a:headEnd type="none" w="med" len="med"/>
+                      <a:tailEnd type="none" w="med" len="med"/>
+                    </a:lnR>
+                    <a:lnT w="9525" cap="flat" cmpd="sng" algn="ctr">
+                      <a:solidFill>
+                        <a:srgbClr val="D8DBE0"/>
+                      </a:solidFill>
+                      <a:prstDash val="solid"/>
+                      <a:round/>
+                      <a:headEnd type="none" w="med" len="med"/>
+                      <a:tailEnd type="none" w="med" len="med"/>
+                    </a:lnT>
+                    <a:lnB w="9525" cap="flat" cmpd="sng" algn="ctr">
+                      <a:solidFill>
+                        <a:srgbClr val="D8DBE0"/>
+                      </a:solidFill>
+                      <a:prstDash val="solid"/>
+                      <a:round/>
+                      <a:headEnd type="none" w="med" len="med"/>
+                      <a:tailEnd type="none" w="med" len="med"/>
+                    </a:lnB>
+                    <a:solidFill>
+                      <a:srgbClr val="FFFFFF"/>
+                    </a:solidFill>
+                  </a:tcPr>
+                </a:tc>
+              </a:tr>
+              <a:tr h="420624">
+                <a:tc>
+                  <a:txBody>
+                    <a:bodyPr/>
+                    <a:lstStyle/>
+                    <a:p>
+                      <a:pPr algn="l" indent="0" marL="0">
+                        <a:buNone/>
+                      </a:pPr>
+                      <a:r>
+                        <a:rPr lang="en-US" sz="1500" dirty="0">
+                          <a:solidFill>
+                            <a:srgbClr val="1F2329"/>
+                          </a:solidFill>
+                          <a:latin typeface="微软雅黑" pitchFamily="34" charset="0"/>
+                          <a:ea typeface="微软雅黑" pitchFamily="34" charset="-122"/>
+                          <a:cs typeface="微软雅黑" pitchFamily="34" charset="-120"/>
+                        </a:rPr>
+                        <a:t>（续）</a:t>
+                      </a:r>
+                      <a:endParaRPr lang="en-US" sz="1500" dirty="0">
+                        <a:latin typeface="微软雅黑" charset="0"/>
+                        <a:ea typeface="微软雅黑" charset="0"/>
+                        <a:cs typeface="微软雅黑" charset="0"/>
+                      </a:endParaRPr>
+                    </a:p>
+                  </a:txBody>
+                  <a:tcPr marL="91440" marR="91440" marT="45720" marB="45720" anchor="ctr">
+                    <a:lnL w="9525" cap="flat" cmpd="sng" algn="ctr">
+                      <a:solidFill>
+                        <a:srgbClr val="D8DBE0"/>
+                      </a:solidFill>
+                      <a:prstDash val="solid"/>
+                      <a:round/>
+                      <a:headEnd type="none" w="med" len="med"/>
+                      <a:tailEnd type="none" w="med" len="med"/>
+                    </a:lnL>
+                    <a:lnR w="9525" cap="flat" cmpd="sng" algn="ctr">
+                      <a:solidFill>
+                        <a:srgbClr val="D8DBE0"/>
+                      </a:solidFill>
+                      <a:prstDash val="solid"/>
+                      <a:round/>
+                      <a:headEnd type="none" w="med" len="med"/>
+                      <a:tailEnd type="none" w="med" len="med"/>
+                    </a:lnR>
+                    <a:lnT w="9525" cap="flat" cmpd="sng" algn="ctr">
+                      <a:solidFill>
+                        <a:srgbClr val="D8DBE0"/>
+                      </a:solidFill>
+                      <a:prstDash val="solid"/>
+                      <a:round/>
+                      <a:headEnd type="none" w="med" len="med"/>
+                      <a:tailEnd type="none" w="med" len="med"/>
+                    </a:lnT>
+                    <a:lnB w="9525" cap="flat" cmpd="sng" algn="ctr">
+                      <a:solidFill>
+                        <a:srgbClr val="D8DBE0"/>
+                      </a:solidFill>
+                      <a:prstDash val="solid"/>
+                      <a:round/>
+                      <a:headEnd type="none" w="med" len="med"/>
+                      <a:tailEnd type="none" w="med" len="med"/>
+                    </a:lnB>
+                    <a:solidFill>
+                      <a:srgbClr val="FFFFFF"/>
+                    </a:solidFill>
+                  </a:tcPr>
+                </a:tc>
+                <a:tc>
+                  <a:txBody>
+                    <a:bodyPr/>
+                    <a:lstStyle/>
+                    <a:p>
+                      <a:pPr algn="l" indent="0" marL="0">
+                        <a:buNone/>
+                      </a:pPr>
+                      <a:r>
+                        <a:rPr lang="en-US" sz="1500" dirty="0">
+                          <a:solidFill>
+                            <a:srgbClr val="1F2329"/>
+                          </a:solidFill>
+                          <a:latin typeface="微软雅黑" pitchFamily="34" charset="0"/>
+                          <a:ea typeface="微软雅黑" pitchFamily="34" charset="-122"/>
+                          <a:cs typeface="微软雅黑" pitchFamily="34" charset="-120"/>
+                        </a:rPr>
+                        <a:t>22—26、28、29、33、38—40</a:t>
+                      </a:r>
+                      <a:endParaRPr lang="en-US" sz="1500" dirty="0">
+                        <a:latin typeface="微软雅黑" charset="0"/>
+                        <a:ea typeface="微软雅黑" charset="0"/>
+                        <a:cs typeface="微软雅黑" charset="0"/>
+                      </a:endParaRPr>
+                    </a:p>
+                  </a:txBody>
+                  <a:tcPr marL="91440" marR="91440" marT="45720" marB="45720" anchor="ctr">
                     <a:lnL w="9525" cap="flat" cmpd="sng" algn="ctr">
                       <a:solidFill>
                         <a:srgbClr val="D8DBE0"/>
@@ -9747,7 +10308,7 @@
 
 <file path=ppt/slides/slide8.xml><?xml version="1.0" encoding="utf-8"?>
 <p:sld xmlns:a="http://schemas.openxmlformats.org/drawingml/2006/main" xmlns:r="http://schemas.openxmlformats.org/officeDocument/2006/relationships" xmlns:p="http://schemas.openxmlformats.org/presentationml/2006/main">
-  <p:cSld>
+  <p:cSld name="Slide 8">
     <p:bg>
       <p:bgPr>
         <a:blipFill dpi="0" rotWithShape="1">
@@ -9791,12 +10352,13 @@
             <a:avLst/>
           </a:prstGeom>
           <a:noFill/>
+          <a:ln/>
         </p:spPr>
         <p:txBody>
           <a:bodyPr wrap="square" rtlCol="0" anchor="ctr"/>
           <a:lstStyle/>
           <a:p>
-            <a:pPr marL="0" indent="0" algn="r">
+            <a:pPr algn="r" indent="0" marL="0">
               <a:buNone/>
             </a:pPr>
             <a:r>
@@ -9804,11 +10366,11 @@
                 <a:solidFill>
                   <a:srgbClr val="8A9099"/>
                 </a:solidFill>
-                <a:latin typeface="微软雅黑" panose="020B0503020204020204" pitchFamily="34" charset="-122"/>
-                <a:ea typeface="微软雅黑" panose="020B0503020204020204" pitchFamily="34" charset="-122"/>
-                <a:cs typeface="微软雅黑" panose="020B0503020204020204" pitchFamily="34" charset="-120"/>
+                <a:latin typeface="微软雅黑" pitchFamily="34" charset="0"/>
+                <a:ea typeface="微软雅黑" pitchFamily="34" charset="-122"/>
+                <a:cs typeface="微软雅黑" pitchFamily="34" charset="-120"/>
               </a:rPr>
-              <a:t>7 / 9</a:t>
+              <a:t>8 / 9</a:t>
             </a:r>
             <a:endParaRPr lang="en-US" sz="1000" dirty="0"/>
           </a:p>
@@ -9829,12 +10391,13 @@
             <a:avLst/>
           </a:prstGeom>
           <a:noFill/>
+          <a:ln/>
         </p:spPr>
         <p:txBody>
           <a:bodyPr wrap="square" rtlCol="0" anchor="ctr"/>
           <a:lstStyle/>
           <a:p>
-            <a:pPr marL="0" indent="0" algn="l">
+            <a:pPr algn="l" indent="0" marL="0">
               <a:buNone/>
             </a:pPr>
             <a:r>
@@ -9842,11 +10405,11 @@
                 <a:solidFill>
                   <a:srgbClr val="1F4E9C"/>
                 </a:solidFill>
-                <a:latin typeface="微软雅黑" panose="020B0503020204020204" pitchFamily="34" charset="-122"/>
-                <a:ea typeface="微软雅黑" panose="020B0503020204020204" pitchFamily="34" charset="-122"/>
-                <a:cs typeface="微软雅黑" panose="020B0503020204020204" pitchFamily="34" charset="-120"/>
+                <a:latin typeface="微软雅黑" pitchFamily="34" charset="0"/>
+                <a:ea typeface="微软雅黑" pitchFamily="34" charset="-122"/>
+                <a:cs typeface="微软雅黑" pitchFamily="34" charset="-120"/>
               </a:rPr>
-              <a:t>可做可不做</a:t>
+              <a:t>完全不做</a:t>
             </a:r>
             <a:endParaRPr lang="en-US" sz="1400" dirty="0"/>
           </a:p>
@@ -9867,12 +10430,13 @@
             <a:avLst/>
           </a:prstGeom>
           <a:noFill/>
+          <a:ln/>
         </p:spPr>
         <p:txBody>
           <a:bodyPr wrap="square" rtlCol="0" anchor="ctr"/>
           <a:lstStyle/>
           <a:p>
-            <a:pPr marL="0" indent="0" algn="l">
+            <a:pPr algn="l" indent="0" marL="0">
               <a:buNone/>
             </a:pPr>
             <a:r>
@@ -9880,11 +10444,11 @@
                 <a:solidFill>
                   <a:srgbClr val="1F2329"/>
                 </a:solidFill>
-                <a:latin typeface="微软雅黑" panose="020B0503020204020204" pitchFamily="34" charset="-122"/>
-                <a:ea typeface="微软雅黑" panose="020B0503020204020204" pitchFamily="34" charset="-122"/>
-                <a:cs typeface="微软雅黑" panose="020B0503020204020204" pitchFamily="34" charset="-120"/>
+                <a:latin typeface="微软雅黑" pitchFamily="34" charset="0"/>
+                <a:ea typeface="微软雅黑" pitchFamily="34" charset="-122"/>
+                <a:cs typeface="微软雅黑" pitchFamily="34" charset="-120"/>
               </a:rPr>
-              <a:t>可做可不做清单</a:t>
+              <a:t>完全不做清单</a:t>
             </a:r>
             <a:endParaRPr lang="en-US" sz="2800" dirty="0"/>
           </a:p>
@@ -9892,15 +10456,21 @@
       </p:sp>
       <p:graphicFrame>
         <p:nvGraphicFramePr>
-          <p:cNvPr id="8" name="Table 0"/>
+          <p:cNvPr id="9" name="Table 0"/>
           <p:cNvGraphicFramePr>
             <a:graphicFrameLocks noGrp="1"/>
           </p:cNvGraphicFramePr>
-          <p:nvPr/>
+          <p:nvPr>
+            <p:extLst>
+              <p:ext uri="{D42A27DB-BD31-4B8C-83A1-F6EECF244321}">
+                <p14:modId xmlns:p14="http://schemas.microsoft.com/office/powerpoint/2010/main" val="1579011935"/>
+              </p:ext>
+            </p:extLst>
+          </p:nvPr>
         </p:nvGraphicFramePr>
         <p:xfrm>
           <a:off x="822960" y="2395728"/>
-          <a:ext cx="10545775" cy="2103120"/>
+          <a:ext cx="10545775" cy="914400"/>
         </p:xfrm>
         <a:graphic>
           <a:graphicData uri="http://schemas.openxmlformats.org/drawingml/2006/table">
@@ -9916,7 +10486,7 @@
                     <a:bodyPr/>
                     <a:lstStyle/>
                     <a:p>
-                      <a:pPr marL="0" indent="0" algn="l">
+                      <a:pPr algn="l" indent="0" marL="0">
                         <a:buNone/>
                       </a:pPr>
                       <a:r>
@@ -9924,20 +10494,20 @@
                           <a:solidFill>
                             <a:srgbClr val="1F4E9C"/>
                           </a:solidFill>
-                          <a:latin typeface="微软雅黑" panose="020B0503020204020204" pitchFamily="34" charset="-122"/>
-                          <a:ea typeface="微软雅黑" panose="020B0503020204020204" pitchFamily="34" charset="-122"/>
-                          <a:cs typeface="微软雅黑" panose="020B0503020204020204" pitchFamily="34" charset="-120"/>
+                          <a:latin typeface="微软雅黑" pitchFamily="34" charset="0"/>
+                          <a:ea typeface="微软雅黑" pitchFamily="34" charset="-122"/>
+                          <a:cs typeface="微软雅黑" pitchFamily="34" charset="-120"/>
                         </a:rPr>
-                        <a:t>分组</a:t>
+                        <a:t>内容</a:t>
                       </a:r>
                       <a:endParaRPr lang="en-US" sz="1500" dirty="0">
-                        <a:latin typeface="微软雅黑" panose="020B0503020204020204" pitchFamily="34" charset="-122"/>
-                        <a:ea typeface="微软雅黑" panose="020B0503020204020204" pitchFamily="34" charset="-122"/>
-                        <a:cs typeface="微软雅黑" panose="020B0503020204020204" pitchFamily="34" charset="-122"/>
+                        <a:latin typeface="微软雅黑" charset="0"/>
+                        <a:ea typeface="微软雅黑" charset="0"/>
+                        <a:cs typeface="微软雅黑" charset="0"/>
                       </a:endParaRPr>
                     </a:p>
                   </a:txBody>
-                  <a:tcPr anchor="ctr">
+                  <a:tcPr marL="91440" marR="91440" marT="45720" marB="45720" anchor="ctr">
                     <a:lnL w="9525" cap="flat" cmpd="sng" algn="ctr">
                       <a:solidFill>
                         <a:srgbClr val="D8DBE0"/>
@@ -9984,7 +10554,7 @@
                     <a:bodyPr/>
                     <a:lstStyle/>
                     <a:p>
-                      <a:pPr marL="0" indent="0" algn="l">
+                      <a:pPr algn="l" indent="0" marL="0">
                         <a:buNone/>
                       </a:pPr>
                       <a:r>
@@ -9992,20 +10562,20 @@
                           <a:solidFill>
                             <a:srgbClr val="1F4E9C"/>
                           </a:solidFill>
-                          <a:latin typeface="微软雅黑" panose="020B0503020204020204" pitchFamily="34" charset="-122"/>
-                          <a:ea typeface="微软雅黑" panose="020B0503020204020204" pitchFamily="34" charset="-122"/>
-                          <a:cs typeface="微软雅黑" panose="020B0503020204020204" pitchFamily="34" charset="-120"/>
+                          <a:latin typeface="微软雅黑" pitchFamily="34" charset="0"/>
+                          <a:ea typeface="微软雅黑" pitchFamily="34" charset="-122"/>
+                          <a:cs typeface="微软雅黑" pitchFamily="34" charset="-120"/>
                         </a:rPr>
                         <a:t>题号</a:t>
                       </a:r>
                       <a:endParaRPr lang="en-US" sz="1500" dirty="0">
-                        <a:latin typeface="微软雅黑" panose="020B0503020204020204" pitchFamily="34" charset="-122"/>
-                        <a:ea typeface="微软雅黑" panose="020B0503020204020204" pitchFamily="34" charset="-122"/>
-                        <a:cs typeface="微软雅黑" panose="020B0503020204020204" pitchFamily="34" charset="-122"/>
+                        <a:latin typeface="微软雅黑" charset="0"/>
+                        <a:ea typeface="微软雅黑" charset="0"/>
+                        <a:cs typeface="微软雅黑" charset="0"/>
                       </a:endParaRPr>
                     </a:p>
                   </a:txBody>
-                  <a:tcPr anchor="ctr">
+                  <a:tcPr marL="91440" marR="91440" marT="45720" marB="45720" anchor="ctr">
                     <a:lnL w="9525" cap="flat" cmpd="sng" algn="ctr">
                       <a:solidFill>
                         <a:srgbClr val="D8DBE0"/>
@@ -10054,7 +10624,7 @@
                     <a:bodyPr/>
                     <a:lstStyle/>
                     <a:p>
-                      <a:pPr marL="0" indent="0" algn="l">
+                      <a:pPr algn="l" indent="0" marL="0">
                         <a:buNone/>
                       </a:pPr>
                       <a:r>
@@ -10062,20 +10632,20 @@
                           <a:solidFill>
                             <a:srgbClr val="1F2329"/>
                           </a:solidFill>
-                          <a:latin typeface="微软雅黑" panose="020B0503020204020204" pitchFamily="34" charset="-122"/>
-                          <a:ea typeface="微软雅黑" panose="020B0503020204020204" pitchFamily="34" charset="-122"/>
-                          <a:cs typeface="微软雅黑" panose="020B0503020204020204" pitchFamily="34" charset="-120"/>
+                          <a:latin typeface="微软雅黑" pitchFamily="34" charset="0"/>
+                          <a:ea typeface="微软雅黑" pitchFamily="34" charset="-122"/>
+                          <a:cs typeface="微软雅黑" pitchFamily="34" charset="-120"/>
                         </a:rPr>
-                        <a:t>选择题：线性表概念与复杂度（存储结构特点、判…</a:t>
+                        <a:t>异或指针链表</a:t>
                       </a:r>
                       <a:endParaRPr lang="en-US" sz="1500" dirty="0">
-                        <a:latin typeface="微软雅黑" panose="020B0503020204020204" pitchFamily="34" charset="-122"/>
-                        <a:ea typeface="微软雅黑" panose="020B0503020204020204" pitchFamily="34" charset="-122"/>
-                        <a:cs typeface="微软雅黑" panose="020B0503020204020204" pitchFamily="34" charset="-122"/>
+                        <a:latin typeface="微软雅黑" charset="0"/>
+                        <a:ea typeface="微软雅黑" charset="0"/>
+                        <a:cs typeface="微软雅黑" charset="0"/>
                       </a:endParaRPr>
                     </a:p>
                   </a:txBody>
-                  <a:tcPr anchor="ctr">
+                  <a:tcPr marL="91440" marR="91440" marT="45720" marB="45720" anchor="ctr">
                     <a:lnL w="9525" cap="flat" cmpd="sng" algn="ctr">
                       <a:solidFill>
                         <a:srgbClr val="D8DBE0"/>
@@ -10122,7 +10692,7 @@
                     <a:bodyPr/>
                     <a:lstStyle/>
                     <a:p>
-                      <a:pPr marL="0" indent="0" algn="l">
+                      <a:pPr algn="l" indent="0" marL="0">
                         <a:buNone/>
                       </a:pPr>
                       <a:r>
@@ -10130,434 +10700,20 @@
                           <a:solidFill>
                             <a:srgbClr val="1F2329"/>
                           </a:solidFill>
-                          <a:latin typeface="微软雅黑" panose="020B0503020204020204" pitchFamily="34" charset="-122"/>
-                          <a:ea typeface="微软雅黑" panose="020B0503020204020204" pitchFamily="34" charset="-122"/>
-                          <a:cs typeface="微软雅黑" panose="020B0503020204020204" pitchFamily="34" charset="-120"/>
+                          <a:latin typeface="微软雅黑" pitchFamily="34" charset="0"/>
+                          <a:ea typeface="微软雅黑" pitchFamily="34" charset="-122"/>
+                          <a:cs typeface="微软雅黑" pitchFamily="34" charset="-120"/>
                         </a:rPr>
-                        <a:t>选1—16、19—23</a:t>
+                        <a:t>算34—36</a:t>
                       </a:r>
                       <a:endParaRPr lang="en-US" sz="1500" dirty="0">
-                        <a:latin typeface="微软雅黑" panose="020B0503020204020204" pitchFamily="34" charset="-122"/>
-                        <a:ea typeface="微软雅黑" panose="020B0503020204020204" pitchFamily="34" charset="-122"/>
-                        <a:cs typeface="微软雅黑" panose="020B0503020204020204" pitchFamily="34" charset="-122"/>
+                        <a:latin typeface="微软雅黑" charset="0"/>
+                        <a:ea typeface="微软雅黑" charset="0"/>
+                        <a:cs typeface="微软雅黑" charset="0"/>
                       </a:endParaRPr>
                     </a:p>
                   </a:txBody>
-                  <a:tcPr anchor="ctr">
-                    <a:lnL w="9525" cap="flat" cmpd="sng" algn="ctr">
-                      <a:solidFill>
-                        <a:srgbClr val="D8DBE0"/>
-                      </a:solidFill>
-                      <a:prstDash val="solid"/>
-                      <a:round/>
-                      <a:headEnd type="none" w="med" len="med"/>
-                      <a:tailEnd type="none" w="med" len="med"/>
-                    </a:lnL>
-                    <a:lnR w="9525" cap="flat" cmpd="sng" algn="ctr">
-                      <a:solidFill>
-                        <a:srgbClr val="D8DBE0"/>
-                      </a:solidFill>
-                      <a:prstDash val="solid"/>
-                      <a:round/>
-                      <a:headEnd type="none" w="med" len="med"/>
-                      <a:tailEnd type="none" w="med" len="med"/>
-                    </a:lnR>
-                    <a:lnT w="9525" cap="flat" cmpd="sng" algn="ctr">
-                      <a:solidFill>
-                        <a:srgbClr val="D8DBE0"/>
-                      </a:solidFill>
-                      <a:prstDash val="solid"/>
-                      <a:round/>
-                      <a:headEnd type="none" w="med" len="med"/>
-                      <a:tailEnd type="none" w="med" len="med"/>
-                    </a:lnT>
-                    <a:lnB w="9525" cap="flat" cmpd="sng" algn="ctr">
-                      <a:solidFill>
-                        <a:srgbClr val="D8DBE0"/>
-                      </a:solidFill>
-                      <a:prstDash val="solid"/>
-                      <a:round/>
-                      <a:headEnd type="none" w="med" len="med"/>
-                      <a:tailEnd type="none" w="med" len="med"/>
-                    </a:lnB>
-                    <a:solidFill>
-                      <a:srgbClr val="FFFFFF"/>
-                    </a:solidFill>
-                  </a:tcPr>
-                </a:tc>
-              </a:tr>
-              <a:tr h="420624">
-                <a:tc>
-                  <a:txBody>
-                    <a:bodyPr/>
-                    <a:lstStyle/>
-                    <a:p>
-                      <a:pPr marL="0" indent="0" algn="l">
-                        <a:buNone/>
-                      </a:pPr>
-                      <a:r>
-                        <a:rPr lang="en-US" sz="1500" dirty="0">
-                          <a:solidFill>
-                            <a:srgbClr val="1F2329"/>
-                          </a:solidFill>
-                          <a:latin typeface="微软雅黑" panose="020B0503020204020204" pitchFamily="34" charset="-122"/>
-                          <a:ea typeface="微软雅黑" panose="020B0503020204020204" pitchFamily="34" charset="-122"/>
-                          <a:cs typeface="微软雅黑" panose="020B0503020204020204" pitchFamily="34" charset="-120"/>
-                        </a:rPr>
-                        <a:t>解答题：线性表概念巩固（头指针辨析、顺序链式…</a:t>
-                      </a:r>
-                      <a:endParaRPr lang="en-US" sz="1500" dirty="0">
-                        <a:latin typeface="微软雅黑" panose="020B0503020204020204" pitchFamily="34" charset="-122"/>
-                        <a:ea typeface="微软雅黑" panose="020B0503020204020204" pitchFamily="34" charset="-122"/>
-                        <a:cs typeface="微软雅黑" panose="020B0503020204020204" pitchFamily="34" charset="-122"/>
-                      </a:endParaRPr>
-                    </a:p>
-                  </a:txBody>
-                  <a:tcPr anchor="ctr">
-                    <a:lnL w="9525" cap="flat" cmpd="sng" algn="ctr">
-                      <a:solidFill>
-                        <a:srgbClr val="D8DBE0"/>
-                      </a:solidFill>
-                      <a:prstDash val="solid"/>
-                      <a:round/>
-                      <a:headEnd type="none" w="med" len="med"/>
-                      <a:tailEnd type="none" w="med" len="med"/>
-                    </a:lnL>
-                    <a:lnR w="9525" cap="flat" cmpd="sng" algn="ctr">
-                      <a:solidFill>
-                        <a:srgbClr val="D8DBE0"/>
-                      </a:solidFill>
-                      <a:prstDash val="solid"/>
-                      <a:round/>
-                      <a:headEnd type="none" w="med" len="med"/>
-                      <a:tailEnd type="none" w="med" len="med"/>
-                    </a:lnR>
-                    <a:lnT w="9525" cap="flat" cmpd="sng" algn="ctr">
-                      <a:solidFill>
-                        <a:srgbClr val="D8DBE0"/>
-                      </a:solidFill>
-                      <a:prstDash val="solid"/>
-                      <a:round/>
-                      <a:headEnd type="none" w="med" len="med"/>
-                      <a:tailEnd type="none" w="med" len="med"/>
-                    </a:lnT>
-                    <a:lnB w="9525" cap="flat" cmpd="sng" algn="ctr">
-                      <a:solidFill>
-                        <a:srgbClr val="D8DBE0"/>
-                      </a:solidFill>
-                      <a:prstDash val="solid"/>
-                      <a:round/>
-                      <a:headEnd type="none" w="med" len="med"/>
-                      <a:tailEnd type="none" w="med" len="med"/>
-                    </a:lnB>
-                    <a:solidFill>
-                      <a:srgbClr val="FFFFFF"/>
-                    </a:solidFill>
-                  </a:tcPr>
-                </a:tc>
-                <a:tc>
-                  <a:txBody>
-                    <a:bodyPr/>
-                    <a:lstStyle/>
-                    <a:p>
-                      <a:pPr marL="0" indent="0" algn="l">
-                        <a:buNone/>
-                      </a:pPr>
-                      <a:r>
-                        <a:rPr lang="en-US" sz="1500" dirty="0">
-                          <a:solidFill>
-                            <a:srgbClr val="1F2329"/>
-                          </a:solidFill>
-                          <a:latin typeface="微软雅黑" panose="020B0503020204020204" pitchFamily="34" charset="-122"/>
-                          <a:ea typeface="微软雅黑" panose="020B0503020204020204" pitchFamily="34" charset="-122"/>
-                          <a:cs typeface="微软雅黑" panose="020B0503020204020204" pitchFamily="34" charset="-120"/>
-                        </a:rPr>
-                        <a:t>答1—3</a:t>
-                      </a:r>
-                      <a:endParaRPr lang="en-US" sz="1500" dirty="0">
-                        <a:latin typeface="微软雅黑" panose="020B0503020204020204" pitchFamily="34" charset="-122"/>
-                        <a:ea typeface="微软雅黑" panose="020B0503020204020204" pitchFamily="34" charset="-122"/>
-                        <a:cs typeface="微软雅黑" panose="020B0503020204020204" pitchFamily="34" charset="-122"/>
-                      </a:endParaRPr>
-                    </a:p>
-                  </a:txBody>
-                  <a:tcPr anchor="ctr">
-                    <a:lnL w="9525" cap="flat" cmpd="sng" algn="ctr">
-                      <a:solidFill>
-                        <a:srgbClr val="D8DBE0"/>
-                      </a:solidFill>
-                      <a:prstDash val="solid"/>
-                      <a:round/>
-                      <a:headEnd type="none" w="med" len="med"/>
-                      <a:tailEnd type="none" w="med" len="med"/>
-                    </a:lnL>
-                    <a:lnR w="9525" cap="flat" cmpd="sng" algn="ctr">
-                      <a:solidFill>
-                        <a:srgbClr val="D8DBE0"/>
-                      </a:solidFill>
-                      <a:prstDash val="solid"/>
-                      <a:round/>
-                      <a:headEnd type="none" w="med" len="med"/>
-                      <a:tailEnd type="none" w="med" len="med"/>
-                    </a:lnR>
-                    <a:lnT w="9525" cap="flat" cmpd="sng" algn="ctr">
-                      <a:solidFill>
-                        <a:srgbClr val="D8DBE0"/>
-                      </a:solidFill>
-                      <a:prstDash val="solid"/>
-                      <a:round/>
-                      <a:headEnd type="none" w="med" len="med"/>
-                      <a:tailEnd type="none" w="med" len="med"/>
-                    </a:lnT>
-                    <a:lnB w="9525" cap="flat" cmpd="sng" algn="ctr">
-                      <a:solidFill>
-                        <a:srgbClr val="D8DBE0"/>
-                      </a:solidFill>
-                      <a:prstDash val="solid"/>
-                      <a:round/>
-                      <a:headEnd type="none" w="med" len="med"/>
-                      <a:tailEnd type="none" w="med" len="med"/>
-                    </a:lnB>
-                    <a:solidFill>
-                      <a:srgbClr val="FFFFFF"/>
-                    </a:solidFill>
-                  </a:tcPr>
-                </a:tc>
-              </a:tr>
-              <a:tr h="420624">
-                <a:tc>
-                  <a:txBody>
-                    <a:bodyPr/>
-                    <a:lstStyle/>
-                    <a:p>
-                      <a:pPr marL="0" indent="0" algn="l">
-                        <a:buNone/>
-                      </a:pPr>
-                      <a:r>
-                        <a:rPr lang="en-US" sz="1500" dirty="0">
-                          <a:solidFill>
-                            <a:srgbClr val="1F2329"/>
-                          </a:solidFill>
-                          <a:latin typeface="微软雅黑" panose="020B0503020204020204" pitchFamily="34" charset="-122"/>
-                          <a:ea typeface="微软雅黑" panose="020B0503020204020204" pitchFamily="34" charset="-122"/>
-                          <a:cs typeface="微软雅黑" panose="020B0503020204020204" pitchFamily="34" charset="-120"/>
-                        </a:rPr>
-                        <a:t>算法设计题：线性表基本操作与归并家族变式（定…</a:t>
-                      </a:r>
-                      <a:endParaRPr lang="en-US" sz="1500" dirty="0">
-                        <a:latin typeface="微软雅黑" panose="020B0503020204020204" pitchFamily="34" charset="-122"/>
-                        <a:ea typeface="微软雅黑" panose="020B0503020204020204" pitchFamily="34" charset="-122"/>
-                        <a:cs typeface="微软雅黑" panose="020B0503020204020204" pitchFamily="34" charset="-122"/>
-                      </a:endParaRPr>
-                    </a:p>
-                  </a:txBody>
-                  <a:tcPr anchor="ctr">
-                    <a:lnL w="9525" cap="flat" cmpd="sng" algn="ctr">
-                      <a:solidFill>
-                        <a:srgbClr val="D8DBE0"/>
-                      </a:solidFill>
-                      <a:prstDash val="solid"/>
-                      <a:round/>
-                      <a:headEnd type="none" w="med" len="med"/>
-                      <a:tailEnd type="none" w="med" len="med"/>
-                    </a:lnL>
-                    <a:lnR w="9525" cap="flat" cmpd="sng" algn="ctr">
-                      <a:solidFill>
-                        <a:srgbClr val="D8DBE0"/>
-                      </a:solidFill>
-                      <a:prstDash val="solid"/>
-                      <a:round/>
-                      <a:headEnd type="none" w="med" len="med"/>
-                      <a:tailEnd type="none" w="med" len="med"/>
-                    </a:lnR>
-                    <a:lnT w="9525" cap="flat" cmpd="sng" algn="ctr">
-                      <a:solidFill>
-                        <a:srgbClr val="D8DBE0"/>
-                      </a:solidFill>
-                      <a:prstDash val="solid"/>
-                      <a:round/>
-                      <a:headEnd type="none" w="med" len="med"/>
-                      <a:tailEnd type="none" w="med" len="med"/>
-                    </a:lnT>
-                    <a:lnB w="9525" cap="flat" cmpd="sng" algn="ctr">
-                      <a:solidFill>
-                        <a:srgbClr val="D8DBE0"/>
-                      </a:solidFill>
-                      <a:prstDash val="solid"/>
-                      <a:round/>
-                      <a:headEnd type="none" w="med" len="med"/>
-                      <a:tailEnd type="none" w="med" len="med"/>
-                    </a:lnB>
-                    <a:solidFill>
-                      <a:srgbClr val="FFFFFF"/>
-                    </a:solidFill>
-                  </a:tcPr>
-                </a:tc>
-                <a:tc>
-                  <a:txBody>
-                    <a:bodyPr/>
-                    <a:lstStyle/>
-                    <a:p>
-                      <a:pPr marL="0" indent="0" algn="l">
-                        <a:buNone/>
-                      </a:pPr>
-                      <a:r>
-                        <a:rPr lang="en-US" sz="1500" dirty="0">
-                          <a:solidFill>
-                            <a:srgbClr val="1F2329"/>
-                          </a:solidFill>
-                          <a:latin typeface="微软雅黑" panose="020B0503020204020204" pitchFamily="34" charset="-122"/>
-                          <a:ea typeface="微软雅黑" panose="020B0503020204020204" pitchFamily="34" charset="-122"/>
-                          <a:cs typeface="微软雅黑" panose="020B0503020204020204" pitchFamily="34" charset="-120"/>
-                        </a:rPr>
-                        <a:t>算1、2、5、7—11、13、14、16、18—20…</a:t>
-                      </a:r>
-                      <a:endParaRPr lang="en-US" sz="1500" dirty="0">
-                        <a:latin typeface="微软雅黑" panose="020B0503020204020204" pitchFamily="34" charset="-122"/>
-                        <a:ea typeface="微软雅黑" panose="020B0503020204020204" pitchFamily="34" charset="-122"/>
-                        <a:cs typeface="微软雅黑" panose="020B0503020204020204" pitchFamily="34" charset="-122"/>
-                      </a:endParaRPr>
-                    </a:p>
-                  </a:txBody>
-                  <a:tcPr anchor="ctr">
-                    <a:lnL w="9525" cap="flat" cmpd="sng" algn="ctr">
-                      <a:solidFill>
-                        <a:srgbClr val="D8DBE0"/>
-                      </a:solidFill>
-                      <a:prstDash val="solid"/>
-                      <a:round/>
-                      <a:headEnd type="none" w="med" len="med"/>
-                      <a:tailEnd type="none" w="med" len="med"/>
-                    </a:lnL>
-                    <a:lnR w="9525" cap="flat" cmpd="sng" algn="ctr">
-                      <a:solidFill>
-                        <a:srgbClr val="D8DBE0"/>
-                      </a:solidFill>
-                      <a:prstDash val="solid"/>
-                      <a:round/>
-                      <a:headEnd type="none" w="med" len="med"/>
-                      <a:tailEnd type="none" w="med" len="med"/>
-                    </a:lnR>
-                    <a:lnT w="9525" cap="flat" cmpd="sng" algn="ctr">
-                      <a:solidFill>
-                        <a:srgbClr val="D8DBE0"/>
-                      </a:solidFill>
-                      <a:prstDash val="solid"/>
-                      <a:round/>
-                      <a:headEnd type="none" w="med" len="med"/>
-                      <a:tailEnd type="none" w="med" len="med"/>
-                    </a:lnT>
-                    <a:lnB w="9525" cap="flat" cmpd="sng" algn="ctr">
-                      <a:solidFill>
-                        <a:srgbClr val="D8DBE0"/>
-                      </a:solidFill>
-                      <a:prstDash val="solid"/>
-                      <a:round/>
-                      <a:headEnd type="none" w="med" len="med"/>
-                      <a:tailEnd type="none" w="med" len="med"/>
-                    </a:lnB>
-                    <a:solidFill>
-                      <a:srgbClr val="FFFFFF"/>
-                    </a:solidFill>
-                  </a:tcPr>
-                </a:tc>
-              </a:tr>
-              <a:tr h="420624">
-                <a:tc>
-                  <a:txBody>
-                    <a:bodyPr/>
-                    <a:lstStyle/>
-                    <a:p>
-                      <a:pPr marL="0" indent="0" algn="l">
-                        <a:buNone/>
-                      </a:pPr>
-                      <a:r>
-                        <a:rPr lang="en-US" sz="1500" dirty="0">
-                          <a:solidFill>
-                            <a:srgbClr val="1F2329"/>
-                          </a:solidFill>
-                          <a:latin typeface="微软雅黑" panose="020B0503020204020204" pitchFamily="34" charset="-122"/>
-                          <a:ea typeface="微软雅黑" panose="020B0503020204020204" pitchFamily="34" charset="-122"/>
-                          <a:cs typeface="微软雅黑" panose="020B0503020204020204" pitchFamily="34" charset="-120"/>
-                        </a:rPr>
-                        <a:t>（续）</a:t>
-                      </a:r>
-                      <a:endParaRPr lang="en-US" sz="1500" dirty="0">
-                        <a:latin typeface="微软雅黑" panose="020B0503020204020204" pitchFamily="34" charset="-122"/>
-                        <a:ea typeface="微软雅黑" panose="020B0503020204020204" pitchFamily="34" charset="-122"/>
-                        <a:cs typeface="微软雅黑" panose="020B0503020204020204" pitchFamily="34" charset="-122"/>
-                      </a:endParaRPr>
-                    </a:p>
-                  </a:txBody>
-                  <a:tcPr anchor="ctr">
-                    <a:lnL w="9525" cap="flat" cmpd="sng" algn="ctr">
-                      <a:solidFill>
-                        <a:srgbClr val="D8DBE0"/>
-                      </a:solidFill>
-                      <a:prstDash val="solid"/>
-                      <a:round/>
-                      <a:headEnd type="none" w="med" len="med"/>
-                      <a:tailEnd type="none" w="med" len="med"/>
-                    </a:lnL>
-                    <a:lnR w="9525" cap="flat" cmpd="sng" algn="ctr">
-                      <a:solidFill>
-                        <a:srgbClr val="D8DBE0"/>
-                      </a:solidFill>
-                      <a:prstDash val="solid"/>
-                      <a:round/>
-                      <a:headEnd type="none" w="med" len="med"/>
-                      <a:tailEnd type="none" w="med" len="med"/>
-                    </a:lnR>
-                    <a:lnT w="9525" cap="flat" cmpd="sng" algn="ctr">
-                      <a:solidFill>
-                        <a:srgbClr val="D8DBE0"/>
-                      </a:solidFill>
-                      <a:prstDash val="solid"/>
-                      <a:round/>
-                      <a:headEnd type="none" w="med" len="med"/>
-                      <a:tailEnd type="none" w="med" len="med"/>
-                    </a:lnT>
-                    <a:lnB w="9525" cap="flat" cmpd="sng" algn="ctr">
-                      <a:solidFill>
-                        <a:srgbClr val="D8DBE0"/>
-                      </a:solidFill>
-                      <a:prstDash val="solid"/>
-                      <a:round/>
-                      <a:headEnd type="none" w="med" len="med"/>
-                      <a:tailEnd type="none" w="med" len="med"/>
-                    </a:lnB>
-                    <a:solidFill>
-                      <a:srgbClr val="FFFFFF"/>
-                    </a:solidFill>
-                  </a:tcPr>
-                </a:tc>
-                <a:tc>
-                  <a:txBody>
-                    <a:bodyPr/>
-                    <a:lstStyle/>
-                    <a:p>
-                      <a:pPr marL="0" indent="0" algn="l">
-                        <a:buNone/>
-                      </a:pPr>
-                      <a:r>
-                        <a:rPr lang="en-US" sz="1500" dirty="0">
-                          <a:solidFill>
-                            <a:srgbClr val="1F2329"/>
-                          </a:solidFill>
-                          <a:latin typeface="微软雅黑" panose="020B0503020204020204" pitchFamily="34" charset="-122"/>
-                          <a:ea typeface="微软雅黑" panose="020B0503020204020204" pitchFamily="34" charset="-122"/>
-                          <a:cs typeface="微软雅黑" panose="020B0503020204020204" pitchFamily="34" charset="-120"/>
-                        </a:rPr>
-                        <a:t>22—26、28、29、33、38—40</a:t>
-                      </a:r>
-                      <a:endParaRPr lang="en-US" sz="1500" dirty="0">
-                        <a:latin typeface="微软雅黑" panose="020B0503020204020204" pitchFamily="34" charset="-122"/>
-                        <a:ea typeface="微软雅黑" panose="020B0503020204020204" pitchFamily="34" charset="-122"/>
-                        <a:cs typeface="微软雅黑" panose="020B0503020204020204" pitchFamily="34" charset="-122"/>
-                      </a:endParaRPr>
-                    </a:p>
-                  </a:txBody>
-                  <a:tcPr anchor="ctr">
+                  <a:tcPr marL="91440" marR="91440" marT="45720" marB="45720" anchor="ctr">
                     <a:lnL w="9525" cap="flat" cmpd="sng" algn="ctr">
                       <a:solidFill>
                         <a:srgbClr val="D8DBE0"/>
@@ -10614,7 +10770,7 @@
 
 <file path=ppt/slides/slide9.xml><?xml version="1.0" encoding="utf-8"?>
 <p:sld xmlns:a="http://schemas.openxmlformats.org/drawingml/2006/main" xmlns:r="http://schemas.openxmlformats.org/officeDocument/2006/relationships" xmlns:p="http://schemas.openxmlformats.org/presentationml/2006/main">
-  <p:cSld>
+  <p:cSld name="Slide 9">
     <p:bg>
       <p:bgPr>
         <a:blipFill dpi="0" rotWithShape="1">
@@ -10658,12 +10814,13 @@
             <a:avLst/>
           </a:prstGeom>
           <a:noFill/>
+          <a:ln/>
         </p:spPr>
         <p:txBody>
           <a:bodyPr wrap="square" rtlCol="0" anchor="ctr"/>
           <a:lstStyle/>
           <a:p>
-            <a:pPr marL="0" indent="0" algn="r">
+            <a:pPr algn="r" indent="0" marL="0">
               <a:buNone/>
             </a:pPr>
             <a:r>
@@ -10671,9 +10828,9 @@
                 <a:solidFill>
                   <a:srgbClr val="8A9099"/>
                 </a:solidFill>
-                <a:latin typeface="微软雅黑" panose="020B0503020204020204" pitchFamily="34" charset="-122"/>
-                <a:ea typeface="微软雅黑" panose="020B0503020204020204" pitchFamily="34" charset="-122"/>
-                <a:cs typeface="微软雅黑" panose="020B0503020204020204" pitchFamily="34" charset="-120"/>
+                <a:latin typeface="微软雅黑" pitchFamily="34" charset="0"/>
+                <a:ea typeface="微软雅黑" pitchFamily="34" charset="-122"/>
+                <a:cs typeface="微软雅黑" pitchFamily="34" charset="-120"/>
               </a:rPr>
               <a:t>9 / 9</a:t>
             </a:r>
@@ -10696,12 +10853,13 @@
             <a:avLst/>
           </a:prstGeom>
           <a:noFill/>
+          <a:ln/>
         </p:spPr>
         <p:txBody>
           <a:bodyPr wrap="square" rtlCol="0" anchor="ctr"/>
           <a:lstStyle/>
           <a:p>
-            <a:pPr marL="0" indent="0" algn="l">
+            <a:pPr algn="l" indent="0" marL="0">
               <a:buNone/>
             </a:pPr>
             <a:r>
@@ -10709,9 +10867,9 @@
                 <a:solidFill>
                   <a:srgbClr val="1F4E9C"/>
                 </a:solidFill>
-                <a:latin typeface="微软雅黑" panose="020B0503020204020204" pitchFamily="34" charset="-122"/>
-                <a:ea typeface="微软雅黑" panose="020B0503020204020204" pitchFamily="34" charset="-122"/>
-                <a:cs typeface="微软雅黑" panose="020B0503020204020204" pitchFamily="34" charset="-120"/>
+                <a:latin typeface="微软雅黑" pitchFamily="34" charset="0"/>
+                <a:ea typeface="微软雅黑" pitchFamily="34" charset="-122"/>
+                <a:cs typeface="微软雅黑" pitchFamily="34" charset="-120"/>
               </a:rPr>
               <a:t>使用建议</a:t>
             </a:r>
@@ -10734,12 +10892,13 @@
             <a:avLst/>
           </a:prstGeom>
           <a:noFill/>
+          <a:ln/>
         </p:spPr>
         <p:txBody>
           <a:bodyPr wrap="square" rtlCol="0" anchor="ctr"/>
           <a:lstStyle/>
           <a:p>
-            <a:pPr marL="0" indent="0" algn="l">
+            <a:pPr algn="l" indent="0" marL="0">
               <a:buNone/>
             </a:pPr>
             <a:r>
@@ -10747,9 +10906,9 @@
                 <a:solidFill>
                   <a:srgbClr val="1F2329"/>
                 </a:solidFill>
-                <a:latin typeface="微软雅黑" panose="020B0503020204020204" pitchFamily="34" charset="-122"/>
-                <a:ea typeface="微软雅黑" panose="020B0503020204020204" pitchFamily="34" charset="-122"/>
-                <a:cs typeface="微软雅黑" panose="020B0503020204020204" pitchFamily="34" charset="-120"/>
+                <a:latin typeface="微软雅黑" pitchFamily="34" charset="0"/>
+                <a:ea typeface="微软雅黑" pitchFamily="34" charset="-122"/>
+                <a:cs typeface="微软雅黑" pitchFamily="34" charset="-120"/>
               </a:rPr>
               <a:t>第2章刷题路线</a:t>
             </a:r>
@@ -10772,12 +10931,13 @@
             <a:avLst/>
           </a:prstGeom>
           <a:noFill/>
+          <a:ln/>
         </p:spPr>
         <p:txBody>
           <a:bodyPr wrap="square" rtlCol="0" anchor="t"/>
           <a:lstStyle/>
           <a:p>
-            <a:pPr marL="0" indent="0" algn="l">
+            <a:pPr algn="l" indent="0" marL="0">
               <a:lnSpc>
                 <a:spcPct val="115000"/>
               </a:lnSpc>
@@ -10788,12 +10948,18 @@
                 <a:solidFill>
                   <a:srgbClr val="1F4E9C"/>
                 </a:solidFill>
-                <a:latin typeface="微软雅黑" panose="020B0503020204020204" pitchFamily="34" charset="-122"/>
-                <a:ea typeface="微软雅黑" panose="020B0503020204020204" pitchFamily="34" charset="-122"/>
-                <a:cs typeface="微软雅黑" panose="020B0503020204020204" pitchFamily="34" charset="-120"/>
+                <a:latin typeface="微软雅黑" pitchFamily="34" charset="0"/>
+                <a:ea typeface="微软雅黑" pitchFamily="34" charset="-122"/>
+                <a:cs typeface="微软雅黑" pitchFamily="34" charset="-120"/>
               </a:rPr>
               <a:t>•  </a:t>
             </a:r>
+            <a:pPr algn="l" indent="0" marL="0">
+              <a:lnSpc>
+                <a:spcPct val="115000"/>
+              </a:lnSpc>
+              <a:buNone/>
+            </a:pPr>
             <a:r>
               <a:rPr lang="en-US" sz="1800" dirty="0">
                 <a:solidFill>
@@ -10821,12 +10987,13 @@
             <a:avLst/>
           </a:prstGeom>
           <a:noFill/>
+          <a:ln/>
         </p:spPr>
         <p:txBody>
           <a:bodyPr wrap="square" rtlCol="0" anchor="t"/>
           <a:lstStyle/>
           <a:p>
-            <a:pPr marL="0" indent="0" algn="l">
+            <a:pPr algn="l" indent="0" marL="0">
               <a:lnSpc>
                 <a:spcPct val="115000"/>
               </a:lnSpc>
@@ -10837,12 +11004,18 @@
                 <a:solidFill>
                   <a:srgbClr val="1F4E9C"/>
                 </a:solidFill>
-                <a:latin typeface="微软雅黑" panose="020B0503020204020204" pitchFamily="34" charset="-122"/>
-                <a:ea typeface="微软雅黑" panose="020B0503020204020204" pitchFamily="34" charset="-122"/>
-                <a:cs typeface="微软雅黑" panose="020B0503020204020204" pitchFamily="34" charset="-120"/>
+                <a:latin typeface="微软雅黑" pitchFamily="34" charset="0"/>
+                <a:ea typeface="微软雅黑" pitchFamily="34" charset="-122"/>
+                <a:cs typeface="微软雅黑" pitchFamily="34" charset="-120"/>
               </a:rPr>
               <a:t>•  </a:t>
             </a:r>
+            <a:pPr algn="l" indent="0" marL="0">
+              <a:lnSpc>
+                <a:spcPct val="115000"/>
+              </a:lnSpc>
+              <a:buNone/>
+            </a:pPr>
             <a:r>
               <a:rPr lang="en-US" sz="1800" dirty="0">
                 <a:solidFill>
@@ -10870,12 +11043,13 @@
             <a:avLst/>
           </a:prstGeom>
           <a:noFill/>
+          <a:ln/>
         </p:spPr>
         <p:txBody>
           <a:bodyPr wrap="square" rtlCol="0" anchor="t"/>
           <a:lstStyle/>
           <a:p>
-            <a:pPr marL="0" indent="0" algn="l">
+            <a:pPr algn="l" indent="0" marL="0">
               <a:lnSpc>
                 <a:spcPct val="115000"/>
               </a:lnSpc>
@@ -10886,12 +11060,18 @@
                 <a:solidFill>
                   <a:srgbClr val="1F4E9C"/>
                 </a:solidFill>
-                <a:latin typeface="微软雅黑" panose="020B0503020204020204" pitchFamily="34" charset="-122"/>
-                <a:ea typeface="微软雅黑" panose="020B0503020204020204" pitchFamily="34" charset="-122"/>
-                <a:cs typeface="微软雅黑" panose="020B0503020204020204" pitchFamily="34" charset="-120"/>
+                <a:latin typeface="微软雅黑" pitchFamily="34" charset="0"/>
+                <a:ea typeface="微软雅黑" pitchFamily="34" charset="-122"/>
+                <a:cs typeface="微软雅黑" pitchFamily="34" charset="-120"/>
               </a:rPr>
               <a:t>•  </a:t>
             </a:r>
+            <a:pPr algn="l" indent="0" marL="0">
+              <a:lnSpc>
+                <a:spcPct val="115000"/>
+              </a:lnSpc>
+              <a:buNone/>
+            </a:pPr>
             <a:r>
               <a:rPr lang="en-US" sz="1800" dirty="0">
                 <a:solidFill>
@@ -10919,12 +11099,13 @@
             <a:avLst/>
           </a:prstGeom>
           <a:noFill/>
+          <a:ln/>
         </p:spPr>
         <p:txBody>
           <a:bodyPr wrap="square" rtlCol="0" anchor="t"/>
           <a:lstStyle/>
           <a:p>
-            <a:pPr marL="0" indent="0" algn="l">
+            <a:pPr algn="l" indent="0" marL="0">
               <a:buNone/>
             </a:pPr>
             <a:r>
@@ -10932,9 +11113,9 @@
                 <a:solidFill>
                   <a:srgbClr val="8A9099"/>
                 </a:solidFill>
-                <a:latin typeface="微软雅黑" panose="020B0503020204020204" pitchFamily="34" charset="-122"/>
-                <a:ea typeface="微软雅黑" panose="020B0503020204020204" pitchFamily="34" charset="-122"/>
-                <a:cs typeface="微软雅黑" panose="020B0503020204020204" pitchFamily="34" charset="-120"/>
+                <a:latin typeface="微软雅黑" pitchFamily="34" charset="0"/>
+                <a:ea typeface="微软雅黑" pitchFamily="34" charset="-122"/>
+                <a:cs typeface="微软雅黑" pitchFamily="34" charset="-120"/>
               </a:rPr>
               <a:t>知识点回看：重邮数据结构笔记「线性表」对应小节；答疑进页面底部群。</a:t>
             </a:r>
@@ -10993,7 +11174,7 @@
     </a:clrScheme>
     <a:fontScheme name="Office">
       <a:majorFont>
-        <a:latin typeface="Calibri Light"/>
+        <a:latin typeface="Calibri Light" panose="020F0302020204030204"/>
         <a:ea typeface=""/>
         <a:cs typeface=""/>
         <a:font script="Jpan" typeface="游ゴシック Light"/>
@@ -11026,9 +11207,26 @@
         <a:font script="Viet" typeface="Times New Roman"/>
         <a:font script="Uigh" typeface="Microsoft Uighur"/>
         <a:font script="Geor" typeface="Sylfaen"/>
+        <a:font script="Armn" typeface="Arial"/>
+        <a:font script="Bugi" typeface="Leelawadee UI"/>
+        <a:font script="Bopo" typeface="Microsoft JhengHei"/>
+        <a:font script="Java" typeface="Javanese Text"/>
+        <a:font script="Lisu" typeface="Segoe UI"/>
+        <a:font script="Mymr" typeface="Myanmar Text"/>
+        <a:font script="Nkoo" typeface="Ebrima"/>
+        <a:font script="Olck" typeface="Nirmala UI"/>
+        <a:font script="Osma" typeface="Ebrima"/>
+        <a:font script="Phag" typeface="Phagspa"/>
+        <a:font script="Syrn" typeface="Estrangelo Edessa"/>
+        <a:font script="Syrj" typeface="Estrangelo Edessa"/>
+        <a:font script="Syre" typeface="Estrangelo Edessa"/>
+        <a:font script="Sora" typeface="Nirmala UI"/>
+        <a:font script="Tale" typeface="Microsoft Tai Le"/>
+        <a:font script="Talu" typeface="Microsoft New Tai Lue"/>
+        <a:font script="Tfng" typeface="Ebrima"/>
       </a:majorFont>
       <a:minorFont>
-        <a:latin typeface="Calibri"/>
+        <a:latin typeface="Calibri" panose="020F0502020204030204"/>
         <a:ea typeface=""/>
         <a:cs typeface=""/>
         <a:font script="Jpan" typeface="游ゴシック"/>
@@ -11061,6 +11259,23 @@
         <a:font script="Viet" typeface="Arial"/>
         <a:font script="Uigh" typeface="Microsoft Uighur"/>
         <a:font script="Geor" typeface="Sylfaen"/>
+        <a:font script="Armn" typeface="Arial"/>
+        <a:font script="Bugi" typeface="Leelawadee UI"/>
+        <a:font script="Bopo" typeface="Microsoft JhengHei"/>
+        <a:font script="Java" typeface="Javanese Text"/>
+        <a:font script="Lisu" typeface="Segoe UI"/>
+        <a:font script="Mymr" typeface="Myanmar Text"/>
+        <a:font script="Nkoo" typeface="Ebrima"/>
+        <a:font script="Olck" typeface="Nirmala UI"/>
+        <a:font script="Osma" typeface="Ebrima"/>
+        <a:font script="Phag" typeface="Phagspa"/>
+        <a:font script="Syrn" typeface="Estrangelo Edessa"/>
+        <a:font script="Syrj" typeface="Estrangelo Edessa"/>
+        <a:font script="Syre" typeface="Estrangelo Edessa"/>
+        <a:font script="Sora" typeface="Nirmala UI"/>
+        <a:font script="Tale" typeface="Microsoft Tai Le"/>
+        <a:font script="Talu" typeface="Microsoft New Tai Lue"/>
+        <a:font script="Tfng" typeface="Ebrima"/>
       </a:minorFont>
     </a:fontScheme>
     <a:fmtScheme name="Office">
@@ -11201,265 +11416,8 @@
       </a:bgFillStyleLst>
     </a:fmtScheme>
   </a:themeElements>
-  <a:extLst>
-    <a:ext uri="{05A4C25C-085E-4340-85A3-A5531E510DB2}">
-      <thm15:themeFamily xmlns:thm15="http://schemas.microsoft.com/office/thememl/2012/main" name="Office Theme" id="{62F939B6-93AF-4DB8-9C6B-D6C7DFDC589F}" vid="{4A3C46E8-61CC-4603-A589-7422A47A8E4A}"/>
-    </a:ext>
-  </a:extLst>
-</a:theme>
-</file>
-
-<file path=ppt/theme/theme2.xml><?xml version="1.0" encoding="utf-8"?>
-<a:theme xmlns:a="http://schemas.openxmlformats.org/drawingml/2006/main" name="Office Theme">
-  <a:themeElements>
-    <a:clrScheme name="Office">
-      <a:dk1>
-        <a:sysClr val="windowText" lastClr="000000"/>
-      </a:dk1>
-      <a:lt1>
-        <a:sysClr val="window" lastClr="FFFFFF"/>
-      </a:lt1>
-      <a:dk2>
-        <a:srgbClr val="44546A"/>
-      </a:dk2>
-      <a:lt2>
-        <a:srgbClr val="E7E6E6"/>
-      </a:lt2>
-      <a:accent1>
-        <a:srgbClr val="4472C4"/>
-      </a:accent1>
-      <a:accent2>
-        <a:srgbClr val="ED7D31"/>
-      </a:accent2>
-      <a:accent3>
-        <a:srgbClr val="A5A5A5"/>
-      </a:accent3>
-      <a:accent4>
-        <a:srgbClr val="FFC000"/>
-      </a:accent4>
-      <a:accent5>
-        <a:srgbClr val="5B9BD5"/>
-      </a:accent5>
-      <a:accent6>
-        <a:srgbClr val="70AD47"/>
-      </a:accent6>
-      <a:hlink>
-        <a:srgbClr val="0563C1"/>
-      </a:hlink>
-      <a:folHlink>
-        <a:srgbClr val="954F72"/>
-      </a:folHlink>
-    </a:clrScheme>
-    <a:fontScheme name="Office">
-      <a:majorFont>
-        <a:latin typeface="Calibri Light"/>
-        <a:ea typeface=""/>
-        <a:cs typeface=""/>
-        <a:font script="Jpan" typeface="游ゴシック Light"/>
-        <a:font script="Hang" typeface="맑은 고딕"/>
-        <a:font script="Hans" typeface="等线 Light"/>
-        <a:font script="Hant" typeface="新細明體"/>
-        <a:font script="Arab" typeface="Times New Roman"/>
-        <a:font script="Hebr" typeface="Times New Roman"/>
-        <a:font script="Thai" typeface="Angsana New"/>
-        <a:font script="Ethi" typeface="Nyala"/>
-        <a:font script="Beng" typeface="Vrinda"/>
-        <a:font script="Gujr" typeface="Shruti"/>
-        <a:font script="Khmr" typeface="MoolBoran"/>
-        <a:font script="Knda" typeface="Tunga"/>
-        <a:font script="Guru" typeface="Raavi"/>
-        <a:font script="Cans" typeface="Euphemia"/>
-        <a:font script="Cher" typeface="Plantagenet Cherokee"/>
-        <a:font script="Yiii" typeface="Microsoft Yi Baiti"/>
-        <a:font script="Tibt" typeface="Microsoft Himalaya"/>
-        <a:font script="Thaa" typeface="MV Boli"/>
-        <a:font script="Deva" typeface="Mangal"/>
-        <a:font script="Telu" typeface="Gautami"/>
-        <a:font script="Taml" typeface="Latha"/>
-        <a:font script="Syrc" typeface="Estrangelo Edessa"/>
-        <a:font script="Orya" typeface="Kalinga"/>
-        <a:font script="Mlym" typeface="Kartika"/>
-        <a:font script="Laoo" typeface="DokChampa"/>
-        <a:font script="Sinh" typeface="Iskoola Pota"/>
-        <a:font script="Mong" typeface="Mongolian Baiti"/>
-        <a:font script="Viet" typeface="Times New Roman"/>
-        <a:font script="Uigh" typeface="Microsoft Uighur"/>
-        <a:font script="Geor" typeface="Sylfaen"/>
-      </a:majorFont>
-      <a:minorFont>
-        <a:latin typeface="Calibri"/>
-        <a:ea typeface=""/>
-        <a:cs typeface=""/>
-        <a:font script="Jpan" typeface="游ゴシック"/>
-        <a:font script="Hang" typeface="맑은 고딕"/>
-        <a:font script="Hans" typeface="等线"/>
-        <a:font script="Hant" typeface="新細明體"/>
-        <a:font script="Arab" typeface="Arial"/>
-        <a:font script="Hebr" typeface="Arial"/>
-        <a:font script="Thai" typeface="Cordia New"/>
-        <a:font script="Ethi" typeface="Nyala"/>
-        <a:font script="Beng" typeface="Vrinda"/>
-        <a:font script="Gujr" typeface="Shruti"/>
-        <a:font script="Khmr" typeface="DaunPenh"/>
-        <a:font script="Knda" typeface="Tunga"/>
-        <a:font script="Guru" typeface="Raavi"/>
-        <a:font script="Cans" typeface="Euphemia"/>
-        <a:font script="Cher" typeface="Plantagenet Cherokee"/>
-        <a:font script="Yiii" typeface="Microsoft Yi Baiti"/>
-        <a:font script="Tibt" typeface="Microsoft Himalaya"/>
-        <a:font script="Thaa" typeface="MV Boli"/>
-        <a:font script="Deva" typeface="Mangal"/>
-        <a:font script="Telu" typeface="Gautami"/>
-        <a:font script="Taml" typeface="Latha"/>
-        <a:font script="Syrc" typeface="Estrangelo Edessa"/>
-        <a:font script="Orya" typeface="Kalinga"/>
-        <a:font script="Mlym" typeface="Kartika"/>
-        <a:font script="Laoo" typeface="DokChampa"/>
-        <a:font script="Sinh" typeface="Iskoola Pota"/>
-        <a:font script="Mong" typeface="Mongolian Baiti"/>
-        <a:font script="Viet" typeface="Arial"/>
-        <a:font script="Uigh" typeface="Microsoft Uighur"/>
-        <a:font script="Geor" typeface="Sylfaen"/>
-      </a:minorFont>
-    </a:fontScheme>
-    <a:fmtScheme name="Office">
-      <a:fillStyleLst>
-        <a:solidFill>
-          <a:schemeClr val="phClr"/>
-        </a:solidFill>
-        <a:gradFill rotWithShape="1">
-          <a:gsLst>
-            <a:gs pos="0">
-              <a:schemeClr val="phClr">
-                <a:lumMod val="110000"/>
-                <a:satMod val="105000"/>
-                <a:tint val="67000"/>
-              </a:schemeClr>
-            </a:gs>
-            <a:gs pos="50000">
-              <a:schemeClr val="phClr">
-                <a:lumMod val="105000"/>
-                <a:satMod val="103000"/>
-                <a:tint val="73000"/>
-              </a:schemeClr>
-            </a:gs>
-            <a:gs pos="100000">
-              <a:schemeClr val="phClr">
-                <a:lumMod val="105000"/>
-                <a:satMod val="109000"/>
-                <a:tint val="81000"/>
-              </a:schemeClr>
-            </a:gs>
-          </a:gsLst>
-          <a:lin ang="5400000" scaled="0"/>
-        </a:gradFill>
-        <a:gradFill rotWithShape="1">
-          <a:gsLst>
-            <a:gs pos="0">
-              <a:schemeClr val="phClr">
-                <a:satMod val="103000"/>
-                <a:lumMod val="102000"/>
-                <a:tint val="94000"/>
-              </a:schemeClr>
-            </a:gs>
-            <a:gs pos="50000">
-              <a:schemeClr val="phClr">
-                <a:satMod val="110000"/>
-                <a:lumMod val="100000"/>
-                <a:shade val="100000"/>
-              </a:schemeClr>
-            </a:gs>
-            <a:gs pos="100000">
-              <a:schemeClr val="phClr">
-                <a:lumMod val="99000"/>
-                <a:satMod val="120000"/>
-                <a:shade val="78000"/>
-              </a:schemeClr>
-            </a:gs>
-          </a:gsLst>
-          <a:lin ang="5400000" scaled="0"/>
-        </a:gradFill>
-      </a:fillStyleLst>
-      <a:lnStyleLst>
-        <a:ln w="6350" cap="flat" cmpd="sng" algn="ctr">
-          <a:solidFill>
-            <a:schemeClr val="phClr"/>
-          </a:solidFill>
-          <a:prstDash val="solid"/>
-          <a:miter lim="800000"/>
-        </a:ln>
-        <a:ln w="12700" cap="flat" cmpd="sng" algn="ctr">
-          <a:solidFill>
-            <a:schemeClr val="phClr"/>
-          </a:solidFill>
-          <a:prstDash val="solid"/>
-          <a:miter lim="800000"/>
-        </a:ln>
-        <a:ln w="19050" cap="flat" cmpd="sng" algn="ctr">
-          <a:solidFill>
-            <a:schemeClr val="phClr"/>
-          </a:solidFill>
-          <a:prstDash val="solid"/>
-          <a:miter lim="800000"/>
-        </a:ln>
-      </a:lnStyleLst>
-      <a:effectStyleLst>
-        <a:effectStyle>
-          <a:effectLst/>
-        </a:effectStyle>
-        <a:effectStyle>
-          <a:effectLst/>
-        </a:effectStyle>
-        <a:effectStyle>
-          <a:effectLst>
-            <a:outerShdw blurRad="57150" dist="19050" dir="5400000" algn="ctr" rotWithShape="0">
-              <a:srgbClr val="000000">
-                <a:alpha val="63000"/>
-              </a:srgbClr>
-            </a:outerShdw>
-          </a:effectLst>
-        </a:effectStyle>
-      </a:effectStyleLst>
-      <a:bgFillStyleLst>
-        <a:solidFill>
-          <a:schemeClr val="phClr"/>
-        </a:solidFill>
-        <a:solidFill>
-          <a:schemeClr val="phClr">
-            <a:tint val="95000"/>
-            <a:satMod val="170000"/>
-          </a:schemeClr>
-        </a:solidFill>
-        <a:gradFill rotWithShape="1">
-          <a:gsLst>
-            <a:gs pos="0">
-              <a:schemeClr val="phClr">
-                <a:tint val="93000"/>
-                <a:satMod val="150000"/>
-                <a:shade val="98000"/>
-                <a:lumMod val="102000"/>
-              </a:schemeClr>
-            </a:gs>
-            <a:gs pos="50000">
-              <a:schemeClr val="phClr">
-                <a:tint val="98000"/>
-                <a:satMod val="130000"/>
-                <a:shade val="90000"/>
-                <a:lumMod val="103000"/>
-              </a:schemeClr>
-            </a:gs>
-            <a:gs pos="100000">
-              <a:schemeClr val="phClr">
-                <a:shade val="63000"/>
-                <a:satMod val="120000"/>
-              </a:schemeClr>
-            </a:gs>
-          </a:gsLst>
-          <a:lin ang="5400000" scaled="0"/>
-        </a:gradFill>
-      </a:bgFillStyleLst>
-    </a:fmtScheme>
-  </a:themeElements>
+  <a:objectDefaults/>
+  <a:extraClrSchemeLst/>
   <a:extLst>
     <a:ext uri="{05A4C25C-085E-4340-85A3-A5531E510DB2}">
       <thm15:themeFamily xmlns:thm15="http://schemas.microsoft.com/office/thememl/2012/main" name="Office Theme" id="{62F939B6-93AF-4DB8-9C6B-D6C7DFDC589F}" vid="{4A3C46E8-61CC-4603-A589-7422A47A8E4A}"/>
